--- a/SPRINT_13_Projecte_Final/Projecte_bicing.pptx
+++ b/SPRINT_13_Projecte_Final/Projecte_bicing.pptx
@@ -5,21 +5,23 @@
     <p:sldMasterId id="2147483648" r:id="rId1"/>
   </p:sldMasterIdLst>
   <p:notesMasterIdLst>
-    <p:notesMasterId r:id="rId14"/>
+    <p:notesMasterId r:id="rId16"/>
   </p:notesMasterIdLst>
   <p:sldIdLst>
     <p:sldId id="256" r:id="rId2"/>
-    <p:sldId id="257" r:id="rId3"/>
-    <p:sldId id="258" r:id="rId4"/>
-    <p:sldId id="259" r:id="rId5"/>
-    <p:sldId id="260" r:id="rId6"/>
-    <p:sldId id="261" r:id="rId7"/>
-    <p:sldId id="262" r:id="rId8"/>
-    <p:sldId id="269" r:id="rId9"/>
-    <p:sldId id="268" r:id="rId10"/>
-    <p:sldId id="270" r:id="rId11"/>
-    <p:sldId id="266" r:id="rId12"/>
-    <p:sldId id="267" r:id="rId13"/>
+    <p:sldId id="271" r:id="rId3"/>
+    <p:sldId id="257" r:id="rId4"/>
+    <p:sldId id="272" r:id="rId5"/>
+    <p:sldId id="258" r:id="rId6"/>
+    <p:sldId id="259" r:id="rId7"/>
+    <p:sldId id="260" r:id="rId8"/>
+    <p:sldId id="261" r:id="rId9"/>
+    <p:sldId id="262" r:id="rId10"/>
+    <p:sldId id="269" r:id="rId11"/>
+    <p:sldId id="274" r:id="rId12"/>
+    <p:sldId id="270" r:id="rId13"/>
+    <p:sldId id="266" r:id="rId14"/>
+    <p:sldId id="267" r:id="rId15"/>
   </p:sldIdLst>
   <p:sldSz cx="9144000" cy="5143500" type="screen16x9"/>
   <p:notesSz cx="5143500" cy="9144000"/>
@@ -340,6 +342,222 @@
         <p:cNvPr id="1" name="">
           <a:extLst>
             <a:ext uri="{FF2B5EF4-FFF2-40B4-BE49-F238E27FC236}">
+              <a16:creationId xmlns:a16="http://schemas.microsoft.com/office/drawing/2014/main" id="{AAE4F6F1-D9E0-E688-9314-685D7EA340F9}"/>
+            </a:ext>
+          </a:extLst>
+        </p:cNvPr>
+        <p:cNvGrpSpPr/>
+        <p:nvPr/>
+      </p:nvGrpSpPr>
+      <p:grpSpPr>
+        <a:xfrm>
+          <a:off x="0" y="0"/>
+          <a:ext cx="0" cy="0"/>
+          <a:chOff x="0" y="0"/>
+          <a:chExt cx="0" cy="0"/>
+        </a:xfrm>
+      </p:grpSpPr>
+      <p:sp>
+        <p:nvSpPr>
+          <p:cNvPr id="2" name="Slide Image Placeholder 1">
+            <a:extLst>
+              <a:ext uri="{FF2B5EF4-FFF2-40B4-BE49-F238E27FC236}">
+                <a16:creationId xmlns:a16="http://schemas.microsoft.com/office/drawing/2014/main" id="{72142036-6B6E-4606-FE79-C202E0D1F7B4}"/>
+              </a:ext>
+            </a:extLst>
+          </p:cNvPr>
+          <p:cNvSpPr>
+            <a:spLocks noGrp="1" noRot="1" noChangeAspect="1"/>
+          </p:cNvSpPr>
+          <p:nvPr>
+            <p:ph type="sldImg"/>
+          </p:nvPr>
+        </p:nvSpPr>
+        <p:spPr/>
+      </p:sp>
+      <p:sp>
+        <p:nvSpPr>
+          <p:cNvPr id="3" name="Notes Placeholder 2">
+            <a:extLst>
+              <a:ext uri="{FF2B5EF4-FFF2-40B4-BE49-F238E27FC236}">
+                <a16:creationId xmlns:a16="http://schemas.microsoft.com/office/drawing/2014/main" id="{30855812-68FB-40F9-7853-B343D776E84E}"/>
+              </a:ext>
+            </a:extLst>
+          </p:cNvPr>
+          <p:cNvSpPr>
+            <a:spLocks noGrp="1"/>
+          </p:cNvSpPr>
+          <p:nvPr>
+            <p:ph type="body" idx="1"/>
+          </p:nvPr>
+        </p:nvSpPr>
+        <p:spPr/>
+        <p:txBody>
+          <a:bodyPr/>
+          <a:lstStyle/>
+          <a:p>
+            <a:endParaRPr lang="en-US" dirty="0"/>
+          </a:p>
+        </p:txBody>
+      </p:sp>
+      <p:sp>
+        <p:nvSpPr>
+          <p:cNvPr id="4" name="Slide Number Placeholder 3">
+            <a:extLst>
+              <a:ext uri="{FF2B5EF4-FFF2-40B4-BE49-F238E27FC236}">
+                <a16:creationId xmlns:a16="http://schemas.microsoft.com/office/drawing/2014/main" id="{DC4336F1-DF1E-5406-BDB3-F73B738C96F0}"/>
+              </a:ext>
+            </a:extLst>
+          </p:cNvPr>
+          <p:cNvSpPr>
+            <a:spLocks noGrp="1"/>
+          </p:cNvSpPr>
+          <p:nvPr>
+            <p:ph type="sldNum" sz="quarter" idx="10"/>
+          </p:nvPr>
+        </p:nvSpPr>
+        <p:spPr/>
+        <p:txBody>
+          <a:bodyPr/>
+          <a:lstStyle/>
+          <a:p>
+            <a:fld id="{F7021451-1387-4CA6-816F-3879F97B5CBC}" type="slidenum">
+              <a:rPr lang="en-US"/>
+              <a:t>10</a:t>
+            </a:fld>
+            <a:endParaRPr lang="en-US"/>
+          </a:p>
+        </p:txBody>
+      </p:sp>
+    </p:spTree>
+    <p:extLst>
+      <p:ext uri="{BB962C8B-B14F-4D97-AF65-F5344CB8AC3E}">
+        <p14:creationId xmlns:p14="http://schemas.microsoft.com/office/powerpoint/2010/main" val="1470677379"/>
+      </p:ext>
+    </p:extLst>
+  </p:cSld>
+  <p:clrMapOvr>
+    <a:masterClrMapping/>
+  </p:clrMapOvr>
+</p:notes>
+</file>
+
+<file path=ppt/notesSlides/notesSlide11.xml><?xml version="1.0" encoding="utf-8"?>
+<p:notes xmlns:a="http://schemas.openxmlformats.org/drawingml/2006/main" xmlns:r="http://schemas.openxmlformats.org/officeDocument/2006/relationships" xmlns:p="http://schemas.openxmlformats.org/presentationml/2006/main">
+  <p:cSld>
+    <p:spTree>
+      <p:nvGrpSpPr>
+        <p:cNvPr id="1" name="">
+          <a:extLst>
+            <a:ext uri="{FF2B5EF4-FFF2-40B4-BE49-F238E27FC236}">
+              <a16:creationId xmlns:a16="http://schemas.microsoft.com/office/drawing/2014/main" id="{0FB75BC2-202E-CDB2-607B-A3E44F027A7C}"/>
+            </a:ext>
+          </a:extLst>
+        </p:cNvPr>
+        <p:cNvGrpSpPr/>
+        <p:nvPr/>
+      </p:nvGrpSpPr>
+      <p:grpSpPr>
+        <a:xfrm>
+          <a:off x="0" y="0"/>
+          <a:ext cx="0" cy="0"/>
+          <a:chOff x="0" y="0"/>
+          <a:chExt cx="0" cy="0"/>
+        </a:xfrm>
+      </p:grpSpPr>
+      <p:sp>
+        <p:nvSpPr>
+          <p:cNvPr id="2" name="Slide Image Placeholder 1">
+            <a:extLst>
+              <a:ext uri="{FF2B5EF4-FFF2-40B4-BE49-F238E27FC236}">
+                <a16:creationId xmlns:a16="http://schemas.microsoft.com/office/drawing/2014/main" id="{27FAEBCD-2FB1-6C04-508F-F92CD243FF27}"/>
+              </a:ext>
+            </a:extLst>
+          </p:cNvPr>
+          <p:cNvSpPr>
+            <a:spLocks noGrp="1" noRot="1" noChangeAspect="1"/>
+          </p:cNvSpPr>
+          <p:nvPr>
+            <p:ph type="sldImg"/>
+          </p:nvPr>
+        </p:nvSpPr>
+        <p:spPr/>
+      </p:sp>
+      <p:sp>
+        <p:nvSpPr>
+          <p:cNvPr id="3" name="Notes Placeholder 2">
+            <a:extLst>
+              <a:ext uri="{FF2B5EF4-FFF2-40B4-BE49-F238E27FC236}">
+                <a16:creationId xmlns:a16="http://schemas.microsoft.com/office/drawing/2014/main" id="{C31F1E15-128D-FA68-C44E-3559A86B6EB4}"/>
+              </a:ext>
+            </a:extLst>
+          </p:cNvPr>
+          <p:cNvSpPr>
+            <a:spLocks noGrp="1"/>
+          </p:cNvSpPr>
+          <p:nvPr>
+            <p:ph type="body" idx="1"/>
+          </p:nvPr>
+        </p:nvSpPr>
+        <p:spPr/>
+        <p:txBody>
+          <a:bodyPr/>
+          <a:lstStyle/>
+          <a:p>
+            <a:endParaRPr lang="en-US" dirty="0"/>
+          </a:p>
+        </p:txBody>
+      </p:sp>
+      <p:sp>
+        <p:nvSpPr>
+          <p:cNvPr id="4" name="Slide Number Placeholder 3">
+            <a:extLst>
+              <a:ext uri="{FF2B5EF4-FFF2-40B4-BE49-F238E27FC236}">
+                <a16:creationId xmlns:a16="http://schemas.microsoft.com/office/drawing/2014/main" id="{9E4F1B09-709E-423E-1907-D9D7EDC912D5}"/>
+              </a:ext>
+            </a:extLst>
+          </p:cNvPr>
+          <p:cNvSpPr>
+            <a:spLocks noGrp="1"/>
+          </p:cNvSpPr>
+          <p:nvPr>
+            <p:ph type="sldNum" sz="quarter" idx="10"/>
+          </p:nvPr>
+        </p:nvSpPr>
+        <p:spPr/>
+        <p:txBody>
+          <a:bodyPr/>
+          <a:lstStyle/>
+          <a:p>
+            <a:fld id="{F7021451-1387-4CA6-816F-3879F97B5CBC}" type="slidenum">
+              <a:rPr lang="en-US"/>
+              <a:t>11</a:t>
+            </a:fld>
+            <a:endParaRPr lang="en-US"/>
+          </a:p>
+        </p:txBody>
+      </p:sp>
+    </p:spTree>
+    <p:extLst>
+      <p:ext uri="{BB962C8B-B14F-4D97-AF65-F5344CB8AC3E}">
+        <p14:creationId xmlns:p14="http://schemas.microsoft.com/office/powerpoint/2010/main" val="2268124094"/>
+      </p:ext>
+    </p:extLst>
+  </p:cSld>
+  <p:clrMapOvr>
+    <a:masterClrMapping/>
+  </p:clrMapOvr>
+</p:notes>
+</file>
+
+<file path=ppt/notesSlides/notesSlide12.xml><?xml version="1.0" encoding="utf-8"?>
+<p:notes xmlns:a="http://schemas.openxmlformats.org/drawingml/2006/main" xmlns:r="http://schemas.openxmlformats.org/officeDocument/2006/relationships" xmlns:p="http://schemas.openxmlformats.org/presentationml/2006/main">
+  <p:cSld>
+    <p:spTree>
+      <p:nvGrpSpPr>
+        <p:cNvPr id="1" name="">
+          <a:extLst>
+            <a:ext uri="{FF2B5EF4-FFF2-40B4-BE49-F238E27FC236}">
               <a16:creationId xmlns:a16="http://schemas.microsoft.com/office/drawing/2014/main" id="{C16148E8-299B-0E45-A994-0D75597DFDAC}"/>
             </a:ext>
           </a:extLst>
@@ -421,7 +639,7 @@
           <a:p>
             <a:fld id="{F7021451-1387-4CA6-816F-3879F97B5CBC}" type="slidenum">
               <a:rPr lang="en-US"/>
-              <a:t>10</a:t>
+              <a:t>12</a:t>
             </a:fld>
             <a:endParaRPr lang="en-US"/>
           </a:p>
@@ -440,7 +658,7 @@
 </p:notes>
 </file>
 
-<file path=ppt/notesSlides/notesSlide11.xml><?xml version="1.0" encoding="utf-8"?>
+<file path=ppt/notesSlides/notesSlide13.xml><?xml version="1.0" encoding="utf-8"?>
 <p:notes xmlns:a="http://schemas.openxmlformats.org/drawingml/2006/main" xmlns:r="http://schemas.openxmlformats.org/officeDocument/2006/relationships" xmlns:p="http://schemas.openxmlformats.org/presentationml/2006/main">
   <p:cSld>
     <p:spTree>
@@ -505,7 +723,7 @@
           <a:p>
             <a:fld id="{F7021451-1387-4CA6-816F-3879F97B5CBC}" type="slidenum">
               <a:rPr lang="en-US"/>
-              <a:t>11</a:t>
+              <a:t>13</a:t>
             </a:fld>
             <a:endParaRPr lang="en-US"/>
           </a:p>
@@ -524,7 +742,7 @@
 </p:notes>
 </file>
 
-<file path=ppt/notesSlides/notesSlide12.xml><?xml version="1.0" encoding="utf-8"?>
+<file path=ppt/notesSlides/notesSlide14.xml><?xml version="1.0" encoding="utf-8"?>
 <p:notes xmlns:a="http://schemas.openxmlformats.org/drawingml/2006/main" xmlns:r="http://schemas.openxmlformats.org/officeDocument/2006/relationships" xmlns:p="http://schemas.openxmlformats.org/presentationml/2006/main">
   <p:cSld>
     <p:spTree>
@@ -589,7 +807,7 @@
           <a:p>
             <a:fld id="{F7021451-1387-4CA6-816F-3879F97B5CBC}" type="slidenum">
               <a:rPr lang="en-US"/>
-              <a:t>12</a:t>
+              <a:t>14</a:t>
             </a:fld>
             <a:endParaRPr lang="en-US"/>
           </a:p>
@@ -613,7 +831,13 @@
   <p:cSld>
     <p:spTree>
       <p:nvGrpSpPr>
-        <p:cNvPr id="1" name=""/>
+        <p:cNvPr id="1" name="">
+          <a:extLst>
+            <a:ext uri="{FF2B5EF4-FFF2-40B4-BE49-F238E27FC236}">
+              <a16:creationId xmlns:a16="http://schemas.microsoft.com/office/drawing/2014/main" id="{F2FAB556-9E9E-C8A4-F906-34BECAF6AD8E}"/>
+            </a:ext>
+          </a:extLst>
+        </p:cNvPr>
         <p:cNvGrpSpPr/>
         <p:nvPr/>
       </p:nvGrpSpPr>
@@ -627,7 +851,13 @@
       </p:grpSpPr>
       <p:sp>
         <p:nvSpPr>
-          <p:cNvPr id="2" name="Slide Image Placeholder 1"/>
+          <p:cNvPr id="2" name="Slide Image Placeholder 1">
+            <a:extLst>
+              <a:ext uri="{FF2B5EF4-FFF2-40B4-BE49-F238E27FC236}">
+                <a16:creationId xmlns:a16="http://schemas.microsoft.com/office/drawing/2014/main" id="{278F4257-CD80-AFCD-8C17-E3C7FFEA2751}"/>
+              </a:ext>
+            </a:extLst>
+          </p:cNvPr>
           <p:cNvSpPr>
             <a:spLocks noGrp="1" noRot="1" noChangeAspect="1"/>
           </p:cNvSpPr>
@@ -639,7 +869,13 @@
       </p:sp>
       <p:sp>
         <p:nvSpPr>
-          <p:cNvPr id="3" name="Notes Placeholder 2"/>
+          <p:cNvPr id="3" name="Notes Placeholder 2">
+            <a:extLst>
+              <a:ext uri="{FF2B5EF4-FFF2-40B4-BE49-F238E27FC236}">
+                <a16:creationId xmlns:a16="http://schemas.microsoft.com/office/drawing/2014/main" id="{7C525150-1152-A900-2850-8E98893D1287}"/>
+              </a:ext>
+            </a:extLst>
+          </p:cNvPr>
           <p:cNvSpPr>
             <a:spLocks noGrp="1"/>
           </p:cNvSpPr>
@@ -658,7 +894,13 @@
       </p:sp>
       <p:sp>
         <p:nvSpPr>
-          <p:cNvPr id="4" name="Slide Number Placeholder 3"/>
+          <p:cNvPr id="4" name="Slide Number Placeholder 3">
+            <a:extLst>
+              <a:ext uri="{FF2B5EF4-FFF2-40B4-BE49-F238E27FC236}">
+                <a16:creationId xmlns:a16="http://schemas.microsoft.com/office/drawing/2014/main" id="{4BE2A683-CA21-F034-C7A0-DC32A6A8BD45}"/>
+              </a:ext>
+            </a:extLst>
+          </p:cNvPr>
           <p:cNvSpPr>
             <a:spLocks noGrp="1"/>
           </p:cNvSpPr>
@@ -682,7 +924,7 @@
     </p:spTree>
     <p:extLst>
       <p:ext uri="{BB962C8B-B14F-4D97-AF65-F5344CB8AC3E}">
-        <p14:creationId xmlns:p14="http://schemas.microsoft.com/office/powerpoint/2010/main" val="1024086991"/>
+        <p14:creationId xmlns:p14="http://schemas.microsoft.com/office/powerpoint/2010/main" val="521700523"/>
       </p:ext>
     </p:extLst>
   </p:cSld>
@@ -781,7 +1023,13 @@
   <p:cSld>
     <p:spTree>
       <p:nvGrpSpPr>
-        <p:cNvPr id="1" name=""/>
+        <p:cNvPr id="1" name="">
+          <a:extLst>
+            <a:ext uri="{FF2B5EF4-FFF2-40B4-BE49-F238E27FC236}">
+              <a16:creationId xmlns:a16="http://schemas.microsoft.com/office/drawing/2014/main" id="{F7B9881C-2231-9CB7-9E9A-DC3749DF85DB}"/>
+            </a:ext>
+          </a:extLst>
+        </p:cNvPr>
         <p:cNvGrpSpPr/>
         <p:nvPr/>
       </p:nvGrpSpPr>
@@ -795,7 +1043,13 @@
       </p:grpSpPr>
       <p:sp>
         <p:nvSpPr>
-          <p:cNvPr id="2" name="Slide Image Placeholder 1"/>
+          <p:cNvPr id="2" name="Slide Image Placeholder 1">
+            <a:extLst>
+              <a:ext uri="{FF2B5EF4-FFF2-40B4-BE49-F238E27FC236}">
+                <a16:creationId xmlns:a16="http://schemas.microsoft.com/office/drawing/2014/main" id="{460D1C5A-8201-94D2-6099-5A8048FDCC63}"/>
+              </a:ext>
+            </a:extLst>
+          </p:cNvPr>
           <p:cNvSpPr>
             <a:spLocks noGrp="1" noRot="1" noChangeAspect="1"/>
           </p:cNvSpPr>
@@ -807,7 +1061,13 @@
       </p:sp>
       <p:sp>
         <p:nvSpPr>
-          <p:cNvPr id="3" name="Notes Placeholder 2"/>
+          <p:cNvPr id="3" name="Notes Placeholder 2">
+            <a:extLst>
+              <a:ext uri="{FF2B5EF4-FFF2-40B4-BE49-F238E27FC236}">
+                <a16:creationId xmlns:a16="http://schemas.microsoft.com/office/drawing/2014/main" id="{2FF7CE45-6F5E-AC18-BB7D-8A4C10D068C1}"/>
+              </a:ext>
+            </a:extLst>
+          </p:cNvPr>
           <p:cNvSpPr>
             <a:spLocks noGrp="1"/>
           </p:cNvSpPr>
@@ -826,7 +1086,13 @@
       </p:sp>
       <p:sp>
         <p:nvSpPr>
-          <p:cNvPr id="4" name="Slide Number Placeholder 3"/>
+          <p:cNvPr id="4" name="Slide Number Placeholder 3">
+            <a:extLst>
+              <a:ext uri="{FF2B5EF4-FFF2-40B4-BE49-F238E27FC236}">
+                <a16:creationId xmlns:a16="http://schemas.microsoft.com/office/drawing/2014/main" id="{DA309102-13C3-B2B3-81E8-A7C1975CF5DF}"/>
+              </a:ext>
+            </a:extLst>
+          </p:cNvPr>
           <p:cNvSpPr>
             <a:spLocks noGrp="1"/>
           </p:cNvSpPr>
@@ -850,7 +1116,7 @@
     </p:spTree>
     <p:extLst>
       <p:ext uri="{BB962C8B-B14F-4D97-AF65-F5344CB8AC3E}">
-        <p14:creationId xmlns:p14="http://schemas.microsoft.com/office/powerpoint/2010/main" val="1024086991"/>
+        <p14:creationId xmlns:p14="http://schemas.microsoft.com/office/powerpoint/2010/main" val="2924144619"/>
       </p:ext>
     </p:extLst>
   </p:cSld>
@@ -1117,13 +1383,7 @@
   <p:cSld>
     <p:spTree>
       <p:nvGrpSpPr>
-        <p:cNvPr id="1" name="">
-          <a:extLst>
-            <a:ext uri="{FF2B5EF4-FFF2-40B4-BE49-F238E27FC236}">
-              <a16:creationId xmlns:a16="http://schemas.microsoft.com/office/drawing/2014/main" id="{AAE4F6F1-D9E0-E688-9314-685D7EA340F9}"/>
-            </a:ext>
-          </a:extLst>
-        </p:cNvPr>
+        <p:cNvPr id="1" name=""/>
         <p:cNvGrpSpPr/>
         <p:nvPr/>
       </p:nvGrpSpPr>
@@ -1137,13 +1397,7 @@
       </p:grpSpPr>
       <p:sp>
         <p:nvSpPr>
-          <p:cNvPr id="2" name="Slide Image Placeholder 1">
-            <a:extLst>
-              <a:ext uri="{FF2B5EF4-FFF2-40B4-BE49-F238E27FC236}">
-                <a16:creationId xmlns:a16="http://schemas.microsoft.com/office/drawing/2014/main" id="{72142036-6B6E-4606-FE79-C202E0D1F7B4}"/>
-              </a:ext>
-            </a:extLst>
-          </p:cNvPr>
+          <p:cNvPr id="2" name="Slide Image Placeholder 1"/>
           <p:cNvSpPr>
             <a:spLocks noGrp="1" noRot="1" noChangeAspect="1"/>
           </p:cNvSpPr>
@@ -1155,13 +1409,7 @@
       </p:sp>
       <p:sp>
         <p:nvSpPr>
-          <p:cNvPr id="3" name="Notes Placeholder 2">
-            <a:extLst>
-              <a:ext uri="{FF2B5EF4-FFF2-40B4-BE49-F238E27FC236}">
-                <a16:creationId xmlns:a16="http://schemas.microsoft.com/office/drawing/2014/main" id="{30855812-68FB-40F9-7853-B343D776E84E}"/>
-              </a:ext>
-            </a:extLst>
-          </p:cNvPr>
+          <p:cNvPr id="3" name="Notes Placeholder 2"/>
           <p:cNvSpPr>
             <a:spLocks noGrp="1"/>
           </p:cNvSpPr>
@@ -1180,13 +1428,7 @@
       </p:sp>
       <p:sp>
         <p:nvSpPr>
-          <p:cNvPr id="4" name="Slide Number Placeholder 3">
-            <a:extLst>
-              <a:ext uri="{FF2B5EF4-FFF2-40B4-BE49-F238E27FC236}">
-                <a16:creationId xmlns:a16="http://schemas.microsoft.com/office/drawing/2014/main" id="{DC4336F1-DF1E-5406-BDB3-F73B738C96F0}"/>
-              </a:ext>
-            </a:extLst>
-          </p:cNvPr>
+          <p:cNvPr id="4" name="Slide Number Placeholder 3"/>
           <p:cNvSpPr>
             <a:spLocks noGrp="1"/>
           </p:cNvSpPr>
@@ -1210,7 +1452,7 @@
     </p:spTree>
     <p:extLst>
       <p:ext uri="{BB962C8B-B14F-4D97-AF65-F5344CB8AC3E}">
-        <p14:creationId xmlns:p14="http://schemas.microsoft.com/office/powerpoint/2010/main" val="1470677379"/>
+        <p14:creationId xmlns:p14="http://schemas.microsoft.com/office/powerpoint/2010/main" val="1024086991"/>
       </p:ext>
     </p:extLst>
   </p:cSld>
@@ -1225,13 +1467,7 @@
   <p:cSld>
     <p:spTree>
       <p:nvGrpSpPr>
-        <p:cNvPr id="1" name="">
-          <a:extLst>
-            <a:ext uri="{FF2B5EF4-FFF2-40B4-BE49-F238E27FC236}">
-              <a16:creationId xmlns:a16="http://schemas.microsoft.com/office/drawing/2014/main" id="{E198816C-7BD5-25E2-8E76-744716F6DF8D}"/>
-            </a:ext>
-          </a:extLst>
-        </p:cNvPr>
+        <p:cNvPr id="1" name=""/>
         <p:cNvGrpSpPr/>
         <p:nvPr/>
       </p:nvGrpSpPr>
@@ -1245,13 +1481,7 @@
       </p:grpSpPr>
       <p:sp>
         <p:nvSpPr>
-          <p:cNvPr id="2" name="Slide Image Placeholder 1">
-            <a:extLst>
-              <a:ext uri="{FF2B5EF4-FFF2-40B4-BE49-F238E27FC236}">
-                <a16:creationId xmlns:a16="http://schemas.microsoft.com/office/drawing/2014/main" id="{6844BAC1-F073-1038-4E86-494B92B43E56}"/>
-              </a:ext>
-            </a:extLst>
-          </p:cNvPr>
+          <p:cNvPr id="2" name="Slide Image Placeholder 1"/>
           <p:cNvSpPr>
             <a:spLocks noGrp="1" noRot="1" noChangeAspect="1"/>
           </p:cNvSpPr>
@@ -1263,13 +1493,7 @@
       </p:sp>
       <p:sp>
         <p:nvSpPr>
-          <p:cNvPr id="3" name="Notes Placeholder 2">
-            <a:extLst>
-              <a:ext uri="{FF2B5EF4-FFF2-40B4-BE49-F238E27FC236}">
-                <a16:creationId xmlns:a16="http://schemas.microsoft.com/office/drawing/2014/main" id="{BA56EE50-23FE-EC96-FDE0-8E3CC8BC6BC6}"/>
-              </a:ext>
-            </a:extLst>
-          </p:cNvPr>
+          <p:cNvPr id="3" name="Notes Placeholder 2"/>
           <p:cNvSpPr>
             <a:spLocks noGrp="1"/>
           </p:cNvSpPr>
@@ -1288,13 +1512,7 @@
       </p:sp>
       <p:sp>
         <p:nvSpPr>
-          <p:cNvPr id="4" name="Slide Number Placeholder 3">
-            <a:extLst>
-              <a:ext uri="{FF2B5EF4-FFF2-40B4-BE49-F238E27FC236}">
-                <a16:creationId xmlns:a16="http://schemas.microsoft.com/office/drawing/2014/main" id="{9FBC6876-F7D4-F846-0077-8312429BD3D4}"/>
-              </a:ext>
-            </a:extLst>
-          </p:cNvPr>
+          <p:cNvPr id="4" name="Slide Number Placeholder 3"/>
           <p:cNvSpPr>
             <a:spLocks noGrp="1"/>
           </p:cNvSpPr>
@@ -1318,7 +1536,7 @@
     </p:spTree>
     <p:extLst>
       <p:ext uri="{BB962C8B-B14F-4D97-AF65-F5344CB8AC3E}">
-        <p14:creationId xmlns:p14="http://schemas.microsoft.com/office/powerpoint/2010/main" val="1252533155"/>
+        <p14:creationId xmlns:p14="http://schemas.microsoft.com/office/powerpoint/2010/main" val="1024086991"/>
       </p:ext>
     </p:extLst>
   </p:cSld>
@@ -2179,6 +2397,1569 @@
         <p:cNvPr id="1" name="">
           <a:extLst>
             <a:ext uri="{FF2B5EF4-FFF2-40B4-BE49-F238E27FC236}">
+              <a16:creationId xmlns:a16="http://schemas.microsoft.com/office/drawing/2014/main" id="{727A85DC-5EFF-58D5-7D47-69BEEC2C81BF}"/>
+            </a:ext>
+          </a:extLst>
+        </p:cNvPr>
+        <p:cNvGrpSpPr/>
+        <p:nvPr/>
+      </p:nvGrpSpPr>
+      <p:grpSpPr>
+        <a:xfrm>
+          <a:off x="0" y="0"/>
+          <a:ext cx="0" cy="0"/>
+          <a:chOff x="0" y="0"/>
+          <a:chExt cx="0" cy="0"/>
+        </a:xfrm>
+      </p:grpSpPr>
+      <p:sp>
+        <p:nvSpPr>
+          <p:cNvPr id="2" name="Shape 0">
+            <a:extLst>
+              <a:ext uri="{FF2B5EF4-FFF2-40B4-BE49-F238E27FC236}">
+                <a16:creationId xmlns:a16="http://schemas.microsoft.com/office/drawing/2014/main" id="{DB54ED69-169E-474D-F3BC-AC7F8731374E}"/>
+              </a:ext>
+            </a:extLst>
+          </p:cNvPr>
+          <p:cNvSpPr/>
+          <p:nvPr/>
+        </p:nvSpPr>
+        <p:spPr>
+          <a:xfrm>
+            <a:off x="0" y="0"/>
+            <a:ext cx="9144000" cy="54864"/>
+          </a:xfrm>
+          <a:prstGeom prst="rect">
+            <a:avLst/>
+          </a:prstGeom>
+          <a:solidFill>
+            <a:srgbClr val="2D6A4F"/>
+          </a:solidFill>
+          <a:ln/>
+        </p:spPr>
+        <p:txBody>
+          <a:bodyPr/>
+          <a:lstStyle/>
+          <a:p>
+            <a:endParaRPr lang="es-ES"/>
+          </a:p>
+        </p:txBody>
+      </p:sp>
+      <p:sp>
+        <p:nvSpPr>
+          <p:cNvPr id="3" name="Text 1">
+            <a:extLst>
+              <a:ext uri="{FF2B5EF4-FFF2-40B4-BE49-F238E27FC236}">
+                <a16:creationId xmlns:a16="http://schemas.microsoft.com/office/drawing/2014/main" id="{D64761C5-50F4-54CE-8702-AF2670F77542}"/>
+              </a:ext>
+            </a:extLst>
+          </p:cNvPr>
+          <p:cNvSpPr/>
+          <p:nvPr/>
+        </p:nvSpPr>
+        <p:spPr>
+          <a:xfrm>
+            <a:off x="457200" y="228600"/>
+            <a:ext cx="8229600" cy="640080"/>
+          </a:xfrm>
+          <a:prstGeom prst="rect">
+            <a:avLst/>
+          </a:prstGeom>
+          <a:noFill/>
+          <a:ln/>
+        </p:spPr>
+        <p:txBody>
+          <a:bodyPr wrap="square" lIns="0" tIns="0" rIns="0" bIns="0" rtlCol="0" anchor="ctr"/>
+          <a:lstStyle/>
+          <a:p>
+            <a:pPr marL="0" indent="0">
+              <a:buNone/>
+            </a:pPr>
+            <a:r>
+              <a:rPr lang="en-US" sz="3000" b="1" dirty="0">
+                <a:solidFill>
+                  <a:srgbClr val="1B4332"/>
+                </a:solidFill>
+                <a:latin typeface="Calibri" pitchFamily="34" charset="0"/>
+                <a:ea typeface="Calibri" pitchFamily="34" charset="-122"/>
+                <a:cs typeface="Calibri" pitchFamily="34" charset="-120"/>
+              </a:rPr>
+              <a:t>Tipologia d'estacions: 5 perfils d'ús</a:t>
+            </a:r>
+            <a:endParaRPr lang="en-US" sz="3000" dirty="0"/>
+          </a:p>
+        </p:txBody>
+      </p:sp>
+      <p:sp>
+        <p:nvSpPr>
+          <p:cNvPr id="4" name="Text 2">
+            <a:extLst>
+              <a:ext uri="{FF2B5EF4-FFF2-40B4-BE49-F238E27FC236}">
+                <a16:creationId xmlns:a16="http://schemas.microsoft.com/office/drawing/2014/main" id="{84E28889-C8F4-CA0F-9B13-86F474D501B4}"/>
+              </a:ext>
+            </a:extLst>
+          </p:cNvPr>
+          <p:cNvSpPr/>
+          <p:nvPr/>
+        </p:nvSpPr>
+        <p:spPr>
+          <a:xfrm>
+            <a:off x="457200" y="777240"/>
+            <a:ext cx="8229600" cy="365760"/>
+          </a:xfrm>
+          <a:prstGeom prst="rect">
+            <a:avLst/>
+          </a:prstGeom>
+          <a:noFill/>
+          <a:ln/>
+        </p:spPr>
+        <p:txBody>
+          <a:bodyPr wrap="square" lIns="0" tIns="0" rIns="0" bIns="0" rtlCol="0" anchor="ctr"/>
+          <a:lstStyle/>
+          <a:p>
+            <a:pPr marL="0" indent="0">
+              <a:buNone/>
+            </a:pPr>
+            <a:r>
+              <a:rPr lang="en-US" sz="1300" dirty="0">
+                <a:solidFill>
+                  <a:srgbClr val="495057"/>
+                </a:solidFill>
+                <a:latin typeface="Calibri Light" pitchFamily="34" charset="0"/>
+                <a:ea typeface="Calibri Light" pitchFamily="34" charset="-122"/>
+                <a:cs typeface="Calibri Light" pitchFamily="34" charset="-120"/>
+              </a:rPr>
+              <a:t>Clustering K-Means </a:t>
+            </a:r>
+            <a:r>
+              <a:rPr lang="en-US" sz="1300" dirty="0" err="1">
+                <a:solidFill>
+                  <a:srgbClr val="495057"/>
+                </a:solidFill>
+                <a:latin typeface="Calibri Light" pitchFamily="34" charset="0"/>
+                <a:ea typeface="Calibri Light" pitchFamily="34" charset="-122"/>
+                <a:cs typeface="Calibri Light" pitchFamily="34" charset="-120"/>
+              </a:rPr>
+              <a:t>amb</a:t>
+            </a:r>
+            <a:r>
+              <a:rPr lang="en-US" sz="1300" dirty="0">
+                <a:solidFill>
+                  <a:srgbClr val="495057"/>
+                </a:solidFill>
+                <a:latin typeface="Calibri Light" pitchFamily="34" charset="0"/>
+                <a:ea typeface="Calibri Light" pitchFamily="34" charset="-122"/>
+                <a:cs typeface="Calibri Light" pitchFamily="34" charset="-120"/>
+              </a:rPr>
+              <a:t> 28 features per identificar patrons diferenciats</a:t>
+            </a:r>
+            <a:endParaRPr lang="en-US" sz="1300" dirty="0"/>
+          </a:p>
+        </p:txBody>
+      </p:sp>
+      <p:sp>
+        <p:nvSpPr>
+          <p:cNvPr id="6" name="Shape 3">
+            <a:extLst>
+              <a:ext uri="{FF2B5EF4-FFF2-40B4-BE49-F238E27FC236}">
+                <a16:creationId xmlns:a16="http://schemas.microsoft.com/office/drawing/2014/main" id="{554FC63C-548D-BA20-C754-54B81A44BE6C}"/>
+              </a:ext>
+            </a:extLst>
+          </p:cNvPr>
+          <p:cNvSpPr/>
+          <p:nvPr/>
+        </p:nvSpPr>
+        <p:spPr>
+          <a:xfrm>
+            <a:off x="5654134" y="1379190"/>
+            <a:ext cx="201168" cy="201168"/>
+          </a:xfrm>
+          <a:prstGeom prst="ellipse">
+            <a:avLst/>
+          </a:prstGeom>
+          <a:solidFill>
+            <a:srgbClr val="E74C3C"/>
+          </a:solidFill>
+          <a:ln/>
+        </p:spPr>
+        <p:txBody>
+          <a:bodyPr/>
+          <a:lstStyle/>
+          <a:p>
+            <a:endParaRPr lang="es-ES"/>
+          </a:p>
+        </p:txBody>
+      </p:sp>
+      <p:sp>
+        <p:nvSpPr>
+          <p:cNvPr id="7" name="Text 4">
+            <a:extLst>
+              <a:ext uri="{FF2B5EF4-FFF2-40B4-BE49-F238E27FC236}">
+                <a16:creationId xmlns:a16="http://schemas.microsoft.com/office/drawing/2014/main" id="{AB16C9FA-F676-5D61-D08F-9A41FFEFA3ED}"/>
+              </a:ext>
+            </a:extLst>
+          </p:cNvPr>
+          <p:cNvSpPr/>
+          <p:nvPr/>
+        </p:nvSpPr>
+        <p:spPr>
+          <a:xfrm>
+            <a:off x="5929494" y="1306038"/>
+            <a:ext cx="2558889" cy="320040"/>
+          </a:xfrm>
+          <a:prstGeom prst="rect">
+            <a:avLst/>
+          </a:prstGeom>
+          <a:noFill/>
+          <a:ln/>
+        </p:spPr>
+        <p:txBody>
+          <a:bodyPr wrap="square" lIns="0" tIns="0" rIns="0" bIns="0" rtlCol="0" anchor="ctr"/>
+          <a:lstStyle/>
+          <a:p>
+            <a:pPr marL="0" indent="0">
+              <a:buNone/>
+            </a:pPr>
+            <a:r>
+              <a:rPr lang="en-US" sz="1300" b="1" dirty="0">
+                <a:solidFill>
+                  <a:srgbClr val="212529"/>
+                </a:solidFill>
+                <a:latin typeface="Calibri" pitchFamily="34" charset="0"/>
+                <a:ea typeface="Calibri" pitchFamily="34" charset="-122"/>
+                <a:cs typeface="Calibri" pitchFamily="34" charset="-120"/>
+              </a:rPr>
+              <a:t>C0: Perifèric Baix Ús (132)</a:t>
+            </a:r>
+            <a:endParaRPr lang="en-US" sz="1300" dirty="0"/>
+          </a:p>
+        </p:txBody>
+      </p:sp>
+      <p:sp>
+        <p:nvSpPr>
+          <p:cNvPr id="8" name="Text 5">
+            <a:extLst>
+              <a:ext uri="{FF2B5EF4-FFF2-40B4-BE49-F238E27FC236}">
+                <a16:creationId xmlns:a16="http://schemas.microsoft.com/office/drawing/2014/main" id="{282BBAED-C22E-0CAF-B75F-95DCA172CDC8}"/>
+              </a:ext>
+            </a:extLst>
+          </p:cNvPr>
+          <p:cNvSpPr/>
+          <p:nvPr/>
+        </p:nvSpPr>
+        <p:spPr>
+          <a:xfrm>
+            <a:off x="5929494" y="1580358"/>
+            <a:ext cx="2558889" cy="274320"/>
+          </a:xfrm>
+          <a:prstGeom prst="rect">
+            <a:avLst/>
+          </a:prstGeom>
+          <a:noFill/>
+          <a:ln/>
+        </p:spPr>
+        <p:txBody>
+          <a:bodyPr wrap="square" lIns="0" tIns="0" rIns="0" bIns="0" rtlCol="0" anchor="ctr"/>
+          <a:lstStyle/>
+          <a:p>
+            <a:pPr marL="0" indent="0">
+              <a:buNone/>
+            </a:pPr>
+            <a:r>
+              <a:rPr lang="en-US" sz="1100" dirty="0">
+                <a:solidFill>
+                  <a:srgbClr val="495057"/>
+                </a:solidFill>
+                <a:latin typeface="Calibri" pitchFamily="34" charset="0"/>
+                <a:ea typeface="Calibri" pitchFamily="34" charset="-122"/>
+                <a:cs typeface="Calibri" pitchFamily="34" charset="-120"/>
+              </a:rPr>
+              <a:t>Zones altes, poc trànsit, sovint buides</a:t>
+            </a:r>
+            <a:endParaRPr lang="en-US" sz="1100" dirty="0"/>
+          </a:p>
+        </p:txBody>
+      </p:sp>
+      <p:sp>
+        <p:nvSpPr>
+          <p:cNvPr id="9" name="Shape 6">
+            <a:extLst>
+              <a:ext uri="{FF2B5EF4-FFF2-40B4-BE49-F238E27FC236}">
+                <a16:creationId xmlns:a16="http://schemas.microsoft.com/office/drawing/2014/main" id="{99E97745-2D3B-6691-CB04-1C0282FFC968}"/>
+              </a:ext>
+            </a:extLst>
+          </p:cNvPr>
+          <p:cNvSpPr/>
+          <p:nvPr/>
+        </p:nvSpPr>
+        <p:spPr>
+          <a:xfrm>
+            <a:off x="5654134" y="2812858"/>
+            <a:ext cx="201168" cy="201168"/>
+          </a:xfrm>
+          <a:prstGeom prst="ellipse">
+            <a:avLst/>
+          </a:prstGeom>
+          <a:solidFill>
+            <a:srgbClr val="3498DB"/>
+          </a:solidFill>
+          <a:ln/>
+        </p:spPr>
+        <p:txBody>
+          <a:bodyPr/>
+          <a:lstStyle/>
+          <a:p>
+            <a:endParaRPr lang="es-ES"/>
+          </a:p>
+        </p:txBody>
+      </p:sp>
+      <p:sp>
+        <p:nvSpPr>
+          <p:cNvPr id="10" name="Text 7">
+            <a:extLst>
+              <a:ext uri="{FF2B5EF4-FFF2-40B4-BE49-F238E27FC236}">
+                <a16:creationId xmlns:a16="http://schemas.microsoft.com/office/drawing/2014/main" id="{6ABE4FB8-1BC8-A59F-83F6-B99476702CEC}"/>
+              </a:ext>
+            </a:extLst>
+          </p:cNvPr>
+          <p:cNvSpPr/>
+          <p:nvPr/>
+        </p:nvSpPr>
+        <p:spPr>
+          <a:xfrm>
+            <a:off x="5929494" y="2019270"/>
+            <a:ext cx="2558889" cy="320040"/>
+          </a:xfrm>
+          <a:prstGeom prst="rect">
+            <a:avLst/>
+          </a:prstGeom>
+          <a:noFill/>
+          <a:ln/>
+        </p:spPr>
+        <p:txBody>
+          <a:bodyPr wrap="square" lIns="0" tIns="0" rIns="0" bIns="0" rtlCol="0" anchor="ctr"/>
+          <a:lstStyle/>
+          <a:p>
+            <a:pPr marL="0" indent="0">
+              <a:buNone/>
+            </a:pPr>
+            <a:r>
+              <a:rPr lang="en-US" sz="1300" b="1" dirty="0">
+                <a:solidFill>
+                  <a:srgbClr val="212529"/>
+                </a:solidFill>
+                <a:latin typeface="Calibri" pitchFamily="34" charset="0"/>
+                <a:ea typeface="Calibri" pitchFamily="34" charset="-122"/>
+                <a:cs typeface="Calibri" pitchFamily="34" charset="-120"/>
+              </a:rPr>
+              <a:t>C1: Central Alta Ocupació (42)</a:t>
+            </a:r>
+            <a:endParaRPr lang="en-US" sz="1300" dirty="0"/>
+          </a:p>
+        </p:txBody>
+      </p:sp>
+      <p:sp>
+        <p:nvSpPr>
+          <p:cNvPr id="11" name="Text 8">
+            <a:extLst>
+              <a:ext uri="{FF2B5EF4-FFF2-40B4-BE49-F238E27FC236}">
+                <a16:creationId xmlns:a16="http://schemas.microsoft.com/office/drawing/2014/main" id="{0727D5E2-2082-CC98-793C-8A25F0DB1A77}"/>
+              </a:ext>
+            </a:extLst>
+          </p:cNvPr>
+          <p:cNvSpPr/>
+          <p:nvPr/>
+        </p:nvSpPr>
+        <p:spPr>
+          <a:xfrm>
+            <a:off x="5929494" y="2293590"/>
+            <a:ext cx="2558889" cy="274320"/>
+          </a:xfrm>
+          <a:prstGeom prst="rect">
+            <a:avLst/>
+          </a:prstGeom>
+          <a:noFill/>
+          <a:ln/>
+        </p:spPr>
+        <p:txBody>
+          <a:bodyPr wrap="square" lIns="0" tIns="0" rIns="0" bIns="0" rtlCol="0" anchor="ctr"/>
+          <a:lstStyle/>
+          <a:p>
+            <a:pPr marL="0" indent="0">
+              <a:buNone/>
+            </a:pPr>
+            <a:r>
+              <a:rPr lang="en-US" sz="1100" dirty="0">
+                <a:solidFill>
+                  <a:srgbClr val="495057"/>
+                </a:solidFill>
+                <a:latin typeface="Calibri" pitchFamily="34" charset="0"/>
+                <a:ea typeface="Calibri" pitchFamily="34" charset="-122"/>
+                <a:cs typeface="Calibri" pitchFamily="34" charset="-120"/>
+              </a:rPr>
+              <a:t>Centre, alta demanda, NAB alt matí i tarda</a:t>
+            </a:r>
+            <a:endParaRPr lang="en-US" sz="1100" dirty="0"/>
+          </a:p>
+        </p:txBody>
+      </p:sp>
+      <p:sp>
+        <p:nvSpPr>
+          <p:cNvPr id="12" name="Shape 9">
+            <a:extLst>
+              <a:ext uri="{FF2B5EF4-FFF2-40B4-BE49-F238E27FC236}">
+                <a16:creationId xmlns:a16="http://schemas.microsoft.com/office/drawing/2014/main" id="{EE5C7498-9533-3DE9-DE3E-3172DFB786C1}"/>
+              </a:ext>
+            </a:extLst>
+          </p:cNvPr>
+          <p:cNvSpPr/>
+          <p:nvPr/>
+        </p:nvSpPr>
+        <p:spPr>
+          <a:xfrm>
+            <a:off x="5654134" y="3526090"/>
+            <a:ext cx="201168" cy="201168"/>
+          </a:xfrm>
+          <a:prstGeom prst="ellipse">
+            <a:avLst/>
+          </a:prstGeom>
+          <a:solidFill>
+            <a:srgbClr val="27AE60"/>
+          </a:solidFill>
+          <a:ln/>
+        </p:spPr>
+        <p:txBody>
+          <a:bodyPr/>
+          <a:lstStyle/>
+          <a:p>
+            <a:endParaRPr lang="es-ES"/>
+          </a:p>
+        </p:txBody>
+      </p:sp>
+      <p:sp>
+        <p:nvSpPr>
+          <p:cNvPr id="13" name="Text 10">
+            <a:extLst>
+              <a:ext uri="{FF2B5EF4-FFF2-40B4-BE49-F238E27FC236}">
+                <a16:creationId xmlns:a16="http://schemas.microsoft.com/office/drawing/2014/main" id="{165D932F-6332-E3A9-ED03-3DDFB04F6E49}"/>
+              </a:ext>
+            </a:extLst>
+          </p:cNvPr>
+          <p:cNvSpPr/>
+          <p:nvPr/>
+        </p:nvSpPr>
+        <p:spPr>
+          <a:xfrm>
+            <a:off x="5929494" y="2732502"/>
+            <a:ext cx="2558889" cy="320040"/>
+          </a:xfrm>
+          <a:prstGeom prst="rect">
+            <a:avLst/>
+          </a:prstGeom>
+          <a:noFill/>
+          <a:ln/>
+        </p:spPr>
+        <p:txBody>
+          <a:bodyPr wrap="square" lIns="0" tIns="0" rIns="0" bIns="0" rtlCol="0" anchor="ctr"/>
+          <a:lstStyle/>
+          <a:p>
+            <a:pPr marL="0" indent="0">
+              <a:buNone/>
+            </a:pPr>
+            <a:r>
+              <a:rPr lang="en-US" sz="1300" b="1" dirty="0">
+                <a:solidFill>
+                  <a:srgbClr val="212529"/>
+                </a:solidFill>
+                <a:latin typeface="Calibri" pitchFamily="34" charset="0"/>
+                <a:ea typeface="Calibri" pitchFamily="34" charset="-122"/>
+                <a:cs typeface="Calibri" pitchFamily="34" charset="-120"/>
+              </a:rPr>
+              <a:t>C2: Origen Commuter </a:t>
+            </a:r>
+            <a:r>
+              <a:rPr lang="en-US" sz="1300" b="1" dirty="0" err="1">
+                <a:solidFill>
+                  <a:srgbClr val="212529"/>
+                </a:solidFill>
+                <a:latin typeface="Calibri" pitchFamily="34" charset="0"/>
+                <a:ea typeface="Calibri" pitchFamily="34" charset="-122"/>
+                <a:cs typeface="Calibri" pitchFamily="34" charset="-120"/>
+              </a:rPr>
+              <a:t>Matí</a:t>
+            </a:r>
+            <a:r>
+              <a:rPr lang="en-US" sz="1300" b="1" dirty="0">
+                <a:solidFill>
+                  <a:srgbClr val="212529"/>
+                </a:solidFill>
+                <a:latin typeface="Calibri" pitchFamily="34" charset="0"/>
+                <a:ea typeface="Calibri" pitchFamily="34" charset="-122"/>
+                <a:cs typeface="Calibri" pitchFamily="34" charset="-120"/>
+              </a:rPr>
+              <a:t> (162)</a:t>
+            </a:r>
+            <a:endParaRPr lang="en-US" sz="1300" dirty="0"/>
+          </a:p>
+        </p:txBody>
+      </p:sp>
+      <p:sp>
+        <p:nvSpPr>
+          <p:cNvPr id="14" name="Text 11">
+            <a:extLst>
+              <a:ext uri="{FF2B5EF4-FFF2-40B4-BE49-F238E27FC236}">
+                <a16:creationId xmlns:a16="http://schemas.microsoft.com/office/drawing/2014/main" id="{6A8E7949-A35E-B69E-BB2C-8C55888D4005}"/>
+              </a:ext>
+            </a:extLst>
+          </p:cNvPr>
+          <p:cNvSpPr/>
+          <p:nvPr/>
+        </p:nvSpPr>
+        <p:spPr>
+          <a:xfrm>
+            <a:off x="5929494" y="3006822"/>
+            <a:ext cx="2558889" cy="274320"/>
+          </a:xfrm>
+          <a:prstGeom prst="rect">
+            <a:avLst/>
+          </a:prstGeom>
+          <a:noFill/>
+          <a:ln/>
+        </p:spPr>
+        <p:txBody>
+          <a:bodyPr wrap="square" lIns="0" tIns="0" rIns="0" bIns="0" rtlCol="0" anchor="ctr"/>
+          <a:lstStyle/>
+          <a:p>
+            <a:pPr marL="0" indent="0">
+              <a:buNone/>
+            </a:pPr>
+            <a:r>
+              <a:rPr lang="en-US" sz="1100" dirty="0">
+                <a:solidFill>
+                  <a:srgbClr val="495057"/>
+                </a:solidFill>
+                <a:latin typeface="Calibri" pitchFamily="34" charset="0"/>
+                <a:ea typeface="Calibri" pitchFamily="34" charset="-122"/>
+                <a:cs typeface="Calibri" pitchFamily="34" charset="-120"/>
+              </a:rPr>
+              <a:t>Estacions d'origen, es buiden al matí</a:t>
+            </a:r>
+            <a:endParaRPr lang="en-US" sz="1100" dirty="0"/>
+          </a:p>
+        </p:txBody>
+      </p:sp>
+      <p:sp>
+        <p:nvSpPr>
+          <p:cNvPr id="15" name="Shape 12">
+            <a:extLst>
+              <a:ext uri="{FF2B5EF4-FFF2-40B4-BE49-F238E27FC236}">
+                <a16:creationId xmlns:a16="http://schemas.microsoft.com/office/drawing/2014/main" id="{1B47785D-9A40-1D4C-F65A-91B0EA996516}"/>
+              </a:ext>
+            </a:extLst>
+          </p:cNvPr>
+          <p:cNvSpPr/>
+          <p:nvPr/>
+        </p:nvSpPr>
+        <p:spPr>
+          <a:xfrm>
+            <a:off x="5654134" y="4239322"/>
+            <a:ext cx="201168" cy="201168"/>
+          </a:xfrm>
+          <a:prstGeom prst="ellipse">
+            <a:avLst/>
+          </a:prstGeom>
+          <a:solidFill>
+            <a:srgbClr val="9B59B6"/>
+          </a:solidFill>
+          <a:ln/>
+        </p:spPr>
+        <p:txBody>
+          <a:bodyPr/>
+          <a:lstStyle/>
+          <a:p>
+            <a:endParaRPr lang="es-ES"/>
+          </a:p>
+        </p:txBody>
+      </p:sp>
+      <p:sp>
+        <p:nvSpPr>
+          <p:cNvPr id="16" name="Text 13">
+            <a:extLst>
+              <a:ext uri="{FF2B5EF4-FFF2-40B4-BE49-F238E27FC236}">
+                <a16:creationId xmlns:a16="http://schemas.microsoft.com/office/drawing/2014/main" id="{DD5A1AFA-9B9A-FE08-FE81-0286F1F7CA40}"/>
+              </a:ext>
+            </a:extLst>
+          </p:cNvPr>
+          <p:cNvSpPr/>
+          <p:nvPr/>
+        </p:nvSpPr>
+        <p:spPr>
+          <a:xfrm>
+            <a:off x="5929494" y="3445734"/>
+            <a:ext cx="2558889" cy="320040"/>
+          </a:xfrm>
+          <a:prstGeom prst="rect">
+            <a:avLst/>
+          </a:prstGeom>
+          <a:noFill/>
+          <a:ln/>
+        </p:spPr>
+        <p:txBody>
+          <a:bodyPr wrap="square" lIns="0" tIns="0" rIns="0" bIns="0" rtlCol="0" anchor="ctr"/>
+          <a:lstStyle/>
+          <a:p>
+            <a:pPr marL="0" indent="0">
+              <a:buNone/>
+            </a:pPr>
+            <a:r>
+              <a:rPr lang="en-US" sz="1300" b="1" dirty="0">
+                <a:solidFill>
+                  <a:srgbClr val="212529"/>
+                </a:solidFill>
+                <a:latin typeface="Calibri" pitchFamily="34" charset="0"/>
+                <a:ea typeface="Calibri" pitchFamily="34" charset="-122"/>
+                <a:cs typeface="Calibri" pitchFamily="34" charset="-120"/>
+              </a:rPr>
+              <a:t>C3: Ús Mixt Equilibrat (122)</a:t>
+            </a:r>
+            <a:endParaRPr lang="en-US" sz="1300" dirty="0"/>
+          </a:p>
+        </p:txBody>
+      </p:sp>
+      <p:sp>
+        <p:nvSpPr>
+          <p:cNvPr id="17" name="Text 14">
+            <a:extLst>
+              <a:ext uri="{FF2B5EF4-FFF2-40B4-BE49-F238E27FC236}">
+                <a16:creationId xmlns:a16="http://schemas.microsoft.com/office/drawing/2014/main" id="{4E59DBA5-C0E9-AEB3-4D4F-95F8C8CE3BA3}"/>
+              </a:ext>
+            </a:extLst>
+          </p:cNvPr>
+          <p:cNvSpPr/>
+          <p:nvPr/>
+        </p:nvSpPr>
+        <p:spPr>
+          <a:xfrm>
+            <a:off x="5929494" y="3720054"/>
+            <a:ext cx="2558889" cy="274320"/>
+          </a:xfrm>
+          <a:prstGeom prst="rect">
+            <a:avLst/>
+          </a:prstGeom>
+          <a:noFill/>
+          <a:ln/>
+        </p:spPr>
+        <p:txBody>
+          <a:bodyPr wrap="square" lIns="0" tIns="0" rIns="0" bIns="0" rtlCol="0" anchor="ctr"/>
+          <a:lstStyle/>
+          <a:p>
+            <a:pPr marL="0" indent="0">
+              <a:buNone/>
+            </a:pPr>
+            <a:r>
+              <a:rPr lang="en-US" sz="1100" dirty="0">
+                <a:solidFill>
+                  <a:srgbClr val="495057"/>
+                </a:solidFill>
+                <a:latin typeface="Calibri" pitchFamily="34" charset="0"/>
+                <a:ea typeface="Calibri" pitchFamily="34" charset="-122"/>
+                <a:cs typeface="Calibri" pitchFamily="34" charset="-120"/>
+              </a:rPr>
+              <a:t>Ús equilibrat, capacitat gran</a:t>
+            </a:r>
+            <a:endParaRPr lang="en-US" sz="1100" dirty="0"/>
+          </a:p>
+        </p:txBody>
+      </p:sp>
+      <p:sp>
+        <p:nvSpPr>
+          <p:cNvPr id="18" name="Shape 15">
+            <a:extLst>
+              <a:ext uri="{FF2B5EF4-FFF2-40B4-BE49-F238E27FC236}">
+                <a16:creationId xmlns:a16="http://schemas.microsoft.com/office/drawing/2014/main" id="{7FE4DCBD-088F-8B82-D500-A4587820898E}"/>
+              </a:ext>
+            </a:extLst>
+          </p:cNvPr>
+          <p:cNvSpPr/>
+          <p:nvPr/>
+        </p:nvSpPr>
+        <p:spPr>
+          <a:xfrm>
+            <a:off x="5646275" y="2102230"/>
+            <a:ext cx="201168" cy="201168"/>
+          </a:xfrm>
+          <a:prstGeom prst="ellipse">
+            <a:avLst/>
+          </a:prstGeom>
+          <a:solidFill>
+            <a:srgbClr val="FFFF00"/>
+          </a:solidFill>
+          <a:ln/>
+        </p:spPr>
+        <p:txBody>
+          <a:bodyPr/>
+          <a:lstStyle/>
+          <a:p>
+            <a:endParaRPr lang="es-ES"/>
+          </a:p>
+        </p:txBody>
+      </p:sp>
+      <p:sp>
+        <p:nvSpPr>
+          <p:cNvPr id="19" name="Text 16">
+            <a:extLst>
+              <a:ext uri="{FF2B5EF4-FFF2-40B4-BE49-F238E27FC236}">
+                <a16:creationId xmlns:a16="http://schemas.microsoft.com/office/drawing/2014/main" id="{CBB3E5B7-2A10-2448-C7B2-E3720B16366C}"/>
+              </a:ext>
+            </a:extLst>
+          </p:cNvPr>
+          <p:cNvSpPr/>
+          <p:nvPr/>
+        </p:nvSpPr>
+        <p:spPr>
+          <a:xfrm>
+            <a:off x="5929494" y="4158966"/>
+            <a:ext cx="2558889" cy="320040"/>
+          </a:xfrm>
+          <a:prstGeom prst="rect">
+            <a:avLst/>
+          </a:prstGeom>
+          <a:noFill/>
+          <a:ln/>
+        </p:spPr>
+        <p:txBody>
+          <a:bodyPr wrap="square" lIns="0" tIns="0" rIns="0" bIns="0" rtlCol="0" anchor="ctr"/>
+          <a:lstStyle/>
+          <a:p>
+            <a:pPr marL="0" indent="0">
+              <a:buNone/>
+            </a:pPr>
+            <a:r>
+              <a:rPr lang="en-US" sz="1300" b="1" dirty="0">
+                <a:solidFill>
+                  <a:srgbClr val="212529"/>
+                </a:solidFill>
+                <a:latin typeface="Calibri" pitchFamily="34" charset="0"/>
+                <a:ea typeface="Calibri" pitchFamily="34" charset="-122"/>
+                <a:cs typeface="Calibri" pitchFamily="34" charset="-120"/>
+              </a:rPr>
+              <a:t>C4: Residencial Entrada Tarda (59)</a:t>
+            </a:r>
+            <a:endParaRPr lang="en-US" sz="1300" dirty="0"/>
+          </a:p>
+        </p:txBody>
+      </p:sp>
+      <p:sp>
+        <p:nvSpPr>
+          <p:cNvPr id="20" name="Text 17">
+            <a:extLst>
+              <a:ext uri="{FF2B5EF4-FFF2-40B4-BE49-F238E27FC236}">
+                <a16:creationId xmlns:a16="http://schemas.microsoft.com/office/drawing/2014/main" id="{0B59EB20-F8FD-37F4-D746-76DAA15F6CE8}"/>
+              </a:ext>
+            </a:extLst>
+          </p:cNvPr>
+          <p:cNvSpPr/>
+          <p:nvPr/>
+        </p:nvSpPr>
+        <p:spPr>
+          <a:xfrm>
+            <a:off x="5929494" y="4433286"/>
+            <a:ext cx="2558889" cy="274320"/>
+          </a:xfrm>
+          <a:prstGeom prst="rect">
+            <a:avLst/>
+          </a:prstGeom>
+          <a:noFill/>
+          <a:ln/>
+        </p:spPr>
+        <p:txBody>
+          <a:bodyPr wrap="square" lIns="0" tIns="0" rIns="0" bIns="0" rtlCol="0" anchor="ctr"/>
+          <a:lstStyle/>
+          <a:p>
+            <a:pPr marL="0" indent="0">
+              <a:buNone/>
+            </a:pPr>
+            <a:r>
+              <a:rPr lang="en-US" sz="1100" dirty="0">
+                <a:solidFill>
+                  <a:srgbClr val="495057"/>
+                </a:solidFill>
+                <a:latin typeface="Calibri" pitchFamily="34" charset="0"/>
+                <a:ea typeface="Calibri" pitchFamily="34" charset="-122"/>
+                <a:cs typeface="Calibri" pitchFamily="34" charset="-120"/>
+              </a:rPr>
+              <a:t>Zones residencials, s'omplen a la tarda</a:t>
+            </a:r>
+            <a:endParaRPr lang="en-US" sz="1100" dirty="0"/>
+          </a:p>
+        </p:txBody>
+      </p:sp>
+      <p:sp>
+        <p:nvSpPr>
+          <p:cNvPr id="21" name="Text 18">
+            <a:extLst>
+              <a:ext uri="{FF2B5EF4-FFF2-40B4-BE49-F238E27FC236}">
+                <a16:creationId xmlns:a16="http://schemas.microsoft.com/office/drawing/2014/main" id="{179BD2DA-8769-74AB-3D84-22C425DDE86C}"/>
+              </a:ext>
+            </a:extLst>
+          </p:cNvPr>
+          <p:cNvSpPr/>
+          <p:nvPr/>
+        </p:nvSpPr>
+        <p:spPr>
+          <a:xfrm>
+            <a:off x="8046720" y="4800600"/>
+            <a:ext cx="914400" cy="274320"/>
+          </a:xfrm>
+          <a:prstGeom prst="rect">
+            <a:avLst/>
+          </a:prstGeom>
+          <a:noFill/>
+          <a:ln/>
+        </p:spPr>
+        <p:txBody>
+          <a:bodyPr wrap="square" rtlCol="0" anchor="ctr"/>
+          <a:lstStyle/>
+          <a:p>
+            <a:pPr marL="0" indent="0" algn="r">
+              <a:buNone/>
+            </a:pPr>
+            <a:r>
+              <a:rPr lang="en-US" sz="900" dirty="0">
+                <a:solidFill>
+                  <a:srgbClr val="868E96"/>
+                </a:solidFill>
+                <a:latin typeface="Calibri" pitchFamily="34" charset="0"/>
+                <a:ea typeface="Calibri" pitchFamily="34" charset="-122"/>
+                <a:cs typeface="Calibri" pitchFamily="34" charset="-120"/>
+              </a:rPr>
+              <a:t>10 / 14</a:t>
+            </a:r>
+            <a:endParaRPr lang="en-US" sz="900" dirty="0"/>
+          </a:p>
+        </p:txBody>
+      </p:sp>
+      <p:pic>
+        <p:nvPicPr>
+          <p:cNvPr id="22" name="Imagen 21">
+            <a:hlinkClick r:id="rId3" action="ppaction://hlinkfile"/>
+            <a:extLst>
+              <a:ext uri="{FF2B5EF4-FFF2-40B4-BE49-F238E27FC236}">
+                <a16:creationId xmlns:a16="http://schemas.microsoft.com/office/drawing/2014/main" id="{588E19BE-2EBA-7E15-0245-3EED7B489AB2}"/>
+              </a:ext>
+            </a:extLst>
+          </p:cNvPr>
+          <p:cNvPicPr>
+            <a:picLocks noChangeAspect="1"/>
+          </p:cNvPicPr>
+          <p:nvPr/>
+        </p:nvPicPr>
+        <p:blipFill>
+          <a:blip r:embed="rId4"/>
+          <a:stretch>
+            <a:fillRect/>
+          </a:stretch>
+        </p:blipFill>
+        <p:spPr>
+          <a:xfrm>
+            <a:off x="457200" y="1222640"/>
+            <a:ext cx="4905605" cy="3608047"/>
+          </a:xfrm>
+          <a:prstGeom prst="rect">
+            <a:avLst/>
+          </a:prstGeom>
+        </p:spPr>
+      </p:pic>
+    </p:spTree>
+    <p:extLst>
+      <p:ext uri="{BB962C8B-B14F-4D97-AF65-F5344CB8AC3E}">
+        <p14:creationId xmlns:p14="http://schemas.microsoft.com/office/powerpoint/2010/main" val="2615943320"/>
+      </p:ext>
+    </p:extLst>
+  </p:cSld>
+  <p:clrMapOvr>
+    <a:masterClrMapping/>
+  </p:clrMapOvr>
+</p:sld>
+</file>
+
+<file path=ppt/slides/slide11.xml><?xml version="1.0" encoding="utf-8"?>
+<p:sld xmlns:a="http://schemas.openxmlformats.org/drawingml/2006/main" xmlns:r="http://schemas.openxmlformats.org/officeDocument/2006/relationships" xmlns:p="http://schemas.openxmlformats.org/presentationml/2006/main">
+  <p:cSld>
+    <p:bg>
+      <p:bgPr>
+        <a:solidFill>
+          <a:srgbClr val="FFFFFF"/>
+        </a:solidFill>
+        <a:effectLst/>
+      </p:bgPr>
+    </p:bg>
+    <p:spTree>
+      <p:nvGrpSpPr>
+        <p:cNvPr id="1" name="">
+          <a:extLst>
+            <a:ext uri="{FF2B5EF4-FFF2-40B4-BE49-F238E27FC236}">
+              <a16:creationId xmlns:a16="http://schemas.microsoft.com/office/drawing/2014/main" id="{9F8EBB40-2F08-B9BC-1D3D-A3BF4DB3A0AF}"/>
+            </a:ext>
+          </a:extLst>
+        </p:cNvPr>
+        <p:cNvGrpSpPr/>
+        <p:nvPr/>
+      </p:nvGrpSpPr>
+      <p:grpSpPr>
+        <a:xfrm>
+          <a:off x="0" y="0"/>
+          <a:ext cx="0" cy="0"/>
+          <a:chOff x="0" y="0"/>
+          <a:chExt cx="0" cy="0"/>
+        </a:xfrm>
+      </p:grpSpPr>
+      <p:sp>
+        <p:nvSpPr>
+          <p:cNvPr id="2" name="Shape 0">
+            <a:extLst>
+              <a:ext uri="{FF2B5EF4-FFF2-40B4-BE49-F238E27FC236}">
+                <a16:creationId xmlns:a16="http://schemas.microsoft.com/office/drawing/2014/main" id="{33C4C29E-6233-5104-7FB6-1A2652DAB32F}"/>
+              </a:ext>
+            </a:extLst>
+          </p:cNvPr>
+          <p:cNvSpPr/>
+          <p:nvPr/>
+        </p:nvSpPr>
+        <p:spPr>
+          <a:xfrm>
+            <a:off x="0" y="0"/>
+            <a:ext cx="9144000" cy="54864"/>
+          </a:xfrm>
+          <a:prstGeom prst="rect">
+            <a:avLst/>
+          </a:prstGeom>
+          <a:solidFill>
+            <a:srgbClr val="2D6A4F"/>
+          </a:solidFill>
+          <a:ln/>
+        </p:spPr>
+        <p:txBody>
+          <a:bodyPr/>
+          <a:lstStyle/>
+          <a:p>
+            <a:endParaRPr lang="es-ES"/>
+          </a:p>
+        </p:txBody>
+      </p:sp>
+      <p:sp>
+        <p:nvSpPr>
+          <p:cNvPr id="3" name="Text 1">
+            <a:extLst>
+              <a:ext uri="{FF2B5EF4-FFF2-40B4-BE49-F238E27FC236}">
+                <a16:creationId xmlns:a16="http://schemas.microsoft.com/office/drawing/2014/main" id="{E0A4B18D-8200-3A0D-745C-C8EDC39E7549}"/>
+              </a:ext>
+            </a:extLst>
+          </p:cNvPr>
+          <p:cNvSpPr/>
+          <p:nvPr/>
+        </p:nvSpPr>
+        <p:spPr>
+          <a:xfrm>
+            <a:off x="457200" y="228600"/>
+            <a:ext cx="8229600" cy="640080"/>
+          </a:xfrm>
+          <a:prstGeom prst="rect">
+            <a:avLst/>
+          </a:prstGeom>
+          <a:noFill/>
+          <a:ln/>
+        </p:spPr>
+        <p:txBody>
+          <a:bodyPr wrap="square" lIns="0" tIns="0" rIns="0" bIns="0" rtlCol="0" anchor="ctr"/>
+          <a:lstStyle/>
+          <a:p>
+            <a:pPr marL="0" indent="0">
+              <a:buNone/>
+            </a:pPr>
+            <a:r>
+              <a:rPr lang="en-US" sz="3000" b="1" dirty="0">
+                <a:solidFill>
+                  <a:srgbClr val="1B4332"/>
+                </a:solidFill>
+                <a:latin typeface="Calibri" pitchFamily="34" charset="0"/>
+                <a:ea typeface="Calibri" pitchFamily="34" charset="-122"/>
+                <a:cs typeface="Calibri" pitchFamily="34" charset="-120"/>
+              </a:rPr>
+              <a:t>Perfils dels clústers: centroides</a:t>
+            </a:r>
+            <a:endParaRPr lang="en-US" sz="3000" dirty="0"/>
+          </a:p>
+        </p:txBody>
+      </p:sp>
+      <p:sp>
+        <p:nvSpPr>
+          <p:cNvPr id="4" name="Text 2">
+            <a:extLst>
+              <a:ext uri="{FF2B5EF4-FFF2-40B4-BE49-F238E27FC236}">
+                <a16:creationId xmlns:a16="http://schemas.microsoft.com/office/drawing/2014/main" id="{171C171C-6F1C-CBC3-44DF-BA8A215BE7C7}"/>
+              </a:ext>
+            </a:extLst>
+          </p:cNvPr>
+          <p:cNvSpPr/>
+          <p:nvPr/>
+        </p:nvSpPr>
+        <p:spPr>
+          <a:xfrm>
+            <a:off x="457200" y="777240"/>
+            <a:ext cx="8229600" cy="365760"/>
+          </a:xfrm>
+          <a:prstGeom prst="rect">
+            <a:avLst/>
+          </a:prstGeom>
+          <a:noFill/>
+          <a:ln/>
+        </p:spPr>
+        <p:txBody>
+          <a:bodyPr wrap="square" lIns="0" tIns="0" rIns="0" bIns="0" rtlCol="0" anchor="ctr"/>
+          <a:lstStyle/>
+          <a:p>
+            <a:pPr marL="0" indent="0">
+              <a:buNone/>
+            </a:pPr>
+            <a:r>
+              <a:rPr lang="en-US" sz="1300" dirty="0">
+                <a:solidFill>
+                  <a:srgbClr val="495057"/>
+                </a:solidFill>
+                <a:latin typeface="Calibri Light" pitchFamily="34" charset="0"/>
+                <a:ea typeface="Calibri Light" pitchFamily="34" charset="-122"/>
+                <a:cs typeface="Calibri Light" pitchFamily="34" charset="-120"/>
+              </a:rPr>
+              <a:t>Cada clúster té un perfil diferent segons capacitat, NAB, variabilitat i problemes de disponibilitat</a:t>
+            </a:r>
+            <a:endParaRPr lang="en-US" sz="1300" dirty="0"/>
+          </a:p>
+        </p:txBody>
+      </p:sp>
+      <p:sp>
+        <p:nvSpPr>
+          <p:cNvPr id="6" name="Shape 3">
+            <a:extLst>
+              <a:ext uri="{FF2B5EF4-FFF2-40B4-BE49-F238E27FC236}">
+                <a16:creationId xmlns:a16="http://schemas.microsoft.com/office/drawing/2014/main" id="{A4777F64-2626-FEAB-5F56-0E994448C7F2}"/>
+              </a:ext>
+            </a:extLst>
+          </p:cNvPr>
+          <p:cNvSpPr/>
+          <p:nvPr/>
+        </p:nvSpPr>
+        <p:spPr>
+          <a:xfrm>
+            <a:off x="457200" y="4297680"/>
+            <a:ext cx="3931920" cy="502920"/>
+          </a:xfrm>
+          <a:prstGeom prst="rect">
+            <a:avLst/>
+          </a:prstGeom>
+          <a:solidFill>
+            <a:srgbClr val="F0FFF4"/>
+          </a:solidFill>
+          <a:ln/>
+        </p:spPr>
+        <p:txBody>
+          <a:bodyPr/>
+          <a:lstStyle/>
+          <a:p>
+            <a:endParaRPr lang="es-ES"/>
+          </a:p>
+        </p:txBody>
+      </p:sp>
+      <p:sp>
+        <p:nvSpPr>
+          <p:cNvPr id="7" name="Text 4">
+            <a:extLst>
+              <a:ext uri="{FF2B5EF4-FFF2-40B4-BE49-F238E27FC236}">
+                <a16:creationId xmlns:a16="http://schemas.microsoft.com/office/drawing/2014/main" id="{E56C09C8-D2D2-BEAE-6682-E82FB2582B73}"/>
+              </a:ext>
+            </a:extLst>
+          </p:cNvPr>
+          <p:cNvSpPr/>
+          <p:nvPr/>
+        </p:nvSpPr>
+        <p:spPr>
+          <a:xfrm>
+            <a:off x="594360" y="4297680"/>
+            <a:ext cx="3657600" cy="502920"/>
+          </a:xfrm>
+          <a:prstGeom prst="rect">
+            <a:avLst/>
+          </a:prstGeom>
+          <a:noFill/>
+          <a:ln/>
+        </p:spPr>
+        <p:txBody>
+          <a:bodyPr wrap="square" lIns="0" tIns="0" rIns="0" bIns="0" rtlCol="0" anchor="ctr"/>
+          <a:lstStyle/>
+          <a:p>
+            <a:pPr marL="0" indent="0">
+              <a:buNone/>
+            </a:pPr>
+            <a:r>
+              <a:rPr lang="en-US" sz="1100" dirty="0">
+                <a:solidFill>
+                  <a:srgbClr val="2D6A4F"/>
+                </a:solidFill>
+                <a:latin typeface="Calibri" pitchFamily="34" charset="0"/>
+                <a:ea typeface="Calibri" pitchFamily="34" charset="-122"/>
+                <a:cs typeface="Calibri" pitchFamily="34" charset="-120"/>
+              </a:rPr>
+              <a:t>C1 (Central): NAB més alt → alta ocupació constant</a:t>
+            </a:r>
+            <a:endParaRPr lang="en-US" sz="1100" dirty="0"/>
+          </a:p>
+        </p:txBody>
+      </p:sp>
+      <p:sp>
+        <p:nvSpPr>
+          <p:cNvPr id="8" name="Shape 5">
+            <a:extLst>
+              <a:ext uri="{FF2B5EF4-FFF2-40B4-BE49-F238E27FC236}">
+                <a16:creationId xmlns:a16="http://schemas.microsoft.com/office/drawing/2014/main" id="{D7593C2E-6C11-CEC2-5CE6-F91FF78B3B49}"/>
+              </a:ext>
+            </a:extLst>
+          </p:cNvPr>
+          <p:cNvSpPr/>
+          <p:nvPr/>
+        </p:nvSpPr>
+        <p:spPr>
+          <a:xfrm>
+            <a:off x="4754880" y="4297680"/>
+            <a:ext cx="3931920" cy="502920"/>
+          </a:xfrm>
+          <a:prstGeom prst="rect">
+            <a:avLst/>
+          </a:prstGeom>
+          <a:solidFill>
+            <a:srgbClr val="FBE9EA"/>
+          </a:solidFill>
+          <a:ln/>
+        </p:spPr>
+        <p:txBody>
+          <a:bodyPr/>
+          <a:lstStyle/>
+          <a:p>
+            <a:endParaRPr lang="es-ES"/>
+          </a:p>
+        </p:txBody>
+      </p:sp>
+      <p:sp>
+        <p:nvSpPr>
+          <p:cNvPr id="9" name="Text 6">
+            <a:extLst>
+              <a:ext uri="{FF2B5EF4-FFF2-40B4-BE49-F238E27FC236}">
+                <a16:creationId xmlns:a16="http://schemas.microsoft.com/office/drawing/2014/main" id="{2E57E0FC-3450-94CB-26D8-05647FEC54B5}"/>
+              </a:ext>
+            </a:extLst>
+          </p:cNvPr>
+          <p:cNvSpPr/>
+          <p:nvPr/>
+        </p:nvSpPr>
+        <p:spPr>
+          <a:xfrm>
+            <a:off x="4892040" y="4297680"/>
+            <a:ext cx="3657600" cy="502920"/>
+          </a:xfrm>
+          <a:prstGeom prst="rect">
+            <a:avLst/>
+          </a:prstGeom>
+          <a:noFill/>
+          <a:ln/>
+        </p:spPr>
+        <p:txBody>
+          <a:bodyPr wrap="square" lIns="0" tIns="0" rIns="0" bIns="0" rtlCol="0" anchor="ctr"/>
+          <a:lstStyle/>
+          <a:p>
+            <a:pPr marL="0" indent="0">
+              <a:buNone/>
+            </a:pPr>
+            <a:r>
+              <a:rPr lang="en-US" sz="1100" dirty="0">
+                <a:solidFill>
+                  <a:srgbClr val="E63946"/>
+                </a:solidFill>
+                <a:latin typeface="Calibri" pitchFamily="34" charset="0"/>
+                <a:ea typeface="Calibri" pitchFamily="34" charset="-122"/>
+                <a:cs typeface="Calibri" pitchFamily="34" charset="-120"/>
+              </a:rPr>
+              <a:t>C0 (Perifèric): Ratio buida alt → prioritat de redistribució</a:t>
+            </a:r>
+            <a:endParaRPr lang="en-US" sz="1100" dirty="0"/>
+          </a:p>
+        </p:txBody>
+      </p:sp>
+      <p:sp>
+        <p:nvSpPr>
+          <p:cNvPr id="10" name="Text 7">
+            <a:extLst>
+              <a:ext uri="{FF2B5EF4-FFF2-40B4-BE49-F238E27FC236}">
+                <a16:creationId xmlns:a16="http://schemas.microsoft.com/office/drawing/2014/main" id="{FA465FD9-AC67-8D70-2BC0-61AF5830BE0C}"/>
+              </a:ext>
+            </a:extLst>
+          </p:cNvPr>
+          <p:cNvSpPr/>
+          <p:nvPr/>
+        </p:nvSpPr>
+        <p:spPr>
+          <a:xfrm>
+            <a:off x="8046720" y="4800600"/>
+            <a:ext cx="914400" cy="274320"/>
+          </a:xfrm>
+          <a:prstGeom prst="rect">
+            <a:avLst/>
+          </a:prstGeom>
+          <a:noFill/>
+          <a:ln/>
+        </p:spPr>
+        <p:txBody>
+          <a:bodyPr wrap="square" rtlCol="0" anchor="ctr"/>
+          <a:lstStyle/>
+          <a:p>
+            <a:pPr marL="0" indent="0" algn="r">
+              <a:buNone/>
+            </a:pPr>
+            <a:r>
+              <a:rPr lang="en-US" sz="900" dirty="0">
+                <a:solidFill>
+                  <a:srgbClr val="868E96"/>
+                </a:solidFill>
+                <a:latin typeface="Calibri" pitchFamily="34" charset="0"/>
+                <a:ea typeface="Calibri" pitchFamily="34" charset="-122"/>
+                <a:cs typeface="Calibri" pitchFamily="34" charset="-120"/>
+              </a:rPr>
+              <a:t>11 / 14</a:t>
+            </a:r>
+            <a:endParaRPr lang="en-US" sz="900" dirty="0"/>
+          </a:p>
+        </p:txBody>
+      </p:sp>
+      <p:pic>
+        <p:nvPicPr>
+          <p:cNvPr id="12" name="Imagen 11">
+            <a:extLst>
+              <a:ext uri="{FF2B5EF4-FFF2-40B4-BE49-F238E27FC236}">
+                <a16:creationId xmlns:a16="http://schemas.microsoft.com/office/drawing/2014/main" id="{DBA45C63-C71C-B17F-ABA1-1CC0AE8357A2}"/>
+              </a:ext>
+            </a:extLst>
+          </p:cNvPr>
+          <p:cNvPicPr>
+            <a:picLocks noChangeAspect="1"/>
+          </p:cNvPicPr>
+          <p:nvPr/>
+        </p:nvPicPr>
+        <p:blipFill>
+          <a:blip r:embed="rId3"/>
+          <a:srcRect b="6927"/>
+          <a:stretch>
+            <a:fillRect/>
+          </a:stretch>
+        </p:blipFill>
+        <p:spPr>
+          <a:xfrm>
+            <a:off x="686645" y="1145208"/>
+            <a:ext cx="7746154" cy="3115395"/>
+          </a:xfrm>
+          <a:prstGeom prst="rect">
+            <a:avLst/>
+          </a:prstGeom>
+        </p:spPr>
+      </p:pic>
+      <p:sp>
+        <p:nvSpPr>
+          <p:cNvPr id="14" name="Flecha: hacia abajo 13">
+            <a:extLst>
+              <a:ext uri="{FF2B5EF4-FFF2-40B4-BE49-F238E27FC236}">
+                <a16:creationId xmlns:a16="http://schemas.microsoft.com/office/drawing/2014/main" id="{AB57C9FA-DE08-AD47-7C73-8F6ACB2AA983}"/>
+              </a:ext>
+            </a:extLst>
+          </p:cNvPr>
+          <p:cNvSpPr/>
+          <p:nvPr/>
+        </p:nvSpPr>
+        <p:spPr>
+          <a:xfrm>
+            <a:off x="2844799" y="1691640"/>
+            <a:ext cx="203200" cy="365760"/>
+          </a:xfrm>
+          <a:prstGeom prst="downArrow">
+            <a:avLst/>
+          </a:prstGeom>
+          <a:solidFill>
+            <a:srgbClr val="FF0000"/>
+          </a:solidFill>
+          <a:ln>
+            <a:solidFill>
+              <a:srgbClr val="FF0000"/>
+            </a:solidFill>
+          </a:ln>
+        </p:spPr>
+        <p:style>
+          <a:lnRef idx="2">
+            <a:schemeClr val="accent1">
+              <a:shade val="15000"/>
+            </a:schemeClr>
+          </a:lnRef>
+          <a:fillRef idx="1">
+            <a:schemeClr val="accent1"/>
+          </a:fillRef>
+          <a:effectRef idx="0">
+            <a:schemeClr val="accent1"/>
+          </a:effectRef>
+          <a:fontRef idx="minor">
+            <a:schemeClr val="lt1"/>
+          </a:fontRef>
+        </p:style>
+        <p:txBody>
+          <a:bodyPr rtlCol="0" anchor="ctr"/>
+          <a:lstStyle/>
+          <a:p>
+            <a:pPr algn="ctr"/>
+            <a:endParaRPr lang="es-ES" dirty="0"/>
+          </a:p>
+        </p:txBody>
+      </p:sp>
+      <p:sp>
+        <p:nvSpPr>
+          <p:cNvPr id="15" name="Flecha: hacia abajo 14">
+            <a:extLst>
+              <a:ext uri="{FF2B5EF4-FFF2-40B4-BE49-F238E27FC236}">
+                <a16:creationId xmlns:a16="http://schemas.microsoft.com/office/drawing/2014/main" id="{CA212406-024A-444C-2875-29DE1F886CB2}"/>
+              </a:ext>
+            </a:extLst>
+          </p:cNvPr>
+          <p:cNvSpPr/>
+          <p:nvPr/>
+        </p:nvSpPr>
+        <p:spPr>
+          <a:xfrm>
+            <a:off x="3835399" y="1234440"/>
+            <a:ext cx="203200" cy="365760"/>
+          </a:xfrm>
+          <a:prstGeom prst="downArrow">
+            <a:avLst/>
+          </a:prstGeom>
+          <a:solidFill>
+            <a:srgbClr val="FF0000"/>
+          </a:solidFill>
+          <a:ln>
+            <a:solidFill>
+              <a:srgbClr val="FF0000"/>
+            </a:solidFill>
+          </a:ln>
+        </p:spPr>
+        <p:style>
+          <a:lnRef idx="2">
+            <a:schemeClr val="accent1">
+              <a:shade val="15000"/>
+            </a:schemeClr>
+          </a:lnRef>
+          <a:fillRef idx="1">
+            <a:schemeClr val="accent1"/>
+          </a:fillRef>
+          <a:effectRef idx="0">
+            <a:schemeClr val="accent1"/>
+          </a:effectRef>
+          <a:fontRef idx="minor">
+            <a:schemeClr val="lt1"/>
+          </a:fontRef>
+        </p:style>
+        <p:txBody>
+          <a:bodyPr rtlCol="0" anchor="ctr"/>
+          <a:lstStyle/>
+          <a:p>
+            <a:pPr algn="ctr"/>
+            <a:endParaRPr lang="es-ES"/>
+          </a:p>
+        </p:txBody>
+      </p:sp>
+      <p:sp>
+        <p:nvSpPr>
+          <p:cNvPr id="16" name="Rectángulo 15">
+            <a:extLst>
+              <a:ext uri="{FF2B5EF4-FFF2-40B4-BE49-F238E27FC236}">
+                <a16:creationId xmlns:a16="http://schemas.microsoft.com/office/drawing/2014/main" id="{C1957921-938E-FF3F-338F-797661C324B3}"/>
+              </a:ext>
+            </a:extLst>
+          </p:cNvPr>
+          <p:cNvSpPr/>
+          <p:nvPr/>
+        </p:nvSpPr>
+        <p:spPr>
+          <a:xfrm>
+            <a:off x="2099733" y="1422400"/>
+            <a:ext cx="491065" cy="2446867"/>
+          </a:xfrm>
+          <a:prstGeom prst="rect">
+            <a:avLst/>
+          </a:prstGeom>
+          <a:noFill/>
+          <a:ln w="19050"/>
+        </p:spPr>
+        <p:style>
+          <a:lnRef idx="2">
+            <a:schemeClr val="accent1">
+              <a:shade val="15000"/>
+            </a:schemeClr>
+          </a:lnRef>
+          <a:fillRef idx="1">
+            <a:schemeClr val="accent1"/>
+          </a:fillRef>
+          <a:effectRef idx="0">
+            <a:schemeClr val="accent1"/>
+          </a:effectRef>
+          <a:fontRef idx="minor">
+            <a:schemeClr val="lt1"/>
+          </a:fontRef>
+        </p:style>
+        <p:txBody>
+          <a:bodyPr rtlCol="0" anchor="ctr"/>
+          <a:lstStyle/>
+          <a:p>
+            <a:pPr algn="ctr"/>
+            <a:endParaRPr lang="es-ES"/>
+          </a:p>
+        </p:txBody>
+      </p:sp>
+    </p:spTree>
+    <p:extLst>
+      <p:ext uri="{BB962C8B-B14F-4D97-AF65-F5344CB8AC3E}">
+        <p14:creationId xmlns:p14="http://schemas.microsoft.com/office/powerpoint/2010/main" val="3413005419"/>
+      </p:ext>
+    </p:extLst>
+  </p:cSld>
+  <p:clrMapOvr>
+    <a:masterClrMapping/>
+  </p:clrMapOvr>
+  <p:timing>
+    <p:tnLst>
+      <p:par>
+        <p:cTn id="1" dur="indefinite" restart="never" nodeType="tmRoot">
+          <p:childTnLst>
+            <p:seq concurrent="1" nextAc="seek">
+              <p:cTn id="2" dur="indefinite" nodeType="mainSeq">
+                <p:childTnLst>
+                  <p:par>
+                    <p:cTn id="3" fill="hold">
+                      <p:stCondLst>
+                        <p:cond delay="indefinite"/>
+                      </p:stCondLst>
+                      <p:childTnLst>
+                        <p:par>
+                          <p:cTn id="4" fill="hold">
+                            <p:stCondLst>
+                              <p:cond delay="0"/>
+                            </p:stCondLst>
+                            <p:childTnLst>
+                              <p:par>
+                                <p:cTn id="5" presetID="1" presetClass="entr" presetSubtype="0" fill="hold" grpId="0" nodeType="clickEffect">
+                                  <p:stCondLst>
+                                    <p:cond delay="0"/>
+                                  </p:stCondLst>
+                                  <p:childTnLst>
+                                    <p:set>
+                                      <p:cBhvr>
+                                        <p:cTn id="6" dur="1" fill="hold">
+                                          <p:stCondLst>
+                                            <p:cond delay="0"/>
+                                          </p:stCondLst>
+                                        </p:cTn>
+                                        <p:tgtEl>
+                                          <p:spTgt spid="14"/>
+                                        </p:tgtEl>
+                                        <p:attrNameLst>
+                                          <p:attrName>style.visibility</p:attrName>
+                                        </p:attrNameLst>
+                                      </p:cBhvr>
+                                      <p:to>
+                                        <p:strVal val="visible"/>
+                                      </p:to>
+                                    </p:set>
+                                  </p:childTnLst>
+                                </p:cTn>
+                              </p:par>
+                              <p:par>
+                                <p:cTn id="7" presetID="1" presetClass="entr" presetSubtype="0" fill="hold" grpId="0" nodeType="withEffect">
+                                  <p:stCondLst>
+                                    <p:cond delay="0"/>
+                                  </p:stCondLst>
+                                  <p:childTnLst>
+                                    <p:set>
+                                      <p:cBhvr>
+                                        <p:cTn id="8" dur="1" fill="hold">
+                                          <p:stCondLst>
+                                            <p:cond delay="0"/>
+                                          </p:stCondLst>
+                                        </p:cTn>
+                                        <p:tgtEl>
+                                          <p:spTgt spid="15"/>
+                                        </p:tgtEl>
+                                        <p:attrNameLst>
+                                          <p:attrName>style.visibility</p:attrName>
+                                        </p:attrNameLst>
+                                      </p:cBhvr>
+                                      <p:to>
+                                        <p:strVal val="visible"/>
+                                      </p:to>
+                                    </p:set>
+                                  </p:childTnLst>
+                                </p:cTn>
+                              </p:par>
+                            </p:childTnLst>
+                          </p:cTn>
+                        </p:par>
+                      </p:childTnLst>
+                    </p:cTn>
+                  </p:par>
+                </p:childTnLst>
+              </p:cTn>
+              <p:prevCondLst>
+                <p:cond evt="onPrev" delay="0">
+                  <p:tgtEl>
+                    <p:sldTgt/>
+                  </p:tgtEl>
+                </p:cond>
+              </p:prevCondLst>
+              <p:nextCondLst>
+                <p:cond evt="onNext" delay="0">
+                  <p:tgtEl>
+                    <p:sldTgt/>
+                  </p:tgtEl>
+                </p:cond>
+              </p:nextCondLst>
+            </p:seq>
+          </p:childTnLst>
+        </p:cTn>
+      </p:par>
+    </p:tnLst>
+    <p:bldLst>
+      <p:bldP spid="14" grpId="0" animBg="1"/>
+      <p:bldP spid="15" grpId="0" animBg="1"/>
+    </p:bldLst>
+  </p:timing>
+</p:sld>
+</file>
+
+<file path=ppt/slides/slide12.xml><?xml version="1.0" encoding="utf-8"?>
+<p:sld xmlns:a="http://schemas.openxmlformats.org/drawingml/2006/main" xmlns:r="http://schemas.openxmlformats.org/officeDocument/2006/relationships" xmlns:p="http://schemas.openxmlformats.org/presentationml/2006/main">
+  <p:cSld>
+    <p:bg>
+      <p:bgPr>
+        <a:solidFill>
+          <a:srgbClr val="FFFFFF"/>
+        </a:solidFill>
+        <a:effectLst/>
+      </p:bgPr>
+    </p:bg>
+    <p:spTree>
+      <p:nvGrpSpPr>
+        <p:cNvPr id="1" name="">
+          <a:extLst>
+            <a:ext uri="{FF2B5EF4-FFF2-40B4-BE49-F238E27FC236}">
               <a16:creationId xmlns:a16="http://schemas.microsoft.com/office/drawing/2014/main" id="{5A221B4E-36CA-CE54-BAA9-8DFC0A80F564}"/>
             </a:ext>
           </a:extLst>
@@ -2620,7 +4401,7 @@
                 <a:ea typeface="Calibri" pitchFamily="34" charset="-122"/>
                 <a:cs typeface="Calibri" pitchFamily="34" charset="-120"/>
               </a:rPr>
-              <a:t>10 / 12</a:t>
+              <a:t>12 / 14</a:t>
             </a:r>
             <a:endParaRPr lang="en-US" sz="900" dirty="0"/>
           </a:p>
@@ -2699,7 +4480,7 @@
 </p:sld>
 </file>
 
-<file path=ppt/slides/slide11.xml><?xml version="1.0" encoding="utf-8"?>
+<file path=ppt/slides/slide13.xml><?xml version="1.0" encoding="utf-8"?>
 <p:sld xmlns:a="http://schemas.openxmlformats.org/drawingml/2006/main" xmlns:r="http://schemas.openxmlformats.org/officeDocument/2006/relationships" xmlns:p="http://schemas.openxmlformats.org/presentationml/2006/main">
   <p:cSld name="Slide 11">
     <p:bg>
@@ -3017,7 +4798,7 @@
                 <a:ea typeface="Calibri" pitchFamily="34" charset="-122"/>
                 <a:cs typeface="Calibri" pitchFamily="34" charset="-120"/>
               </a:rPr>
-              <a:t>11 / 12</a:t>
+              <a:t>13 / 14</a:t>
             </a:r>
             <a:endParaRPr lang="en-US" sz="900" dirty="0"/>
           </a:p>
@@ -3025,10 +4806,10 @@
       </p:sp>
       <p:pic>
         <p:nvPicPr>
-          <p:cNvPr id="10" name="Imagen 9">
-            <a:extLst>
-              <a:ext uri="{FF2B5EF4-FFF2-40B4-BE49-F238E27FC236}">
-                <a16:creationId xmlns:a16="http://schemas.microsoft.com/office/drawing/2014/main" id="{38C5DA7D-7E81-E910-1E34-DA160D19B284}"/>
+          <p:cNvPr id="6" name="Imagen 5">
+            <a:extLst>
+              <a:ext uri="{FF2B5EF4-FFF2-40B4-BE49-F238E27FC236}">
+                <a16:creationId xmlns:a16="http://schemas.microsoft.com/office/drawing/2014/main" id="{E175620B-7190-C425-2540-2A99F714CF45}"/>
               </a:ext>
             </a:extLst>
           </p:cNvPr>
@@ -3045,7 +4826,7 @@
         </p:blipFill>
         <p:spPr>
           <a:xfrm>
-            <a:off x="457200" y="1342028"/>
+            <a:off x="388189" y="1297217"/>
             <a:ext cx="4639976" cy="3069043"/>
           </a:xfrm>
           <a:prstGeom prst="rect">
@@ -3061,7 +4842,7 @@
 </p:sld>
 </file>
 
-<file path=ppt/slides/slide12.xml><?xml version="1.0" encoding="utf-8"?>
+<file path=ppt/slides/slide14.xml><?xml version="1.0" encoding="utf-8"?>
 <p:sld xmlns:a="http://schemas.openxmlformats.org/drawingml/2006/main" xmlns:r="http://schemas.openxmlformats.org/officeDocument/2006/relationships" xmlns:p="http://schemas.openxmlformats.org/presentationml/2006/main">
   <p:cSld name="Slide 12">
     <p:bg>
@@ -3802,6 +5583,1473 @@
 
 <file path=ppt/slides/slide2.xml><?xml version="1.0" encoding="utf-8"?>
 <p:sld xmlns:a="http://schemas.openxmlformats.org/drawingml/2006/main" xmlns:r="http://schemas.openxmlformats.org/officeDocument/2006/relationships" xmlns:p="http://schemas.openxmlformats.org/presentationml/2006/main">
+  <p:cSld>
+    <p:bg>
+      <p:bgPr>
+        <a:solidFill>
+          <a:srgbClr val="FFFFFF"/>
+        </a:solidFill>
+        <a:effectLst/>
+      </p:bgPr>
+    </p:bg>
+    <p:spTree>
+      <p:nvGrpSpPr>
+        <p:cNvPr id="1" name="">
+          <a:extLst>
+            <a:ext uri="{FF2B5EF4-FFF2-40B4-BE49-F238E27FC236}">
+              <a16:creationId xmlns:a16="http://schemas.microsoft.com/office/drawing/2014/main" id="{BAAA524A-7AE9-AC93-386C-4D89C39C348F}"/>
+            </a:ext>
+          </a:extLst>
+        </p:cNvPr>
+        <p:cNvGrpSpPr/>
+        <p:nvPr/>
+      </p:nvGrpSpPr>
+      <p:grpSpPr>
+        <a:xfrm>
+          <a:off x="0" y="0"/>
+          <a:ext cx="0" cy="0"/>
+          <a:chOff x="0" y="0"/>
+          <a:chExt cx="0" cy="0"/>
+        </a:xfrm>
+      </p:grpSpPr>
+      <p:sp>
+        <p:nvSpPr>
+          <p:cNvPr id="2" name="Shape 0">
+            <a:extLst>
+              <a:ext uri="{FF2B5EF4-FFF2-40B4-BE49-F238E27FC236}">
+                <a16:creationId xmlns:a16="http://schemas.microsoft.com/office/drawing/2014/main" id="{C7962923-221F-1163-107C-A8F00799B45C}"/>
+              </a:ext>
+            </a:extLst>
+          </p:cNvPr>
+          <p:cNvSpPr/>
+          <p:nvPr/>
+        </p:nvSpPr>
+        <p:spPr>
+          <a:xfrm>
+            <a:off x="0" y="0"/>
+            <a:ext cx="9144000" cy="54864"/>
+          </a:xfrm>
+          <a:prstGeom prst="rect">
+            <a:avLst/>
+          </a:prstGeom>
+          <a:solidFill>
+            <a:srgbClr val="2D6A4F"/>
+          </a:solidFill>
+          <a:ln/>
+        </p:spPr>
+        <p:txBody>
+          <a:bodyPr/>
+          <a:lstStyle/>
+          <a:p>
+            <a:endParaRPr lang="es-ES"/>
+          </a:p>
+        </p:txBody>
+      </p:sp>
+      <p:sp>
+        <p:nvSpPr>
+          <p:cNvPr id="14" name="Text 11">
+            <a:extLst>
+              <a:ext uri="{FF2B5EF4-FFF2-40B4-BE49-F238E27FC236}">
+                <a16:creationId xmlns:a16="http://schemas.microsoft.com/office/drawing/2014/main" id="{788680D3-DF77-6F10-FF52-E61EEE44A384}"/>
+              </a:ext>
+            </a:extLst>
+          </p:cNvPr>
+          <p:cNvSpPr/>
+          <p:nvPr/>
+        </p:nvSpPr>
+        <p:spPr>
+          <a:xfrm>
+            <a:off x="8046720" y="4800600"/>
+            <a:ext cx="914400" cy="274320"/>
+          </a:xfrm>
+          <a:prstGeom prst="rect">
+            <a:avLst/>
+          </a:prstGeom>
+          <a:noFill/>
+          <a:ln/>
+        </p:spPr>
+        <p:txBody>
+          <a:bodyPr wrap="square" rtlCol="0" anchor="ctr"/>
+          <a:lstStyle/>
+          <a:p>
+            <a:pPr marL="0" indent="0" algn="r">
+              <a:buNone/>
+            </a:pPr>
+            <a:r>
+              <a:rPr lang="en-US" sz="900" dirty="0">
+                <a:solidFill>
+                  <a:srgbClr val="868E96"/>
+                </a:solidFill>
+                <a:latin typeface="Calibri" pitchFamily="34" charset="0"/>
+                <a:ea typeface="Calibri" pitchFamily="34" charset="-122"/>
+                <a:cs typeface="Calibri" pitchFamily="34" charset="-120"/>
+              </a:rPr>
+              <a:t>2 / 14</a:t>
+            </a:r>
+            <a:endParaRPr lang="en-US" sz="900" dirty="0"/>
+          </a:p>
+        </p:txBody>
+      </p:sp>
+      <p:sp>
+        <p:nvSpPr>
+          <p:cNvPr id="19" name="Shape 4">
+            <a:extLst>
+              <a:ext uri="{FF2B5EF4-FFF2-40B4-BE49-F238E27FC236}">
+                <a16:creationId xmlns:a16="http://schemas.microsoft.com/office/drawing/2014/main" id="{C97A318A-0BBF-E70F-6296-5C5A562ECA46}"/>
+              </a:ext>
+            </a:extLst>
+          </p:cNvPr>
+          <p:cNvSpPr/>
+          <p:nvPr/>
+        </p:nvSpPr>
+        <p:spPr>
+          <a:xfrm>
+            <a:off x="383013" y="1067952"/>
+            <a:ext cx="3840480" cy="1554480"/>
+          </a:xfrm>
+          <a:prstGeom prst="rect">
+            <a:avLst/>
+          </a:prstGeom>
+          <a:solidFill>
+            <a:srgbClr val="F1F5F2"/>
+          </a:solidFill>
+          <a:ln w="6350">
+            <a:solidFill>
+              <a:srgbClr val="C8DDD2"/>
+            </a:solidFill>
+            <a:prstDash val="solid"/>
+          </a:ln>
+        </p:spPr>
+        <p:txBody>
+          <a:bodyPr/>
+          <a:lstStyle/>
+          <a:p>
+            <a:endParaRPr lang="es-ES"/>
+          </a:p>
+        </p:txBody>
+      </p:sp>
+      <p:pic>
+        <p:nvPicPr>
+          <p:cNvPr id="20" name="Image 0" descr="preencoded.png">
+            <a:extLst>
+              <a:ext uri="{FF2B5EF4-FFF2-40B4-BE49-F238E27FC236}">
+                <a16:creationId xmlns:a16="http://schemas.microsoft.com/office/drawing/2014/main" id="{BF5F26C5-88AD-B7D8-DDAF-ACC8958F4AE6}"/>
+              </a:ext>
+            </a:extLst>
+          </p:cNvPr>
+          <p:cNvPicPr>
+            <a:picLocks noChangeAspect="1"/>
+          </p:cNvPicPr>
+          <p:nvPr/>
+        </p:nvPicPr>
+        <p:blipFill>
+          <a:blip r:embed="rId3"/>
+          <a:stretch>
+            <a:fillRect/>
+          </a:stretch>
+        </p:blipFill>
+        <p:spPr>
+          <a:xfrm>
+            <a:off x="565893" y="1205112"/>
+            <a:ext cx="640080" cy="640080"/>
+          </a:xfrm>
+          <a:prstGeom prst="rect">
+            <a:avLst/>
+          </a:prstGeom>
+        </p:spPr>
+      </p:pic>
+      <p:sp>
+        <p:nvSpPr>
+          <p:cNvPr id="21" name="Text 5">
+            <a:extLst>
+              <a:ext uri="{FF2B5EF4-FFF2-40B4-BE49-F238E27FC236}">
+                <a16:creationId xmlns:a16="http://schemas.microsoft.com/office/drawing/2014/main" id="{F01CC1F5-CA0B-1200-5DB3-16CC429E2802}"/>
+              </a:ext>
+            </a:extLst>
+          </p:cNvPr>
+          <p:cNvSpPr/>
+          <p:nvPr/>
+        </p:nvSpPr>
+        <p:spPr>
+          <a:xfrm>
+            <a:off x="1343133" y="1205112"/>
+            <a:ext cx="2651760" cy="320040"/>
+          </a:xfrm>
+          <a:prstGeom prst="rect">
+            <a:avLst/>
+          </a:prstGeom>
+          <a:noFill/>
+          <a:ln/>
+        </p:spPr>
+        <p:txBody>
+          <a:bodyPr wrap="square" rtlCol="0" anchor="ctr"/>
+          <a:lstStyle/>
+          <a:p>
+            <a:pPr marL="0" indent="0">
+              <a:buNone/>
+            </a:pPr>
+            <a:r>
+              <a:rPr lang="en-US" sz="1300" b="1" dirty="0">
+                <a:solidFill>
+                  <a:srgbClr val="1B4332"/>
+                </a:solidFill>
+                <a:latin typeface="Calibri" pitchFamily="34" charset="0"/>
+                <a:ea typeface="Calibri" pitchFamily="34" charset="-122"/>
+                <a:cs typeface="Calibri" pitchFamily="34" charset="-120"/>
+              </a:rPr>
+              <a:t>Open Data Barcelona</a:t>
+            </a:r>
+            <a:endParaRPr lang="en-US" sz="1300" dirty="0"/>
+          </a:p>
+        </p:txBody>
+      </p:sp>
+      <p:sp>
+        <p:nvSpPr>
+          <p:cNvPr id="22" name="Text 6">
+            <a:extLst>
+              <a:ext uri="{FF2B5EF4-FFF2-40B4-BE49-F238E27FC236}">
+                <a16:creationId xmlns:a16="http://schemas.microsoft.com/office/drawing/2014/main" id="{9BEED43B-116B-2EC0-06BE-FB2F3C564127}"/>
+              </a:ext>
+            </a:extLst>
+          </p:cNvPr>
+          <p:cNvSpPr/>
+          <p:nvPr/>
+        </p:nvSpPr>
+        <p:spPr>
+          <a:xfrm>
+            <a:off x="1343133" y="1525152"/>
+            <a:ext cx="2651760" cy="274320"/>
+          </a:xfrm>
+          <a:prstGeom prst="rect">
+            <a:avLst/>
+          </a:prstGeom>
+          <a:noFill/>
+          <a:ln/>
+        </p:spPr>
+        <p:txBody>
+          <a:bodyPr wrap="square" rtlCol="0" anchor="t"/>
+          <a:lstStyle/>
+          <a:p>
+            <a:pPr marL="0" indent="0">
+              <a:buNone/>
+            </a:pPr>
+            <a:r>
+              <a:rPr lang="en-US" sz="1000" dirty="0" err="1">
+                <a:solidFill>
+                  <a:srgbClr val="495057"/>
+                </a:solidFill>
+                <a:latin typeface="Calibri" pitchFamily="34" charset="0"/>
+                <a:ea typeface="Calibri" pitchFamily="34" charset="-122"/>
+                <a:cs typeface="Calibri" pitchFamily="34" charset="-120"/>
+              </a:rPr>
+              <a:t>Servei</a:t>
+            </a:r>
+            <a:r>
+              <a:rPr lang="en-US" sz="1000" dirty="0">
+                <a:solidFill>
+                  <a:srgbClr val="495057"/>
+                </a:solidFill>
+                <a:latin typeface="Calibri" pitchFamily="34" charset="0"/>
+                <a:ea typeface="Calibri" pitchFamily="34" charset="-122"/>
+                <a:cs typeface="Calibri" pitchFamily="34" charset="-120"/>
+              </a:rPr>
+              <a:t> Bicing — </a:t>
+            </a:r>
+            <a:r>
+              <a:rPr lang="en-US" sz="1000" dirty="0" err="1">
+                <a:solidFill>
+                  <a:srgbClr val="495057"/>
+                </a:solidFill>
+                <a:latin typeface="Calibri" pitchFamily="34" charset="0"/>
+                <a:ea typeface="Calibri" pitchFamily="34" charset="-122"/>
+                <a:cs typeface="Calibri" pitchFamily="34" charset="-120"/>
+              </a:rPr>
+              <a:t>Disponibilitat</a:t>
+            </a:r>
+            <a:r>
+              <a:rPr lang="en-US" sz="1000" dirty="0">
+                <a:solidFill>
+                  <a:srgbClr val="495057"/>
+                </a:solidFill>
+                <a:latin typeface="Calibri" pitchFamily="34" charset="0"/>
+                <a:ea typeface="Calibri" pitchFamily="34" charset="-122"/>
+                <a:cs typeface="Calibri" pitchFamily="34" charset="-120"/>
+              </a:rPr>
+              <a:t> </a:t>
+            </a:r>
+            <a:r>
+              <a:rPr lang="en-US" sz="1000" dirty="0" err="1">
+                <a:solidFill>
+                  <a:srgbClr val="495057"/>
+                </a:solidFill>
+                <a:latin typeface="Calibri" pitchFamily="34" charset="0"/>
+                <a:ea typeface="Calibri" pitchFamily="34" charset="-122"/>
+                <a:cs typeface="Calibri" pitchFamily="34" charset="-120"/>
+              </a:rPr>
+              <a:t>d’estacions</a:t>
+            </a:r>
+            <a:endParaRPr lang="en-US" sz="1000" dirty="0"/>
+          </a:p>
+        </p:txBody>
+      </p:sp>
+      <p:sp>
+        <p:nvSpPr>
+          <p:cNvPr id="23" name="Text 7">
+            <a:extLst>
+              <a:ext uri="{FF2B5EF4-FFF2-40B4-BE49-F238E27FC236}">
+                <a16:creationId xmlns:a16="http://schemas.microsoft.com/office/drawing/2014/main" id="{C8CEEB86-5C25-CEA2-411D-764465B4AF27}"/>
+              </a:ext>
+            </a:extLst>
+          </p:cNvPr>
+          <p:cNvSpPr/>
+          <p:nvPr/>
+        </p:nvSpPr>
+        <p:spPr>
+          <a:xfrm>
+            <a:off x="565893" y="1890912"/>
+            <a:ext cx="3474720" cy="228600"/>
+          </a:xfrm>
+          <a:prstGeom prst="rect">
+            <a:avLst/>
+          </a:prstGeom>
+          <a:noFill/>
+          <a:ln/>
+        </p:spPr>
+        <p:txBody>
+          <a:bodyPr wrap="square" rtlCol="0" anchor="ctr"/>
+          <a:lstStyle/>
+          <a:p>
+            <a:pPr marL="0" indent="0">
+              <a:buNone/>
+            </a:pPr>
+            <a:r>
+              <a:rPr lang="en-US" sz="900" i="1" dirty="0">
+                <a:solidFill>
+                  <a:srgbClr val="0077BB"/>
+                </a:solidFill>
+                <a:latin typeface="Calibri" pitchFamily="34" charset="0"/>
+                <a:ea typeface="Calibri" pitchFamily="34" charset="-122"/>
+                <a:cs typeface="Calibri" pitchFamily="34" charset="-120"/>
+              </a:rPr>
+              <a:t>opendata-ajuntament.barcelona.cat</a:t>
+            </a:r>
+            <a:endParaRPr lang="en-US" sz="900" dirty="0"/>
+          </a:p>
+        </p:txBody>
+      </p:sp>
+      <p:sp>
+        <p:nvSpPr>
+          <p:cNvPr id="25" name="Shape 10">
+            <a:extLst>
+              <a:ext uri="{FF2B5EF4-FFF2-40B4-BE49-F238E27FC236}">
+                <a16:creationId xmlns:a16="http://schemas.microsoft.com/office/drawing/2014/main" id="{60D1985E-0131-C22D-1A50-207AF9CD3D81}"/>
+              </a:ext>
+            </a:extLst>
+          </p:cNvPr>
+          <p:cNvSpPr/>
+          <p:nvPr/>
+        </p:nvSpPr>
+        <p:spPr>
+          <a:xfrm>
+            <a:off x="4589253" y="1067952"/>
+            <a:ext cx="4206240" cy="475488"/>
+          </a:xfrm>
+          <a:prstGeom prst="rect">
+            <a:avLst/>
+          </a:prstGeom>
+          <a:solidFill>
+            <a:srgbClr val="F1F5F2"/>
+          </a:solidFill>
+          <a:ln w="3810">
+            <a:solidFill>
+              <a:srgbClr val="DDDDDD"/>
+            </a:solidFill>
+            <a:prstDash val="solid"/>
+          </a:ln>
+        </p:spPr>
+        <p:txBody>
+          <a:bodyPr/>
+          <a:lstStyle/>
+          <a:p>
+            <a:endParaRPr lang="es-ES"/>
+          </a:p>
+        </p:txBody>
+      </p:sp>
+      <p:pic>
+        <p:nvPicPr>
+          <p:cNvPr id="26" name="Image 1" descr="preencoded.png">
+            <a:extLst>
+              <a:ext uri="{FF2B5EF4-FFF2-40B4-BE49-F238E27FC236}">
+                <a16:creationId xmlns:a16="http://schemas.microsoft.com/office/drawing/2014/main" id="{B2B1770B-77D7-73BB-1C7C-BC3F56822C80}"/>
+              </a:ext>
+            </a:extLst>
+          </p:cNvPr>
+          <p:cNvPicPr>
+            <a:picLocks noChangeAspect="1"/>
+          </p:cNvPicPr>
+          <p:nvPr/>
+        </p:nvPicPr>
+        <p:blipFill>
+          <a:blip r:embed="rId4"/>
+          <a:stretch>
+            <a:fillRect/>
+          </a:stretch>
+        </p:blipFill>
+        <p:spPr>
+          <a:xfrm>
+            <a:off x="4680693" y="1113672"/>
+            <a:ext cx="384048" cy="384048"/>
+          </a:xfrm>
+          <a:prstGeom prst="rect">
+            <a:avLst/>
+          </a:prstGeom>
+        </p:spPr>
+      </p:pic>
+      <p:sp>
+        <p:nvSpPr>
+          <p:cNvPr id="27" name="Text 11">
+            <a:extLst>
+              <a:ext uri="{FF2B5EF4-FFF2-40B4-BE49-F238E27FC236}">
+                <a16:creationId xmlns:a16="http://schemas.microsoft.com/office/drawing/2014/main" id="{FEEC564F-09A6-58E1-A2FF-E255C3A1A77F}"/>
+              </a:ext>
+            </a:extLst>
+          </p:cNvPr>
+          <p:cNvSpPr/>
+          <p:nvPr/>
+        </p:nvSpPr>
+        <p:spPr>
+          <a:xfrm>
+            <a:off x="5183613" y="1104528"/>
+            <a:ext cx="1645920" cy="219456"/>
+          </a:xfrm>
+          <a:prstGeom prst="rect">
+            <a:avLst/>
+          </a:prstGeom>
+          <a:noFill/>
+          <a:ln/>
+        </p:spPr>
+        <p:txBody>
+          <a:bodyPr wrap="square" lIns="0" tIns="0" rIns="0" bIns="0" rtlCol="0" anchor="ctr"/>
+          <a:lstStyle/>
+          <a:p>
+            <a:pPr marL="0" indent="0">
+              <a:buNone/>
+            </a:pPr>
+            <a:r>
+              <a:rPr lang="en-US" sz="1100" b="1" dirty="0">
+                <a:solidFill>
+                  <a:srgbClr val="1B4332"/>
+                </a:solidFill>
+                <a:latin typeface="Calibri" pitchFamily="34" charset="0"/>
+                <a:ea typeface="Calibri" pitchFamily="34" charset="-122"/>
+                <a:cs typeface="Calibri" pitchFamily="34" charset="-120"/>
+              </a:rPr>
+              <a:t>DuckDB</a:t>
+            </a:r>
+            <a:endParaRPr lang="en-US" sz="1100" dirty="0"/>
+          </a:p>
+        </p:txBody>
+      </p:sp>
+      <p:sp>
+        <p:nvSpPr>
+          <p:cNvPr id="28" name="Text 12">
+            <a:extLst>
+              <a:ext uri="{FF2B5EF4-FFF2-40B4-BE49-F238E27FC236}">
+                <a16:creationId xmlns:a16="http://schemas.microsoft.com/office/drawing/2014/main" id="{DD8558FA-6197-3E7B-6495-991169FC5FA5}"/>
+              </a:ext>
+            </a:extLst>
+          </p:cNvPr>
+          <p:cNvSpPr/>
+          <p:nvPr/>
+        </p:nvSpPr>
+        <p:spPr>
+          <a:xfrm>
+            <a:off x="5183613" y="1314840"/>
+            <a:ext cx="3474720" cy="201168"/>
+          </a:xfrm>
+          <a:prstGeom prst="rect">
+            <a:avLst/>
+          </a:prstGeom>
+          <a:noFill/>
+          <a:ln/>
+        </p:spPr>
+        <p:txBody>
+          <a:bodyPr wrap="square" lIns="0" tIns="0" rIns="0" bIns="0" rtlCol="0" anchor="ctr"/>
+          <a:lstStyle/>
+          <a:p>
+            <a:pPr marL="0" indent="0">
+              <a:buNone/>
+            </a:pPr>
+            <a:r>
+              <a:rPr lang="en-US" sz="900" dirty="0" err="1">
+                <a:solidFill>
+                  <a:srgbClr val="495057"/>
+                </a:solidFill>
+                <a:latin typeface="Calibri" pitchFamily="34" charset="0"/>
+                <a:ea typeface="Calibri" pitchFamily="34" charset="-122"/>
+                <a:cs typeface="Calibri" pitchFamily="34" charset="-120"/>
+              </a:rPr>
+              <a:t>Emmagatzament</a:t>
+            </a:r>
+            <a:r>
+              <a:rPr lang="en-US" sz="900" dirty="0">
+                <a:solidFill>
+                  <a:srgbClr val="495057"/>
+                </a:solidFill>
+                <a:latin typeface="Calibri" pitchFamily="34" charset="0"/>
+                <a:ea typeface="Calibri" pitchFamily="34" charset="-122"/>
+                <a:cs typeface="Calibri" pitchFamily="34" charset="-120"/>
+              </a:rPr>
+              <a:t> </a:t>
+            </a:r>
+            <a:r>
+              <a:rPr lang="en-US" sz="900" dirty="0" err="1">
+                <a:solidFill>
+                  <a:srgbClr val="495057"/>
+                </a:solidFill>
+                <a:latin typeface="Calibri" pitchFamily="34" charset="0"/>
+                <a:ea typeface="Calibri" pitchFamily="34" charset="-122"/>
+                <a:cs typeface="Calibri" pitchFamily="34" charset="-120"/>
+              </a:rPr>
+              <a:t>i</a:t>
+            </a:r>
+            <a:r>
+              <a:rPr lang="en-US" sz="900" dirty="0">
+                <a:solidFill>
+                  <a:srgbClr val="495057"/>
+                </a:solidFill>
+                <a:latin typeface="Calibri" pitchFamily="34" charset="0"/>
+                <a:ea typeface="Calibri" pitchFamily="34" charset="-122"/>
+                <a:cs typeface="Calibri" pitchFamily="34" charset="-120"/>
+              </a:rPr>
+              <a:t> </a:t>
+            </a:r>
+            <a:r>
+              <a:rPr lang="en-US" sz="900" dirty="0" err="1">
+                <a:solidFill>
+                  <a:srgbClr val="495057"/>
+                </a:solidFill>
+                <a:latin typeface="Calibri" pitchFamily="34" charset="0"/>
+                <a:ea typeface="Calibri" pitchFamily="34" charset="-122"/>
+                <a:cs typeface="Calibri" pitchFamily="34" charset="-120"/>
+              </a:rPr>
+              <a:t>processament</a:t>
+            </a:r>
+            <a:r>
+              <a:rPr lang="en-US" sz="900" dirty="0">
+                <a:solidFill>
+                  <a:srgbClr val="495057"/>
+                </a:solidFill>
+                <a:latin typeface="Calibri" pitchFamily="34" charset="0"/>
+                <a:ea typeface="Calibri" pitchFamily="34" charset="-122"/>
+                <a:cs typeface="Calibri" pitchFamily="34" charset="-120"/>
+              </a:rPr>
+              <a:t> de 291M </a:t>
+            </a:r>
+            <a:r>
+              <a:rPr lang="en-US" sz="900" dirty="0" err="1">
+                <a:solidFill>
+                  <a:srgbClr val="495057"/>
+                </a:solidFill>
+                <a:latin typeface="Calibri" pitchFamily="34" charset="0"/>
+                <a:ea typeface="Calibri" pitchFamily="34" charset="-122"/>
+                <a:cs typeface="Calibri" pitchFamily="34" charset="-120"/>
+              </a:rPr>
+              <a:t>registres</a:t>
+            </a:r>
+            <a:endParaRPr lang="en-US" sz="900" dirty="0"/>
+          </a:p>
+        </p:txBody>
+      </p:sp>
+      <p:sp>
+        <p:nvSpPr>
+          <p:cNvPr id="29" name="Shape 13">
+            <a:extLst>
+              <a:ext uri="{FF2B5EF4-FFF2-40B4-BE49-F238E27FC236}">
+                <a16:creationId xmlns:a16="http://schemas.microsoft.com/office/drawing/2014/main" id="{6E09F885-B057-954B-B2ED-F93A4D523421}"/>
+              </a:ext>
+            </a:extLst>
+          </p:cNvPr>
+          <p:cNvSpPr/>
+          <p:nvPr/>
+        </p:nvSpPr>
+        <p:spPr>
+          <a:xfrm>
+            <a:off x="4589253" y="1616592"/>
+            <a:ext cx="4206240" cy="475488"/>
+          </a:xfrm>
+          <a:prstGeom prst="rect">
+            <a:avLst/>
+          </a:prstGeom>
+          <a:solidFill>
+            <a:srgbClr val="FFFFFF"/>
+          </a:solidFill>
+          <a:ln w="3810">
+            <a:solidFill>
+              <a:srgbClr val="DDDDDD"/>
+            </a:solidFill>
+            <a:prstDash val="solid"/>
+          </a:ln>
+        </p:spPr>
+        <p:txBody>
+          <a:bodyPr/>
+          <a:lstStyle/>
+          <a:p>
+            <a:endParaRPr lang="es-ES"/>
+          </a:p>
+        </p:txBody>
+      </p:sp>
+      <p:pic>
+        <p:nvPicPr>
+          <p:cNvPr id="30" name="Image 2" descr="preencoded.png">
+            <a:extLst>
+              <a:ext uri="{FF2B5EF4-FFF2-40B4-BE49-F238E27FC236}">
+                <a16:creationId xmlns:a16="http://schemas.microsoft.com/office/drawing/2014/main" id="{7730F17F-D655-DF3A-E75D-C3B829BEBA78}"/>
+              </a:ext>
+            </a:extLst>
+          </p:cNvPr>
+          <p:cNvPicPr>
+            <a:picLocks noChangeAspect="1"/>
+          </p:cNvPicPr>
+          <p:nvPr/>
+        </p:nvPicPr>
+        <p:blipFill>
+          <a:blip r:embed="rId5"/>
+          <a:stretch>
+            <a:fillRect/>
+          </a:stretch>
+        </p:blipFill>
+        <p:spPr>
+          <a:xfrm>
+            <a:off x="4680693" y="1662312"/>
+            <a:ext cx="384048" cy="384048"/>
+          </a:xfrm>
+          <a:prstGeom prst="rect">
+            <a:avLst/>
+          </a:prstGeom>
+        </p:spPr>
+      </p:pic>
+      <p:sp>
+        <p:nvSpPr>
+          <p:cNvPr id="31" name="Text 14">
+            <a:extLst>
+              <a:ext uri="{FF2B5EF4-FFF2-40B4-BE49-F238E27FC236}">
+                <a16:creationId xmlns:a16="http://schemas.microsoft.com/office/drawing/2014/main" id="{33E31794-A748-8751-BEB8-AA67B7D89652}"/>
+              </a:ext>
+            </a:extLst>
+          </p:cNvPr>
+          <p:cNvSpPr/>
+          <p:nvPr/>
+        </p:nvSpPr>
+        <p:spPr>
+          <a:xfrm>
+            <a:off x="5183613" y="1653168"/>
+            <a:ext cx="1645920" cy="219456"/>
+          </a:xfrm>
+          <a:prstGeom prst="rect">
+            <a:avLst/>
+          </a:prstGeom>
+          <a:noFill/>
+          <a:ln/>
+        </p:spPr>
+        <p:txBody>
+          <a:bodyPr wrap="square" lIns="0" tIns="0" rIns="0" bIns="0" rtlCol="0" anchor="ctr"/>
+          <a:lstStyle/>
+          <a:p>
+            <a:pPr marL="0" indent="0">
+              <a:buNone/>
+            </a:pPr>
+            <a:r>
+              <a:rPr lang="en-US" sz="1100" b="1" dirty="0">
+                <a:solidFill>
+                  <a:srgbClr val="1B4332"/>
+                </a:solidFill>
+                <a:latin typeface="Calibri" pitchFamily="34" charset="0"/>
+                <a:ea typeface="Calibri" pitchFamily="34" charset="-122"/>
+                <a:cs typeface="Calibri" pitchFamily="34" charset="-120"/>
+              </a:rPr>
+              <a:t>Python / Pandas</a:t>
+            </a:r>
+            <a:endParaRPr lang="en-US" sz="1100" dirty="0"/>
+          </a:p>
+        </p:txBody>
+      </p:sp>
+      <p:sp>
+        <p:nvSpPr>
+          <p:cNvPr id="32" name="Text 15">
+            <a:extLst>
+              <a:ext uri="{FF2B5EF4-FFF2-40B4-BE49-F238E27FC236}">
+                <a16:creationId xmlns:a16="http://schemas.microsoft.com/office/drawing/2014/main" id="{B4801A14-9459-E801-6C19-23DB5D3C63E2}"/>
+              </a:ext>
+            </a:extLst>
+          </p:cNvPr>
+          <p:cNvSpPr/>
+          <p:nvPr/>
+        </p:nvSpPr>
+        <p:spPr>
+          <a:xfrm>
+            <a:off x="5183613" y="1863480"/>
+            <a:ext cx="3474720" cy="201168"/>
+          </a:xfrm>
+          <a:prstGeom prst="rect">
+            <a:avLst/>
+          </a:prstGeom>
+          <a:noFill/>
+          <a:ln/>
+        </p:spPr>
+        <p:txBody>
+          <a:bodyPr wrap="square" lIns="0" tIns="0" rIns="0" bIns="0" rtlCol="0" anchor="ctr"/>
+          <a:lstStyle/>
+          <a:p>
+            <a:pPr marL="0" indent="0">
+              <a:buNone/>
+            </a:pPr>
+            <a:r>
+              <a:rPr lang="en-US" sz="900" dirty="0" err="1">
+                <a:solidFill>
+                  <a:srgbClr val="495057"/>
+                </a:solidFill>
+                <a:latin typeface="Calibri" pitchFamily="34" charset="0"/>
+                <a:ea typeface="Calibri" pitchFamily="34" charset="-122"/>
+                <a:cs typeface="Calibri" pitchFamily="34" charset="-120"/>
+              </a:rPr>
+              <a:t>Anàlisi</a:t>
+            </a:r>
+            <a:r>
+              <a:rPr lang="en-US" sz="900" dirty="0">
+                <a:solidFill>
+                  <a:srgbClr val="495057"/>
+                </a:solidFill>
+                <a:latin typeface="Calibri" pitchFamily="34" charset="0"/>
+                <a:ea typeface="Calibri" pitchFamily="34" charset="-122"/>
+                <a:cs typeface="Calibri" pitchFamily="34" charset="-120"/>
+              </a:rPr>
+              <a:t> </a:t>
+            </a:r>
+            <a:r>
+              <a:rPr lang="en-US" sz="900" dirty="0" err="1">
+                <a:solidFill>
+                  <a:srgbClr val="495057"/>
+                </a:solidFill>
+                <a:latin typeface="Calibri" pitchFamily="34" charset="0"/>
+                <a:ea typeface="Calibri" pitchFamily="34" charset="-122"/>
+                <a:cs typeface="Calibri" pitchFamily="34" charset="-120"/>
+              </a:rPr>
+              <a:t>i</a:t>
+            </a:r>
+            <a:r>
+              <a:rPr lang="en-US" sz="900" dirty="0">
+                <a:solidFill>
+                  <a:srgbClr val="495057"/>
+                </a:solidFill>
+                <a:latin typeface="Calibri" pitchFamily="34" charset="0"/>
+                <a:ea typeface="Calibri" pitchFamily="34" charset="-122"/>
+                <a:cs typeface="Calibri" pitchFamily="34" charset="-120"/>
+              </a:rPr>
+              <a:t> </a:t>
+            </a:r>
+            <a:r>
+              <a:rPr lang="en-US" sz="900" dirty="0" err="1">
+                <a:solidFill>
+                  <a:srgbClr val="495057"/>
+                </a:solidFill>
+                <a:latin typeface="Calibri" pitchFamily="34" charset="0"/>
+                <a:ea typeface="Calibri" pitchFamily="34" charset="-122"/>
+                <a:cs typeface="Calibri" pitchFamily="34" charset="-120"/>
+              </a:rPr>
+              <a:t>transformació</a:t>
+            </a:r>
+            <a:r>
+              <a:rPr lang="en-US" sz="900" dirty="0">
+                <a:solidFill>
+                  <a:srgbClr val="495057"/>
+                </a:solidFill>
+                <a:latin typeface="Calibri" pitchFamily="34" charset="0"/>
+                <a:ea typeface="Calibri" pitchFamily="34" charset="-122"/>
+                <a:cs typeface="Calibri" pitchFamily="34" charset="-120"/>
+              </a:rPr>
+              <a:t> de </a:t>
+            </a:r>
+            <a:r>
+              <a:rPr lang="en-US" sz="900" dirty="0" err="1">
+                <a:solidFill>
+                  <a:srgbClr val="495057"/>
+                </a:solidFill>
+                <a:latin typeface="Calibri" pitchFamily="34" charset="0"/>
+                <a:ea typeface="Calibri" pitchFamily="34" charset="-122"/>
+                <a:cs typeface="Calibri" pitchFamily="34" charset="-120"/>
+              </a:rPr>
+              <a:t>dades</a:t>
+            </a:r>
+            <a:endParaRPr lang="en-US" sz="900" dirty="0"/>
+          </a:p>
+        </p:txBody>
+      </p:sp>
+      <p:sp>
+        <p:nvSpPr>
+          <p:cNvPr id="33" name="Shape 16">
+            <a:extLst>
+              <a:ext uri="{FF2B5EF4-FFF2-40B4-BE49-F238E27FC236}">
+                <a16:creationId xmlns:a16="http://schemas.microsoft.com/office/drawing/2014/main" id="{9C947ED6-A7E1-F38D-2161-7060107EA9D2}"/>
+              </a:ext>
+            </a:extLst>
+          </p:cNvPr>
+          <p:cNvSpPr/>
+          <p:nvPr/>
+        </p:nvSpPr>
+        <p:spPr>
+          <a:xfrm>
+            <a:off x="4589253" y="2165232"/>
+            <a:ext cx="4206240" cy="475488"/>
+          </a:xfrm>
+          <a:prstGeom prst="rect">
+            <a:avLst/>
+          </a:prstGeom>
+          <a:solidFill>
+            <a:srgbClr val="F1F5F2"/>
+          </a:solidFill>
+          <a:ln w="3810">
+            <a:solidFill>
+              <a:srgbClr val="DDDDDD"/>
+            </a:solidFill>
+            <a:prstDash val="solid"/>
+          </a:ln>
+        </p:spPr>
+        <p:txBody>
+          <a:bodyPr/>
+          <a:lstStyle/>
+          <a:p>
+            <a:endParaRPr lang="es-ES"/>
+          </a:p>
+        </p:txBody>
+      </p:sp>
+      <p:pic>
+        <p:nvPicPr>
+          <p:cNvPr id="34" name="Image 3" descr="preencoded.png">
+            <a:extLst>
+              <a:ext uri="{FF2B5EF4-FFF2-40B4-BE49-F238E27FC236}">
+                <a16:creationId xmlns:a16="http://schemas.microsoft.com/office/drawing/2014/main" id="{AEE64BF4-D988-C7D1-DDED-F2063A59B6F8}"/>
+              </a:ext>
+            </a:extLst>
+          </p:cNvPr>
+          <p:cNvPicPr>
+            <a:picLocks noChangeAspect="1"/>
+          </p:cNvPicPr>
+          <p:nvPr/>
+        </p:nvPicPr>
+        <p:blipFill>
+          <a:blip r:embed="rId6"/>
+          <a:stretch>
+            <a:fillRect/>
+          </a:stretch>
+        </p:blipFill>
+        <p:spPr>
+          <a:xfrm>
+            <a:off x="4680693" y="2210952"/>
+            <a:ext cx="384048" cy="384048"/>
+          </a:xfrm>
+          <a:prstGeom prst="rect">
+            <a:avLst/>
+          </a:prstGeom>
+        </p:spPr>
+      </p:pic>
+      <p:sp>
+        <p:nvSpPr>
+          <p:cNvPr id="35" name="Text 17">
+            <a:extLst>
+              <a:ext uri="{FF2B5EF4-FFF2-40B4-BE49-F238E27FC236}">
+                <a16:creationId xmlns:a16="http://schemas.microsoft.com/office/drawing/2014/main" id="{D563FD38-3023-70EE-3B4D-57ECBB7B2C86}"/>
+              </a:ext>
+            </a:extLst>
+          </p:cNvPr>
+          <p:cNvSpPr/>
+          <p:nvPr/>
+        </p:nvSpPr>
+        <p:spPr>
+          <a:xfrm>
+            <a:off x="5183613" y="2201808"/>
+            <a:ext cx="1645920" cy="219456"/>
+          </a:xfrm>
+          <a:prstGeom prst="rect">
+            <a:avLst/>
+          </a:prstGeom>
+          <a:noFill/>
+          <a:ln/>
+        </p:spPr>
+        <p:txBody>
+          <a:bodyPr wrap="square" lIns="0" tIns="0" rIns="0" bIns="0" rtlCol="0" anchor="ctr"/>
+          <a:lstStyle/>
+          <a:p>
+            <a:pPr marL="0" indent="0">
+              <a:buNone/>
+            </a:pPr>
+            <a:r>
+              <a:rPr lang="en-US" sz="1100" b="1" dirty="0">
+                <a:solidFill>
+                  <a:srgbClr val="1B4332"/>
+                </a:solidFill>
+                <a:latin typeface="Calibri" pitchFamily="34" charset="0"/>
+                <a:ea typeface="Calibri" pitchFamily="34" charset="-122"/>
+                <a:cs typeface="Calibri" pitchFamily="34" charset="-120"/>
+              </a:rPr>
+              <a:t>Scikit-learn</a:t>
+            </a:r>
+            <a:endParaRPr lang="en-US" sz="1100" dirty="0"/>
+          </a:p>
+        </p:txBody>
+      </p:sp>
+      <p:sp>
+        <p:nvSpPr>
+          <p:cNvPr id="36" name="Text 18">
+            <a:extLst>
+              <a:ext uri="{FF2B5EF4-FFF2-40B4-BE49-F238E27FC236}">
+                <a16:creationId xmlns:a16="http://schemas.microsoft.com/office/drawing/2014/main" id="{81BA6D6C-9E6E-521F-4396-309FD012BFB6}"/>
+              </a:ext>
+            </a:extLst>
+          </p:cNvPr>
+          <p:cNvSpPr/>
+          <p:nvPr/>
+        </p:nvSpPr>
+        <p:spPr>
+          <a:xfrm>
+            <a:off x="5183613" y="2412120"/>
+            <a:ext cx="3474720" cy="201168"/>
+          </a:xfrm>
+          <a:prstGeom prst="rect">
+            <a:avLst/>
+          </a:prstGeom>
+          <a:noFill/>
+          <a:ln/>
+        </p:spPr>
+        <p:txBody>
+          <a:bodyPr wrap="square" lIns="0" tIns="0" rIns="0" bIns="0" rtlCol="0" anchor="ctr"/>
+          <a:lstStyle/>
+          <a:p>
+            <a:pPr marL="0" indent="0">
+              <a:buNone/>
+            </a:pPr>
+            <a:r>
+              <a:rPr lang="en-US" sz="900" dirty="0">
+                <a:solidFill>
+                  <a:srgbClr val="495057"/>
+                </a:solidFill>
+                <a:latin typeface="Calibri" pitchFamily="34" charset="0"/>
+                <a:ea typeface="Calibri" pitchFamily="34" charset="-122"/>
+                <a:cs typeface="Calibri" pitchFamily="34" charset="-120"/>
+              </a:rPr>
+              <a:t>Clustering K-Means y Random Forest</a:t>
+            </a:r>
+            <a:endParaRPr lang="en-US" sz="900" dirty="0"/>
+          </a:p>
+        </p:txBody>
+      </p:sp>
+      <p:sp>
+        <p:nvSpPr>
+          <p:cNvPr id="37" name="Shape 19">
+            <a:extLst>
+              <a:ext uri="{FF2B5EF4-FFF2-40B4-BE49-F238E27FC236}">
+                <a16:creationId xmlns:a16="http://schemas.microsoft.com/office/drawing/2014/main" id="{930FD3D1-F46A-DAB6-B540-745A31B7C676}"/>
+              </a:ext>
+            </a:extLst>
+          </p:cNvPr>
+          <p:cNvSpPr/>
+          <p:nvPr/>
+        </p:nvSpPr>
+        <p:spPr>
+          <a:xfrm>
+            <a:off x="4589253" y="2713872"/>
+            <a:ext cx="4206240" cy="475488"/>
+          </a:xfrm>
+          <a:prstGeom prst="rect">
+            <a:avLst/>
+          </a:prstGeom>
+          <a:solidFill>
+            <a:srgbClr val="FFFFFF"/>
+          </a:solidFill>
+          <a:ln w="3810">
+            <a:solidFill>
+              <a:srgbClr val="DDDDDD"/>
+            </a:solidFill>
+            <a:prstDash val="solid"/>
+          </a:ln>
+        </p:spPr>
+        <p:txBody>
+          <a:bodyPr/>
+          <a:lstStyle/>
+          <a:p>
+            <a:endParaRPr lang="es-ES"/>
+          </a:p>
+        </p:txBody>
+      </p:sp>
+      <p:pic>
+        <p:nvPicPr>
+          <p:cNvPr id="38" name="Image 4" descr="preencoded.png">
+            <a:extLst>
+              <a:ext uri="{FF2B5EF4-FFF2-40B4-BE49-F238E27FC236}">
+                <a16:creationId xmlns:a16="http://schemas.microsoft.com/office/drawing/2014/main" id="{E8CDF67E-5C56-9D8F-6046-856999166C8D}"/>
+              </a:ext>
+            </a:extLst>
+          </p:cNvPr>
+          <p:cNvPicPr>
+            <a:picLocks noChangeAspect="1"/>
+          </p:cNvPicPr>
+          <p:nvPr/>
+        </p:nvPicPr>
+        <p:blipFill>
+          <a:blip r:embed="rId7"/>
+          <a:stretch>
+            <a:fillRect/>
+          </a:stretch>
+        </p:blipFill>
+        <p:spPr>
+          <a:xfrm>
+            <a:off x="4680693" y="2759592"/>
+            <a:ext cx="384048" cy="384048"/>
+          </a:xfrm>
+          <a:prstGeom prst="rect">
+            <a:avLst/>
+          </a:prstGeom>
+        </p:spPr>
+      </p:pic>
+      <p:sp>
+        <p:nvSpPr>
+          <p:cNvPr id="39" name="Text 20">
+            <a:extLst>
+              <a:ext uri="{FF2B5EF4-FFF2-40B4-BE49-F238E27FC236}">
+                <a16:creationId xmlns:a16="http://schemas.microsoft.com/office/drawing/2014/main" id="{E0E201CD-934F-9443-53AA-9FAC21617D4E}"/>
+              </a:ext>
+            </a:extLst>
+          </p:cNvPr>
+          <p:cNvSpPr/>
+          <p:nvPr/>
+        </p:nvSpPr>
+        <p:spPr>
+          <a:xfrm>
+            <a:off x="5183613" y="2750448"/>
+            <a:ext cx="1645920" cy="219456"/>
+          </a:xfrm>
+          <a:prstGeom prst="rect">
+            <a:avLst/>
+          </a:prstGeom>
+          <a:noFill/>
+          <a:ln/>
+        </p:spPr>
+        <p:txBody>
+          <a:bodyPr wrap="square" lIns="0" tIns="0" rIns="0" bIns="0" rtlCol="0" anchor="ctr"/>
+          <a:lstStyle/>
+          <a:p>
+            <a:pPr marL="0" indent="0">
+              <a:buNone/>
+            </a:pPr>
+            <a:r>
+              <a:rPr lang="en-US" sz="1100" b="1" dirty="0">
+                <a:solidFill>
+                  <a:srgbClr val="1B4332"/>
+                </a:solidFill>
+                <a:latin typeface="Calibri" pitchFamily="34" charset="0"/>
+                <a:ea typeface="Calibri" pitchFamily="34" charset="-122"/>
+                <a:cs typeface="Calibri" pitchFamily="34" charset="-120"/>
+              </a:rPr>
+              <a:t>Folium</a:t>
+            </a:r>
+            <a:endParaRPr lang="en-US" sz="1100" dirty="0"/>
+          </a:p>
+        </p:txBody>
+      </p:sp>
+      <p:sp>
+        <p:nvSpPr>
+          <p:cNvPr id="40" name="Text 21">
+            <a:extLst>
+              <a:ext uri="{FF2B5EF4-FFF2-40B4-BE49-F238E27FC236}">
+                <a16:creationId xmlns:a16="http://schemas.microsoft.com/office/drawing/2014/main" id="{C3A16212-E058-70DE-2B71-3BD692E60CD1}"/>
+              </a:ext>
+            </a:extLst>
+          </p:cNvPr>
+          <p:cNvSpPr/>
+          <p:nvPr/>
+        </p:nvSpPr>
+        <p:spPr>
+          <a:xfrm>
+            <a:off x="5183613" y="2960760"/>
+            <a:ext cx="3474720" cy="201168"/>
+          </a:xfrm>
+          <a:prstGeom prst="rect">
+            <a:avLst/>
+          </a:prstGeom>
+          <a:noFill/>
+          <a:ln/>
+        </p:spPr>
+        <p:txBody>
+          <a:bodyPr wrap="square" lIns="0" tIns="0" rIns="0" bIns="0" rtlCol="0" anchor="ctr"/>
+          <a:lstStyle/>
+          <a:p>
+            <a:pPr marL="0" indent="0">
+              <a:buNone/>
+            </a:pPr>
+            <a:r>
+              <a:rPr lang="en-US" sz="900" dirty="0">
+                <a:solidFill>
+                  <a:srgbClr val="495057"/>
+                </a:solidFill>
+                <a:latin typeface="Calibri" pitchFamily="34" charset="0"/>
+                <a:ea typeface="Calibri" pitchFamily="34" charset="-122"/>
+                <a:cs typeface="Calibri" pitchFamily="34" charset="-120"/>
+              </a:rPr>
+              <a:t>Mapes </a:t>
+            </a:r>
+            <a:r>
+              <a:rPr lang="en-US" sz="900" dirty="0" err="1">
+                <a:solidFill>
+                  <a:srgbClr val="495057"/>
+                </a:solidFill>
+                <a:latin typeface="Calibri" pitchFamily="34" charset="0"/>
+                <a:ea typeface="Calibri" pitchFamily="34" charset="-122"/>
+                <a:cs typeface="Calibri" pitchFamily="34" charset="-120"/>
+              </a:rPr>
+              <a:t>interactius</a:t>
+            </a:r>
+            <a:r>
+              <a:rPr lang="en-US" sz="900" dirty="0">
+                <a:solidFill>
+                  <a:srgbClr val="495057"/>
+                </a:solidFill>
+                <a:latin typeface="Calibri" pitchFamily="34" charset="0"/>
+                <a:ea typeface="Calibri" pitchFamily="34" charset="-122"/>
+                <a:cs typeface="Calibri" pitchFamily="34" charset="-120"/>
+              </a:rPr>
+              <a:t> </a:t>
+            </a:r>
+            <a:r>
+              <a:rPr lang="en-US" sz="900" dirty="0" err="1">
+                <a:solidFill>
+                  <a:srgbClr val="495057"/>
+                </a:solidFill>
+                <a:latin typeface="Calibri" pitchFamily="34" charset="0"/>
+                <a:ea typeface="Calibri" pitchFamily="34" charset="-122"/>
+                <a:cs typeface="Calibri" pitchFamily="34" charset="-120"/>
+              </a:rPr>
+              <a:t>d’estacions</a:t>
+            </a:r>
+            <a:r>
+              <a:rPr lang="en-US" sz="900" dirty="0">
+                <a:solidFill>
+                  <a:srgbClr val="495057"/>
+                </a:solidFill>
+                <a:latin typeface="Calibri" pitchFamily="34" charset="0"/>
+                <a:ea typeface="Calibri" pitchFamily="34" charset="-122"/>
+                <a:cs typeface="Calibri" pitchFamily="34" charset="-120"/>
+              </a:rPr>
+              <a:t> </a:t>
+            </a:r>
+            <a:r>
+              <a:rPr lang="en-US" sz="900" dirty="0" err="1">
+                <a:solidFill>
+                  <a:srgbClr val="495057"/>
+                </a:solidFill>
+                <a:latin typeface="Calibri" pitchFamily="34" charset="0"/>
+                <a:ea typeface="Calibri" pitchFamily="34" charset="-122"/>
+                <a:cs typeface="Calibri" pitchFamily="34" charset="-120"/>
+              </a:rPr>
+              <a:t>i</a:t>
+            </a:r>
+            <a:r>
+              <a:rPr lang="en-US" sz="900" dirty="0">
+                <a:solidFill>
+                  <a:srgbClr val="495057"/>
+                </a:solidFill>
+                <a:latin typeface="Calibri" pitchFamily="34" charset="0"/>
+                <a:ea typeface="Calibri" pitchFamily="34" charset="-122"/>
+                <a:cs typeface="Calibri" pitchFamily="34" charset="-120"/>
+              </a:rPr>
+              <a:t> clústeres</a:t>
+            </a:r>
+            <a:endParaRPr lang="en-US" sz="900" dirty="0"/>
+          </a:p>
+        </p:txBody>
+      </p:sp>
+      <p:sp>
+        <p:nvSpPr>
+          <p:cNvPr id="41" name="Shape 22">
+            <a:extLst>
+              <a:ext uri="{FF2B5EF4-FFF2-40B4-BE49-F238E27FC236}">
+                <a16:creationId xmlns:a16="http://schemas.microsoft.com/office/drawing/2014/main" id="{8003050F-37C1-00ED-56BA-80B9D326F4FF}"/>
+              </a:ext>
+            </a:extLst>
+          </p:cNvPr>
+          <p:cNvSpPr/>
+          <p:nvPr/>
+        </p:nvSpPr>
+        <p:spPr>
+          <a:xfrm>
+            <a:off x="4589253" y="3262512"/>
+            <a:ext cx="4206240" cy="475488"/>
+          </a:xfrm>
+          <a:prstGeom prst="rect">
+            <a:avLst/>
+          </a:prstGeom>
+          <a:solidFill>
+            <a:srgbClr val="F1F5F2"/>
+          </a:solidFill>
+          <a:ln w="3810">
+            <a:solidFill>
+              <a:srgbClr val="DDDDDD"/>
+            </a:solidFill>
+            <a:prstDash val="solid"/>
+          </a:ln>
+        </p:spPr>
+        <p:txBody>
+          <a:bodyPr/>
+          <a:lstStyle/>
+          <a:p>
+            <a:endParaRPr lang="es-ES"/>
+          </a:p>
+        </p:txBody>
+      </p:sp>
+      <p:pic>
+        <p:nvPicPr>
+          <p:cNvPr id="42" name="Image 5" descr="preencoded.png">
+            <a:extLst>
+              <a:ext uri="{FF2B5EF4-FFF2-40B4-BE49-F238E27FC236}">
+                <a16:creationId xmlns:a16="http://schemas.microsoft.com/office/drawing/2014/main" id="{7FC07652-B3AC-EA01-F10D-476630204219}"/>
+              </a:ext>
+            </a:extLst>
+          </p:cNvPr>
+          <p:cNvPicPr>
+            <a:picLocks noChangeAspect="1"/>
+          </p:cNvPicPr>
+          <p:nvPr/>
+        </p:nvPicPr>
+        <p:blipFill>
+          <a:blip r:embed="rId8"/>
+          <a:stretch>
+            <a:fillRect/>
+          </a:stretch>
+        </p:blipFill>
+        <p:spPr>
+          <a:xfrm>
+            <a:off x="4680693" y="3308232"/>
+            <a:ext cx="384048" cy="384048"/>
+          </a:xfrm>
+          <a:prstGeom prst="rect">
+            <a:avLst/>
+          </a:prstGeom>
+        </p:spPr>
+      </p:pic>
+      <p:sp>
+        <p:nvSpPr>
+          <p:cNvPr id="43" name="Text 23">
+            <a:extLst>
+              <a:ext uri="{FF2B5EF4-FFF2-40B4-BE49-F238E27FC236}">
+                <a16:creationId xmlns:a16="http://schemas.microsoft.com/office/drawing/2014/main" id="{5FC22A22-A015-B401-C589-DE896DD8E07E}"/>
+              </a:ext>
+            </a:extLst>
+          </p:cNvPr>
+          <p:cNvSpPr/>
+          <p:nvPr/>
+        </p:nvSpPr>
+        <p:spPr>
+          <a:xfrm>
+            <a:off x="5183613" y="3299088"/>
+            <a:ext cx="1645920" cy="219456"/>
+          </a:xfrm>
+          <a:prstGeom prst="rect">
+            <a:avLst/>
+          </a:prstGeom>
+          <a:noFill/>
+          <a:ln/>
+        </p:spPr>
+        <p:txBody>
+          <a:bodyPr wrap="square" lIns="0" tIns="0" rIns="0" bIns="0" rtlCol="0" anchor="ctr"/>
+          <a:lstStyle/>
+          <a:p>
+            <a:pPr marL="0" indent="0">
+              <a:buNone/>
+            </a:pPr>
+            <a:r>
+              <a:rPr lang="en-US" sz="1100" b="1" dirty="0">
+                <a:solidFill>
+                  <a:srgbClr val="1B4332"/>
+                </a:solidFill>
+                <a:latin typeface="Calibri" pitchFamily="34" charset="0"/>
+                <a:ea typeface="Calibri" pitchFamily="34" charset="-122"/>
+                <a:cs typeface="Calibri" pitchFamily="34" charset="-120"/>
+              </a:rPr>
+              <a:t>Matplotlib / Seaborn</a:t>
+            </a:r>
+            <a:endParaRPr lang="en-US" sz="1100" dirty="0"/>
+          </a:p>
+        </p:txBody>
+      </p:sp>
+      <p:sp>
+        <p:nvSpPr>
+          <p:cNvPr id="44" name="Text 24">
+            <a:extLst>
+              <a:ext uri="{FF2B5EF4-FFF2-40B4-BE49-F238E27FC236}">
+                <a16:creationId xmlns:a16="http://schemas.microsoft.com/office/drawing/2014/main" id="{54051F50-2CAC-C920-4F5F-4547B357A51B}"/>
+              </a:ext>
+            </a:extLst>
+          </p:cNvPr>
+          <p:cNvSpPr/>
+          <p:nvPr/>
+        </p:nvSpPr>
+        <p:spPr>
+          <a:xfrm>
+            <a:off x="5183613" y="3509400"/>
+            <a:ext cx="3474720" cy="201168"/>
+          </a:xfrm>
+          <a:prstGeom prst="rect">
+            <a:avLst/>
+          </a:prstGeom>
+          <a:noFill/>
+          <a:ln/>
+        </p:spPr>
+        <p:txBody>
+          <a:bodyPr wrap="square" lIns="0" tIns="0" rIns="0" bIns="0" rtlCol="0" anchor="ctr"/>
+          <a:lstStyle/>
+          <a:p>
+            <a:pPr marL="0" indent="0">
+              <a:buNone/>
+            </a:pPr>
+            <a:r>
+              <a:rPr lang="en-US" sz="900" dirty="0" err="1">
+                <a:solidFill>
+                  <a:srgbClr val="495057"/>
+                </a:solidFill>
+                <a:latin typeface="Calibri" pitchFamily="34" charset="0"/>
+                <a:ea typeface="Calibri" pitchFamily="34" charset="-122"/>
+                <a:cs typeface="Calibri" pitchFamily="34" charset="-120"/>
+              </a:rPr>
+              <a:t>Visualitzacions</a:t>
+            </a:r>
+            <a:r>
+              <a:rPr lang="en-US" sz="900" dirty="0">
+                <a:solidFill>
+                  <a:srgbClr val="495057"/>
+                </a:solidFill>
+                <a:latin typeface="Calibri" pitchFamily="34" charset="0"/>
+                <a:ea typeface="Calibri" pitchFamily="34" charset="-122"/>
+                <a:cs typeface="Calibri" pitchFamily="34" charset="-120"/>
+              </a:rPr>
+              <a:t> </a:t>
+            </a:r>
+            <a:r>
+              <a:rPr lang="en-US" sz="900" dirty="0" err="1">
+                <a:solidFill>
+                  <a:srgbClr val="495057"/>
+                </a:solidFill>
+                <a:latin typeface="Calibri" pitchFamily="34" charset="0"/>
+                <a:ea typeface="Calibri" pitchFamily="34" charset="-122"/>
+                <a:cs typeface="Calibri" pitchFamily="34" charset="-120"/>
+              </a:rPr>
+              <a:t>estàtiques</a:t>
+            </a:r>
+            <a:endParaRPr lang="en-US" sz="900" dirty="0"/>
+          </a:p>
+        </p:txBody>
+      </p:sp>
+      <p:sp>
+        <p:nvSpPr>
+          <p:cNvPr id="45" name="Text 3">
+            <a:extLst>
+              <a:ext uri="{FF2B5EF4-FFF2-40B4-BE49-F238E27FC236}">
+                <a16:creationId xmlns:a16="http://schemas.microsoft.com/office/drawing/2014/main" id="{8E0D1171-81B3-A6DD-2466-A446FF4988E3}"/>
+              </a:ext>
+            </a:extLst>
+          </p:cNvPr>
+          <p:cNvSpPr/>
+          <p:nvPr/>
+        </p:nvSpPr>
+        <p:spPr>
+          <a:xfrm>
+            <a:off x="255343" y="396032"/>
+            <a:ext cx="3840480" cy="274320"/>
+          </a:xfrm>
+          <a:prstGeom prst="rect">
+            <a:avLst/>
+          </a:prstGeom>
+          <a:noFill/>
+          <a:ln/>
+        </p:spPr>
+        <p:txBody>
+          <a:bodyPr wrap="square" rtlCol="0" anchor="ctr"/>
+          <a:lstStyle/>
+          <a:p>
+            <a:pPr marL="0" indent="0">
+              <a:buNone/>
+            </a:pPr>
+            <a:r>
+              <a:rPr lang="en-US" sz="3200" b="1" dirty="0">
+                <a:solidFill>
+                  <a:srgbClr val="1B4332"/>
+                </a:solidFill>
+                <a:latin typeface="Calibri" pitchFamily="34" charset="0"/>
+                <a:ea typeface="Calibri" pitchFamily="34" charset="-122"/>
+                <a:cs typeface="Calibri" pitchFamily="34" charset="-120"/>
+              </a:rPr>
+              <a:t>FONT DE DADES</a:t>
+            </a:r>
+          </a:p>
+        </p:txBody>
+      </p:sp>
+      <p:sp>
+        <p:nvSpPr>
+          <p:cNvPr id="46" name="Text 9">
+            <a:extLst>
+              <a:ext uri="{FF2B5EF4-FFF2-40B4-BE49-F238E27FC236}">
+                <a16:creationId xmlns:a16="http://schemas.microsoft.com/office/drawing/2014/main" id="{130D9A93-DD6B-7580-9A04-D408EE585783}"/>
+              </a:ext>
+            </a:extLst>
+          </p:cNvPr>
+          <p:cNvSpPr/>
+          <p:nvPr/>
+        </p:nvSpPr>
+        <p:spPr>
+          <a:xfrm>
+            <a:off x="4480560" y="383440"/>
+            <a:ext cx="4206240" cy="274320"/>
+          </a:xfrm>
+          <a:prstGeom prst="rect">
+            <a:avLst/>
+          </a:prstGeom>
+          <a:noFill/>
+          <a:ln/>
+        </p:spPr>
+        <p:txBody>
+          <a:bodyPr wrap="square" rtlCol="0" anchor="ctr"/>
+          <a:lstStyle/>
+          <a:p>
+            <a:pPr marL="0" indent="0">
+              <a:buNone/>
+            </a:pPr>
+            <a:r>
+              <a:rPr lang="en-US" sz="3200" b="1" dirty="0">
+                <a:solidFill>
+                  <a:srgbClr val="1B4332"/>
+                </a:solidFill>
+                <a:latin typeface="Calibri" pitchFamily="34" charset="0"/>
+                <a:ea typeface="Calibri" pitchFamily="34" charset="-122"/>
+                <a:cs typeface="Calibri" pitchFamily="34" charset="-120"/>
+              </a:rPr>
+              <a:t>EINES</a:t>
+            </a:r>
+          </a:p>
+        </p:txBody>
+      </p:sp>
+    </p:spTree>
+    <p:extLst>
+      <p:ext uri="{BB962C8B-B14F-4D97-AF65-F5344CB8AC3E}">
+        <p14:creationId xmlns:p14="http://schemas.microsoft.com/office/powerpoint/2010/main" val="1845554805"/>
+      </p:ext>
+    </p:extLst>
+  </p:cSld>
+  <p:clrMapOvr>
+    <a:masterClrMapping/>
+  </p:clrMapOvr>
+</p:sld>
+</file>
+
+<file path=ppt/slides/slide3.xml><?xml version="1.0" encoding="utf-8"?>
+<p:sld xmlns:a="http://schemas.openxmlformats.org/drawingml/2006/main" xmlns:r="http://schemas.openxmlformats.org/officeDocument/2006/relationships" xmlns:p="http://schemas.openxmlformats.org/presentationml/2006/main">
   <p:cSld name="Slide 2">
     <p:bg>
       <p:bgPr>
@@ -3854,14 +7102,14 @@
       </p:sp>
       <p:sp>
         <p:nvSpPr>
-          <p:cNvPr id="3" name="Text 1"/>
-          <p:cNvSpPr/>
-          <p:nvPr/>
-        </p:nvSpPr>
-        <p:spPr>
-          <a:xfrm>
-            <a:off x="457200" y="228600"/>
-            <a:ext cx="8229600" cy="640080"/>
+          <p:cNvPr id="14" name="Text 11"/>
+          <p:cNvSpPr/>
+          <p:nvPr/>
+        </p:nvSpPr>
+        <p:spPr>
+          <a:xfrm>
+            <a:off x="8046720" y="4800600"/>
+            <a:ext cx="914400" cy="274320"/>
           </a:xfrm>
           <a:prstGeom prst="rect">
             <a:avLst/>
@@ -3870,162 +7118,57 @@
           <a:ln/>
         </p:spPr>
         <p:txBody>
-          <a:bodyPr wrap="square" lIns="0" tIns="0" rIns="0" bIns="0" rtlCol="0" anchor="ctr"/>
-          <a:lstStyle/>
-          <a:p>
-            <a:pPr marL="0" indent="0">
+          <a:bodyPr wrap="square" rtlCol="0" anchor="ctr"/>
+          <a:lstStyle/>
+          <a:p>
+            <a:pPr marL="0" indent="0" algn="r">
               <a:buNone/>
             </a:pPr>
             <a:r>
-              <a:rPr lang="en-US" sz="3200" b="1" dirty="0">
-                <a:solidFill>
-                  <a:srgbClr val="1B4332"/>
-                </a:solidFill>
-                <a:latin typeface="Calibri" pitchFamily="34" charset="0"/>
-                <a:ea typeface="Calibri" pitchFamily="34" charset="-122"/>
-                <a:cs typeface="Calibri" pitchFamily="34" charset="-120"/>
-              </a:rPr>
-              <a:t>El servei Bicing</a:t>
-            </a:r>
-            <a:endParaRPr lang="en-US" sz="3200" dirty="0"/>
-          </a:p>
-        </p:txBody>
-      </p:sp>
-      <p:sp>
-        <p:nvSpPr>
-          <p:cNvPr id="4" name="Text 2"/>
-          <p:cNvSpPr/>
-          <p:nvPr/>
-        </p:nvSpPr>
-        <p:spPr>
-          <a:xfrm>
-            <a:off x="457200" y="777240"/>
-            <a:ext cx="8229600" cy="365760"/>
-          </a:xfrm>
-          <a:prstGeom prst="rect">
-            <a:avLst/>
-          </a:prstGeom>
-          <a:noFill/>
-          <a:ln/>
-        </p:spPr>
-        <p:txBody>
-          <a:bodyPr wrap="square" lIns="0" tIns="0" rIns="0" bIns="0" rtlCol="0" anchor="ctr"/>
-          <a:lstStyle/>
-          <a:p>
-            <a:pPr marL="0" indent="0">
-              <a:buNone/>
-            </a:pPr>
-            <a:r>
-              <a:rPr lang="en-US" sz="1400" dirty="0">
-                <a:solidFill>
-                  <a:srgbClr val="495057"/>
-                </a:solidFill>
-                <a:latin typeface="Calibri Light" pitchFamily="34" charset="0"/>
-                <a:ea typeface="Calibri Light" pitchFamily="34" charset="-122"/>
-                <a:cs typeface="Calibri Light" pitchFamily="34" charset="-120"/>
-              </a:rPr>
-              <a:t>La xarxa de bicicletes compartides més gran de Barcelona</a:t>
-            </a:r>
-            <a:endParaRPr lang="en-US" sz="1400" dirty="0"/>
-          </a:p>
-        </p:txBody>
-      </p:sp>
-      <p:sp>
-        <p:nvSpPr>
-          <p:cNvPr id="6" name="Text 3"/>
-          <p:cNvSpPr/>
-          <p:nvPr/>
-        </p:nvSpPr>
-        <p:spPr>
-          <a:xfrm>
-            <a:off x="5120640" y="1371600"/>
-            <a:ext cx="3657600" cy="640080"/>
-          </a:xfrm>
-          <a:prstGeom prst="rect">
-            <a:avLst/>
-          </a:prstGeom>
-          <a:noFill/>
-          <a:ln/>
-        </p:spPr>
-        <p:txBody>
-          <a:bodyPr wrap="square" lIns="0" tIns="0" rIns="0" bIns="0" rtlCol="0" anchor="ctr"/>
-          <a:lstStyle/>
-          <a:p>
-            <a:pPr marL="0" indent="0" algn="l">
-              <a:buNone/>
-            </a:pPr>
-            <a:r>
-              <a:rPr lang="en-US" sz="4800" b="1" dirty="0">
-                <a:solidFill>
-                  <a:srgbClr val="2D6A4F"/>
-                </a:solidFill>
-                <a:latin typeface="Calibri" pitchFamily="34" charset="0"/>
-                <a:ea typeface="Calibri" pitchFamily="34" charset="-122"/>
-                <a:cs typeface="Calibri" pitchFamily="34" charset="-120"/>
-              </a:rPr>
-              <a:t>548</a:t>
-            </a:r>
-            <a:endParaRPr lang="en-US" sz="4800" dirty="0"/>
-          </a:p>
-        </p:txBody>
-      </p:sp>
-      <p:sp>
-        <p:nvSpPr>
-          <p:cNvPr id="7" name="Text 4"/>
-          <p:cNvSpPr/>
-          <p:nvPr/>
-        </p:nvSpPr>
-        <p:spPr>
-          <a:xfrm>
-            <a:off x="5120640" y="1965960"/>
-            <a:ext cx="3657600" cy="320040"/>
-          </a:xfrm>
-          <a:prstGeom prst="rect">
-            <a:avLst/>
-          </a:prstGeom>
-          <a:noFill/>
-          <a:ln/>
-        </p:spPr>
-        <p:txBody>
-          <a:bodyPr wrap="square" lIns="0" tIns="0" rIns="0" bIns="0" rtlCol="0" anchor="ctr"/>
-          <a:lstStyle/>
-          <a:p>
-            <a:pPr marL="0" indent="0" algn="l">
-              <a:buNone/>
-            </a:pPr>
-            <a:r>
-              <a:rPr lang="en-US" sz="1400" dirty="0">
-                <a:solidFill>
-                  <a:srgbClr val="495057"/>
-                </a:solidFill>
-                <a:latin typeface="Calibri" pitchFamily="34" charset="0"/>
-                <a:ea typeface="Calibri" pitchFamily="34" charset="-122"/>
-                <a:cs typeface="Calibri" pitchFamily="34" charset="-120"/>
-              </a:rPr>
-              <a:t>estacions actives</a:t>
-            </a:r>
-            <a:endParaRPr lang="en-US" sz="1400" dirty="0"/>
-          </a:p>
-        </p:txBody>
-      </p:sp>
-      <p:sp>
-        <p:nvSpPr>
-          <p:cNvPr id="8" name="Shape 5"/>
-          <p:cNvSpPr/>
-          <p:nvPr/>
-        </p:nvSpPr>
-        <p:spPr>
-          <a:xfrm>
-            <a:off x="5120640" y="2423160"/>
-            <a:ext cx="3200400" cy="0"/>
-          </a:xfrm>
-          <a:prstGeom prst="line">
-            <a:avLst/>
-          </a:prstGeom>
-          <a:noFill/>
+              <a:rPr lang="en-US" sz="900" dirty="0">
+                <a:solidFill>
+                  <a:srgbClr val="868E96"/>
+                </a:solidFill>
+                <a:latin typeface="Calibri" pitchFamily="34" charset="0"/>
+                <a:ea typeface="Calibri" pitchFamily="34" charset="-122"/>
+                <a:cs typeface="Calibri" pitchFamily="34" charset="-120"/>
+              </a:rPr>
+              <a:t>3 / 14</a:t>
+            </a:r>
+            <a:endParaRPr lang="en-US" sz="900" dirty="0"/>
+          </a:p>
+        </p:txBody>
+      </p:sp>
+      <p:sp>
+        <p:nvSpPr>
+          <p:cNvPr id="19" name="Shape 3">
+            <a:extLst>
+              <a:ext uri="{FF2B5EF4-FFF2-40B4-BE49-F238E27FC236}">
+                <a16:creationId xmlns:a16="http://schemas.microsoft.com/office/drawing/2014/main" id="{753B1BDF-0F2E-E2E4-6096-7B2CE504418D}"/>
+              </a:ext>
+            </a:extLst>
+          </p:cNvPr>
+          <p:cNvSpPr/>
+          <p:nvPr/>
+        </p:nvSpPr>
+        <p:spPr>
+          <a:xfrm>
+            <a:off x="690786" y="1142445"/>
+            <a:ext cx="4754880" cy="914400"/>
+          </a:xfrm>
+          <a:prstGeom prst="rect">
+            <a:avLst/>
+          </a:prstGeom>
+          <a:solidFill>
+            <a:srgbClr val="CCCCCC">
+              <a:alpha val="40000"/>
+            </a:srgbClr>
+          </a:solidFill>
           <a:ln w="12700">
             <a:solidFill>
-              <a:srgbClr val="E9ECEF"/>
+              <a:srgbClr val="CCCCCC">
+                <a:alpha val="40000"/>
+              </a:srgbClr>
             </a:solidFill>
             <a:prstDash val="solid"/>
           </a:ln>
@@ -4040,100 +7183,30 @@
       </p:sp>
       <p:sp>
         <p:nvSpPr>
-          <p:cNvPr id="9" name="Text 6"/>
-          <p:cNvSpPr/>
-          <p:nvPr/>
-        </p:nvSpPr>
-        <p:spPr>
-          <a:xfrm>
-            <a:off x="5120640" y="2560320"/>
-            <a:ext cx="3657600" cy="640080"/>
-          </a:xfrm>
-          <a:prstGeom prst="rect">
-            <a:avLst/>
-          </a:prstGeom>
-          <a:noFill/>
-          <a:ln/>
-        </p:spPr>
-        <p:txBody>
-          <a:bodyPr wrap="square" lIns="0" tIns="0" rIns="0" bIns="0" rtlCol="0" anchor="ctr"/>
-          <a:lstStyle/>
-          <a:p>
-            <a:pPr marL="0" indent="0" algn="l">
-              <a:buNone/>
-            </a:pPr>
-            <a:r>
-              <a:rPr lang="en-US" sz="4800" b="1" dirty="0">
-                <a:solidFill>
-                  <a:srgbClr val="2D6A4F"/>
-                </a:solidFill>
-                <a:latin typeface="Calibri" pitchFamily="34" charset="0"/>
-                <a:ea typeface="Calibri" pitchFamily="34" charset="-122"/>
-                <a:cs typeface="Calibri" pitchFamily="34" charset="-120"/>
-              </a:rPr>
-              <a:t>~1.1 M</a:t>
-            </a:r>
-            <a:endParaRPr lang="en-US" sz="4800" dirty="0"/>
-          </a:p>
-        </p:txBody>
-      </p:sp>
-      <p:sp>
-        <p:nvSpPr>
-          <p:cNvPr id="10" name="Text 7"/>
-          <p:cNvSpPr/>
-          <p:nvPr/>
-        </p:nvSpPr>
-        <p:spPr>
-          <a:xfrm>
-            <a:off x="5120640" y="3154680"/>
-            <a:ext cx="3657600" cy="320040"/>
-          </a:xfrm>
-          <a:prstGeom prst="rect">
-            <a:avLst/>
-          </a:prstGeom>
-          <a:noFill/>
-          <a:ln/>
-        </p:spPr>
-        <p:txBody>
-          <a:bodyPr wrap="square" lIns="0" tIns="0" rIns="0" bIns="0" rtlCol="0" anchor="ctr"/>
-          <a:lstStyle/>
-          <a:p>
-            <a:pPr marL="0" indent="0" algn="l">
-              <a:buNone/>
-            </a:pPr>
-            <a:r>
-              <a:rPr lang="en-US" sz="1400" dirty="0">
-                <a:solidFill>
-                  <a:srgbClr val="495057"/>
-                </a:solidFill>
-                <a:latin typeface="Calibri" pitchFamily="34" charset="0"/>
-                <a:ea typeface="Calibri" pitchFamily="34" charset="-122"/>
-                <a:cs typeface="Calibri" pitchFamily="34" charset="-120"/>
-              </a:rPr>
-              <a:t>viatges / mes (mitjana 2024)</a:t>
-            </a:r>
-            <a:endParaRPr lang="en-US" sz="1400" dirty="0"/>
-          </a:p>
-        </p:txBody>
-      </p:sp>
-      <p:sp>
-        <p:nvSpPr>
-          <p:cNvPr id="11" name="Shape 8"/>
-          <p:cNvSpPr/>
-          <p:nvPr/>
-        </p:nvSpPr>
-        <p:spPr>
-          <a:xfrm>
-            <a:off x="5120640" y="3611880"/>
-            <a:ext cx="3200400" cy="0"/>
-          </a:xfrm>
-          <a:prstGeom prst="line">
-            <a:avLst/>
-          </a:prstGeom>
-          <a:noFill/>
-          <a:ln w="12700">
+          <p:cNvPr id="20" name="Shape 4">
+            <a:extLst>
+              <a:ext uri="{FF2B5EF4-FFF2-40B4-BE49-F238E27FC236}">
+                <a16:creationId xmlns:a16="http://schemas.microsoft.com/office/drawing/2014/main" id="{7AB0C041-82B2-4A6C-72E0-9AC930F32541}"/>
+              </a:ext>
+            </a:extLst>
+          </p:cNvPr>
+          <p:cNvSpPr/>
+          <p:nvPr/>
+        </p:nvSpPr>
+        <p:spPr>
+          <a:xfrm>
+            <a:off x="635922" y="1087581"/>
+            <a:ext cx="4754880" cy="914400"/>
+          </a:xfrm>
+          <a:prstGeom prst="rect">
+            <a:avLst/>
+          </a:prstGeom>
+          <a:solidFill>
+            <a:srgbClr val="F4F8F6"/>
+          </a:solidFill>
+          <a:ln w="6350">
             <a:solidFill>
-              <a:srgbClr val="E9ECEF"/>
+              <a:srgbClr val="D0E4D8"/>
             </a:solidFill>
             <a:prstDash val="solid"/>
           </a:ln>
@@ -4148,14 +7221,96 @@
       </p:sp>
       <p:sp>
         <p:nvSpPr>
-          <p:cNvPr id="12" name="Text 9"/>
-          <p:cNvSpPr/>
-          <p:nvPr/>
-        </p:nvSpPr>
-        <p:spPr>
-          <a:xfrm>
-            <a:off x="5120640" y="3749040"/>
-            <a:ext cx="3657600" cy="640080"/>
+          <p:cNvPr id="21" name="Shape 5">
+            <a:extLst>
+              <a:ext uri="{FF2B5EF4-FFF2-40B4-BE49-F238E27FC236}">
+                <a16:creationId xmlns:a16="http://schemas.microsoft.com/office/drawing/2014/main" id="{15E74440-96A9-9374-4CBB-75516449AF2B}"/>
+              </a:ext>
+            </a:extLst>
+          </p:cNvPr>
+          <p:cNvSpPr/>
+          <p:nvPr/>
+        </p:nvSpPr>
+        <p:spPr>
+          <a:xfrm>
+            <a:off x="635922" y="1087581"/>
+            <a:ext cx="73152" cy="914400"/>
+          </a:xfrm>
+          <a:prstGeom prst="rect">
+            <a:avLst/>
+          </a:prstGeom>
+          <a:solidFill>
+            <a:srgbClr val="1B4332"/>
+          </a:solidFill>
+          <a:ln w="12700">
+            <a:solidFill>
+              <a:srgbClr val="1B4332"/>
+            </a:solidFill>
+            <a:prstDash val="solid"/>
+          </a:ln>
+        </p:spPr>
+        <p:txBody>
+          <a:bodyPr/>
+          <a:lstStyle/>
+          <a:p>
+            <a:endParaRPr lang="es-ES"/>
+          </a:p>
+        </p:txBody>
+      </p:sp>
+      <p:sp>
+        <p:nvSpPr>
+          <p:cNvPr id="22" name="Shape 6">
+            <a:extLst>
+              <a:ext uri="{FF2B5EF4-FFF2-40B4-BE49-F238E27FC236}">
+                <a16:creationId xmlns:a16="http://schemas.microsoft.com/office/drawing/2014/main" id="{1CFD4FEB-F520-916F-D623-7ED63BC33137}"/>
+              </a:ext>
+            </a:extLst>
+          </p:cNvPr>
+          <p:cNvSpPr/>
+          <p:nvPr/>
+        </p:nvSpPr>
+        <p:spPr>
+          <a:xfrm>
+            <a:off x="745650" y="1197309"/>
+            <a:ext cx="384048" cy="384048"/>
+          </a:xfrm>
+          <a:prstGeom prst="rect">
+            <a:avLst/>
+          </a:prstGeom>
+          <a:solidFill>
+            <a:srgbClr val="1B4332"/>
+          </a:solidFill>
+          <a:ln w="12700">
+            <a:solidFill>
+              <a:srgbClr val="1B4332"/>
+            </a:solidFill>
+            <a:prstDash val="solid"/>
+          </a:ln>
+        </p:spPr>
+        <p:txBody>
+          <a:bodyPr/>
+          <a:lstStyle/>
+          <a:p>
+            <a:endParaRPr lang="es-ES"/>
+          </a:p>
+        </p:txBody>
+      </p:sp>
+      <p:sp>
+        <p:nvSpPr>
+          <p:cNvPr id="23" name="Text 7">
+            <a:extLst>
+              <a:ext uri="{FF2B5EF4-FFF2-40B4-BE49-F238E27FC236}">
+                <a16:creationId xmlns:a16="http://schemas.microsoft.com/office/drawing/2014/main" id="{13F059FA-DA78-A649-7087-C0E25AF881AB}"/>
+              </a:ext>
+            </a:extLst>
+          </p:cNvPr>
+          <p:cNvSpPr/>
+          <p:nvPr/>
+        </p:nvSpPr>
+        <p:spPr>
+          <a:xfrm>
+            <a:off x="745650" y="1197309"/>
+            <a:ext cx="384048" cy="384048"/>
           </a:xfrm>
           <a:prstGeom prst="rect">
             <a:avLst/>
@@ -4167,108 +7322,30 @@
           <a:bodyPr wrap="square" lIns="0" tIns="0" rIns="0" bIns="0" rtlCol="0" anchor="ctr"/>
           <a:lstStyle/>
           <a:p>
-            <a:pPr marL="0" indent="0" algn="l">
+            <a:pPr marL="0" indent="0" algn="ctr">
               <a:buNone/>
             </a:pPr>
             <a:r>
-              <a:rPr lang="en-US" sz="4800" b="1" dirty="0">
-                <a:solidFill>
-                  <a:srgbClr val="2D6A4F"/>
-                </a:solidFill>
-                <a:latin typeface="Calibri" pitchFamily="34" charset="0"/>
-                <a:ea typeface="Calibri" pitchFamily="34" charset="-122"/>
-                <a:cs typeface="Calibri" pitchFamily="34" charset="-120"/>
-              </a:rPr>
-              <a:t>291 M</a:t>
-            </a:r>
-            <a:endParaRPr lang="en-US" sz="4800" dirty="0"/>
-          </a:p>
-        </p:txBody>
-      </p:sp>
-      <p:sp>
-        <p:nvSpPr>
-          <p:cNvPr id="13" name="Text 10"/>
-          <p:cNvSpPr/>
-          <p:nvPr/>
-        </p:nvSpPr>
-        <p:spPr>
-          <a:xfrm>
-            <a:off x="5120640" y="4343400"/>
-            <a:ext cx="3657600" cy="320040"/>
-          </a:xfrm>
-          <a:prstGeom prst="rect">
-            <a:avLst/>
-          </a:prstGeom>
-          <a:noFill/>
-          <a:ln/>
-        </p:spPr>
-        <p:txBody>
-          <a:bodyPr wrap="square" lIns="0" tIns="0" rIns="0" bIns="0" rtlCol="0" anchor="ctr"/>
-          <a:lstStyle/>
-          <a:p>
-            <a:pPr marL="0" indent="0" algn="l">
-              <a:buNone/>
-            </a:pPr>
-            <a:r>
-              <a:rPr lang="en-US" sz="1400" dirty="0">
-                <a:solidFill>
-                  <a:srgbClr val="495057"/>
-                </a:solidFill>
-                <a:latin typeface="Calibri" pitchFamily="34" charset="0"/>
-                <a:ea typeface="Calibri" pitchFamily="34" charset="-122"/>
-                <a:cs typeface="Calibri" pitchFamily="34" charset="-120"/>
-              </a:rPr>
-              <a:t>mesuraments analitzats (2020–2025)</a:t>
+              <a:rPr lang="en-US" sz="1400" b="1" dirty="0">
+                <a:solidFill>
+                  <a:srgbClr val="FFFFFF"/>
+                </a:solidFill>
+                <a:latin typeface="Calibri" pitchFamily="34" charset="0"/>
+                <a:ea typeface="Calibri" pitchFamily="34" charset="-122"/>
+                <a:cs typeface="Calibri" pitchFamily="34" charset="-120"/>
+              </a:rPr>
+              <a:t>01</a:t>
             </a:r>
             <a:endParaRPr lang="en-US" sz="1400" dirty="0"/>
-          </a:p>
-        </p:txBody>
-      </p:sp>
-      <p:sp>
-        <p:nvSpPr>
-          <p:cNvPr id="14" name="Text 11"/>
-          <p:cNvSpPr/>
-          <p:nvPr/>
-        </p:nvSpPr>
-        <p:spPr>
-          <a:xfrm>
-            <a:off x="8046720" y="4800600"/>
-            <a:ext cx="914400" cy="274320"/>
-          </a:xfrm>
-          <a:prstGeom prst="rect">
-            <a:avLst/>
-          </a:prstGeom>
-          <a:noFill/>
-          <a:ln/>
-        </p:spPr>
-        <p:txBody>
-          <a:bodyPr wrap="square" rtlCol="0" anchor="ctr"/>
-          <a:lstStyle/>
-          <a:p>
-            <a:pPr marL="0" indent="0" algn="r">
-              <a:buNone/>
-            </a:pPr>
-            <a:r>
-              <a:rPr lang="en-US" sz="900" dirty="0">
-                <a:solidFill>
-                  <a:srgbClr val="868E96"/>
-                </a:solidFill>
-                <a:latin typeface="Calibri" pitchFamily="34" charset="0"/>
-                <a:ea typeface="Calibri" pitchFamily="34" charset="-122"/>
-                <a:cs typeface="Calibri" pitchFamily="34" charset="-120"/>
-              </a:rPr>
-              <a:t>2 / 12</a:t>
-            </a:r>
-            <a:endParaRPr lang="en-US" sz="900" dirty="0"/>
           </a:p>
         </p:txBody>
       </p:sp>
       <p:pic>
         <p:nvPicPr>
-          <p:cNvPr id="16" name="Imagen 15" descr="Mapa&#10;&#10;El contenido generado por IA puede ser incorrecto.">
-            <a:extLst>
-              <a:ext uri="{FF2B5EF4-FFF2-40B4-BE49-F238E27FC236}">
-                <a16:creationId xmlns:a16="http://schemas.microsoft.com/office/drawing/2014/main" id="{6EBB102A-A863-07E4-1209-BC44222F84DD}"/>
+          <p:cNvPr id="24" name="Image 1" descr="preencoded.png">
+            <a:extLst>
+              <a:ext uri="{FF2B5EF4-FFF2-40B4-BE49-F238E27FC236}">
+                <a16:creationId xmlns:a16="http://schemas.microsoft.com/office/drawing/2014/main" id="{B66EB67A-B134-D0E3-6D61-17A266A45455}"/>
               </a:ext>
             </a:extLst>
           </p:cNvPr>
@@ -4285,14 +7362,842 @@
         </p:blipFill>
         <p:spPr>
           <a:xfrm>
-            <a:off x="274320" y="1322339"/>
-            <a:ext cx="4503798" cy="3479523"/>
+            <a:off x="1202850" y="1160733"/>
+            <a:ext cx="749808" cy="749808"/>
           </a:xfrm>
           <a:prstGeom prst="rect">
             <a:avLst/>
           </a:prstGeom>
         </p:spPr>
       </p:pic>
+      <p:sp>
+        <p:nvSpPr>
+          <p:cNvPr id="25" name="Text 8">
+            <a:extLst>
+              <a:ext uri="{FF2B5EF4-FFF2-40B4-BE49-F238E27FC236}">
+                <a16:creationId xmlns:a16="http://schemas.microsoft.com/office/drawing/2014/main" id="{7AF38341-7D5C-A700-4930-47F0A5979B96}"/>
+              </a:ext>
+            </a:extLst>
+          </p:cNvPr>
+          <p:cNvSpPr/>
+          <p:nvPr/>
+        </p:nvSpPr>
+        <p:spPr>
+          <a:xfrm>
+            <a:off x="2062664" y="1325325"/>
+            <a:ext cx="3200400" cy="384048"/>
+          </a:xfrm>
+          <a:prstGeom prst="rect">
+            <a:avLst/>
+          </a:prstGeom>
+          <a:noFill/>
+          <a:ln/>
+        </p:spPr>
+        <p:txBody>
+          <a:bodyPr wrap="square" lIns="0" tIns="0" rIns="0" bIns="0" rtlCol="0" anchor="ctr"/>
+          <a:lstStyle/>
+          <a:p>
+            <a:pPr marL="0" indent="0">
+              <a:buNone/>
+            </a:pPr>
+            <a:r>
+              <a:rPr lang="en-US" sz="1800" b="1" dirty="0">
+                <a:solidFill>
+                  <a:srgbClr val="1B4332"/>
+                </a:solidFill>
+                <a:latin typeface="Calibri" pitchFamily="34" charset="0"/>
+                <a:ea typeface="Calibri" pitchFamily="34" charset="-122"/>
+                <a:cs typeface="Calibri" pitchFamily="34" charset="-120"/>
+              </a:rPr>
+              <a:t>¿Quina </a:t>
+            </a:r>
+            <a:r>
+              <a:rPr lang="en-US" sz="1800" b="1" dirty="0" err="1">
+                <a:solidFill>
+                  <a:srgbClr val="1B4332"/>
+                </a:solidFill>
+                <a:latin typeface="Calibri" pitchFamily="34" charset="0"/>
+                <a:ea typeface="Calibri" pitchFamily="34" charset="-122"/>
+                <a:cs typeface="Calibri" pitchFamily="34" charset="-120"/>
+              </a:rPr>
+              <a:t>gravetat</a:t>
+            </a:r>
+            <a:r>
+              <a:rPr lang="en-US" sz="1800" b="1" dirty="0">
+                <a:solidFill>
+                  <a:srgbClr val="1B4332"/>
+                </a:solidFill>
+                <a:latin typeface="Calibri" pitchFamily="34" charset="0"/>
+                <a:ea typeface="Calibri" pitchFamily="34" charset="-122"/>
+                <a:cs typeface="Calibri" pitchFamily="34" charset="-120"/>
+              </a:rPr>
+              <a:t> </a:t>
+            </a:r>
+            <a:r>
+              <a:rPr lang="en-US" sz="1800" b="1" dirty="0" err="1">
+                <a:solidFill>
+                  <a:srgbClr val="1B4332"/>
+                </a:solidFill>
+                <a:latin typeface="Calibri" pitchFamily="34" charset="0"/>
+                <a:ea typeface="Calibri" pitchFamily="34" charset="-122"/>
+                <a:cs typeface="Calibri" pitchFamily="34" charset="-120"/>
+              </a:rPr>
+              <a:t>té</a:t>
+            </a:r>
+            <a:r>
+              <a:rPr lang="en-US" sz="1800" b="1" dirty="0">
+                <a:solidFill>
+                  <a:srgbClr val="1B4332"/>
+                </a:solidFill>
+                <a:latin typeface="Calibri" pitchFamily="34" charset="0"/>
+                <a:ea typeface="Calibri" pitchFamily="34" charset="-122"/>
+                <a:cs typeface="Calibri" pitchFamily="34" charset="-120"/>
+              </a:rPr>
+              <a:t>?</a:t>
+            </a:r>
+            <a:endParaRPr lang="en-US" sz="1800" dirty="0"/>
+          </a:p>
+        </p:txBody>
+      </p:sp>
+      <p:sp>
+        <p:nvSpPr>
+          <p:cNvPr id="27" name="Shape 10">
+            <a:extLst>
+              <a:ext uri="{FF2B5EF4-FFF2-40B4-BE49-F238E27FC236}">
+                <a16:creationId xmlns:a16="http://schemas.microsoft.com/office/drawing/2014/main" id="{1A6DD862-07EE-CCA9-DB15-0B05DA0765D0}"/>
+              </a:ext>
+            </a:extLst>
+          </p:cNvPr>
+          <p:cNvSpPr/>
+          <p:nvPr/>
+        </p:nvSpPr>
+        <p:spPr>
+          <a:xfrm>
+            <a:off x="1696626" y="2331165"/>
+            <a:ext cx="4754880" cy="914400"/>
+          </a:xfrm>
+          <a:prstGeom prst="rect">
+            <a:avLst/>
+          </a:prstGeom>
+          <a:solidFill>
+            <a:srgbClr val="CCCCCC">
+              <a:alpha val="40000"/>
+            </a:srgbClr>
+          </a:solidFill>
+          <a:ln w="12700">
+            <a:solidFill>
+              <a:srgbClr val="CCCCCC">
+                <a:alpha val="40000"/>
+              </a:srgbClr>
+            </a:solidFill>
+            <a:prstDash val="solid"/>
+          </a:ln>
+        </p:spPr>
+        <p:txBody>
+          <a:bodyPr/>
+          <a:lstStyle/>
+          <a:p>
+            <a:endParaRPr lang="es-ES"/>
+          </a:p>
+        </p:txBody>
+      </p:sp>
+      <p:sp>
+        <p:nvSpPr>
+          <p:cNvPr id="28" name="Shape 11">
+            <a:extLst>
+              <a:ext uri="{FF2B5EF4-FFF2-40B4-BE49-F238E27FC236}">
+                <a16:creationId xmlns:a16="http://schemas.microsoft.com/office/drawing/2014/main" id="{23185F39-B179-6FD5-E349-49F9C9D08F5A}"/>
+              </a:ext>
+            </a:extLst>
+          </p:cNvPr>
+          <p:cNvSpPr/>
+          <p:nvPr/>
+        </p:nvSpPr>
+        <p:spPr>
+          <a:xfrm>
+            <a:off x="1641762" y="2276301"/>
+            <a:ext cx="4754880" cy="914400"/>
+          </a:xfrm>
+          <a:prstGeom prst="rect">
+            <a:avLst/>
+          </a:prstGeom>
+          <a:solidFill>
+            <a:srgbClr val="F4F8F6"/>
+          </a:solidFill>
+          <a:ln w="6350">
+            <a:solidFill>
+              <a:srgbClr val="D0E4D8"/>
+            </a:solidFill>
+            <a:prstDash val="solid"/>
+          </a:ln>
+        </p:spPr>
+        <p:txBody>
+          <a:bodyPr/>
+          <a:lstStyle/>
+          <a:p>
+            <a:endParaRPr lang="es-ES"/>
+          </a:p>
+        </p:txBody>
+      </p:sp>
+      <p:sp>
+        <p:nvSpPr>
+          <p:cNvPr id="29" name="Shape 12">
+            <a:extLst>
+              <a:ext uri="{FF2B5EF4-FFF2-40B4-BE49-F238E27FC236}">
+                <a16:creationId xmlns:a16="http://schemas.microsoft.com/office/drawing/2014/main" id="{F3FDEA64-345D-9362-562F-4A22BE6B908D}"/>
+              </a:ext>
+            </a:extLst>
+          </p:cNvPr>
+          <p:cNvSpPr/>
+          <p:nvPr/>
+        </p:nvSpPr>
+        <p:spPr>
+          <a:xfrm>
+            <a:off x="1641762" y="2276301"/>
+            <a:ext cx="73152" cy="914400"/>
+          </a:xfrm>
+          <a:prstGeom prst="rect">
+            <a:avLst/>
+          </a:prstGeom>
+          <a:solidFill>
+            <a:srgbClr val="2D6A4F"/>
+          </a:solidFill>
+          <a:ln w="12700">
+            <a:solidFill>
+              <a:srgbClr val="2D6A4F"/>
+            </a:solidFill>
+            <a:prstDash val="solid"/>
+          </a:ln>
+        </p:spPr>
+        <p:txBody>
+          <a:bodyPr/>
+          <a:lstStyle/>
+          <a:p>
+            <a:endParaRPr lang="es-ES"/>
+          </a:p>
+        </p:txBody>
+      </p:sp>
+      <p:sp>
+        <p:nvSpPr>
+          <p:cNvPr id="30" name="Shape 13">
+            <a:extLst>
+              <a:ext uri="{FF2B5EF4-FFF2-40B4-BE49-F238E27FC236}">
+                <a16:creationId xmlns:a16="http://schemas.microsoft.com/office/drawing/2014/main" id="{9B9AC922-80BC-64A9-5C8C-8AD0ACD74F0A}"/>
+              </a:ext>
+            </a:extLst>
+          </p:cNvPr>
+          <p:cNvSpPr/>
+          <p:nvPr/>
+        </p:nvSpPr>
+        <p:spPr>
+          <a:xfrm>
+            <a:off x="1751490" y="2386029"/>
+            <a:ext cx="384048" cy="384048"/>
+          </a:xfrm>
+          <a:prstGeom prst="rect">
+            <a:avLst/>
+          </a:prstGeom>
+          <a:solidFill>
+            <a:srgbClr val="2D6A4F"/>
+          </a:solidFill>
+          <a:ln w="12700">
+            <a:solidFill>
+              <a:srgbClr val="2D6A4F"/>
+            </a:solidFill>
+            <a:prstDash val="solid"/>
+          </a:ln>
+        </p:spPr>
+        <p:txBody>
+          <a:bodyPr/>
+          <a:lstStyle/>
+          <a:p>
+            <a:endParaRPr lang="es-ES"/>
+          </a:p>
+        </p:txBody>
+      </p:sp>
+      <p:sp>
+        <p:nvSpPr>
+          <p:cNvPr id="31" name="Text 14">
+            <a:extLst>
+              <a:ext uri="{FF2B5EF4-FFF2-40B4-BE49-F238E27FC236}">
+                <a16:creationId xmlns:a16="http://schemas.microsoft.com/office/drawing/2014/main" id="{1A8F2D68-035E-33CE-98BB-04237DF8C886}"/>
+              </a:ext>
+            </a:extLst>
+          </p:cNvPr>
+          <p:cNvSpPr/>
+          <p:nvPr/>
+        </p:nvSpPr>
+        <p:spPr>
+          <a:xfrm>
+            <a:off x="1751490" y="2386029"/>
+            <a:ext cx="384048" cy="384048"/>
+          </a:xfrm>
+          <a:prstGeom prst="rect">
+            <a:avLst/>
+          </a:prstGeom>
+          <a:noFill/>
+          <a:ln/>
+        </p:spPr>
+        <p:txBody>
+          <a:bodyPr wrap="square" lIns="0" tIns="0" rIns="0" bIns="0" rtlCol="0" anchor="ctr"/>
+          <a:lstStyle/>
+          <a:p>
+            <a:pPr marL="0" indent="0" algn="ctr">
+              <a:buNone/>
+            </a:pPr>
+            <a:r>
+              <a:rPr lang="en-US" sz="1400" b="1" dirty="0">
+                <a:solidFill>
+                  <a:srgbClr val="FFFFFF"/>
+                </a:solidFill>
+                <a:latin typeface="Calibri" pitchFamily="34" charset="0"/>
+                <a:ea typeface="Calibri" pitchFamily="34" charset="-122"/>
+                <a:cs typeface="Calibri" pitchFamily="34" charset="-120"/>
+              </a:rPr>
+              <a:t>02</a:t>
+            </a:r>
+            <a:endParaRPr lang="en-US" sz="1400" dirty="0"/>
+          </a:p>
+        </p:txBody>
+      </p:sp>
+      <p:pic>
+        <p:nvPicPr>
+          <p:cNvPr id="32" name="Image 2" descr="preencoded.png">
+            <a:extLst>
+              <a:ext uri="{FF2B5EF4-FFF2-40B4-BE49-F238E27FC236}">
+                <a16:creationId xmlns:a16="http://schemas.microsoft.com/office/drawing/2014/main" id="{77FFE49A-1D23-EC2E-FD58-E1CFD1CC030D}"/>
+              </a:ext>
+            </a:extLst>
+          </p:cNvPr>
+          <p:cNvPicPr>
+            <a:picLocks noChangeAspect="1"/>
+          </p:cNvPicPr>
+          <p:nvPr/>
+        </p:nvPicPr>
+        <p:blipFill>
+          <a:blip r:embed="rId4"/>
+          <a:stretch>
+            <a:fillRect/>
+          </a:stretch>
+        </p:blipFill>
+        <p:spPr>
+          <a:xfrm>
+            <a:off x="2208690" y="2349453"/>
+            <a:ext cx="749808" cy="749808"/>
+          </a:xfrm>
+          <a:prstGeom prst="rect">
+            <a:avLst/>
+          </a:prstGeom>
+        </p:spPr>
+      </p:pic>
+      <p:sp>
+        <p:nvSpPr>
+          <p:cNvPr id="33" name="Text 15">
+            <a:extLst>
+              <a:ext uri="{FF2B5EF4-FFF2-40B4-BE49-F238E27FC236}">
+                <a16:creationId xmlns:a16="http://schemas.microsoft.com/office/drawing/2014/main" id="{9C7D5B8E-D4AA-7E3E-5586-5628DEB0CD40}"/>
+              </a:ext>
+            </a:extLst>
+          </p:cNvPr>
+          <p:cNvSpPr/>
+          <p:nvPr/>
+        </p:nvSpPr>
+        <p:spPr>
+          <a:xfrm>
+            <a:off x="3059082" y="2464446"/>
+            <a:ext cx="3200400" cy="384048"/>
+          </a:xfrm>
+          <a:prstGeom prst="rect">
+            <a:avLst/>
+          </a:prstGeom>
+          <a:noFill/>
+          <a:ln/>
+        </p:spPr>
+        <p:txBody>
+          <a:bodyPr wrap="square" lIns="0" tIns="0" rIns="0" bIns="0" rtlCol="0" anchor="ctr"/>
+          <a:lstStyle/>
+          <a:p>
+            <a:pPr marL="0" indent="0">
+              <a:buNone/>
+            </a:pPr>
+            <a:r>
+              <a:rPr lang="en-US" sz="1800" b="1" dirty="0">
+                <a:solidFill>
+                  <a:srgbClr val="1B4332"/>
+                </a:solidFill>
+                <a:latin typeface="Calibri" pitchFamily="34" charset="0"/>
+                <a:ea typeface="Calibri" pitchFamily="34" charset="-122"/>
+                <a:cs typeface="Calibri" pitchFamily="34" charset="-120"/>
+              </a:rPr>
+              <a:t>¿</a:t>
+            </a:r>
+            <a:r>
+              <a:rPr lang="en-US" b="1" dirty="0">
+                <a:solidFill>
+                  <a:srgbClr val="1B4332"/>
+                </a:solidFill>
+                <a:latin typeface="Calibri" pitchFamily="34" charset="0"/>
+                <a:ea typeface="Calibri" pitchFamily="34" charset="-122"/>
+                <a:cs typeface="Calibri" pitchFamily="34" charset="-120"/>
+              </a:rPr>
+              <a:t>Q</a:t>
+            </a:r>
+            <a:r>
+              <a:rPr lang="en-US" sz="1800" b="1" dirty="0">
+                <a:solidFill>
+                  <a:srgbClr val="1B4332"/>
+                </a:solidFill>
+                <a:latin typeface="Calibri" pitchFamily="34" charset="0"/>
+                <a:ea typeface="Calibri" pitchFamily="34" charset="-122"/>
+                <a:cs typeface="Calibri" pitchFamily="34" charset="-120"/>
+              </a:rPr>
+              <a:t>uan </a:t>
+            </a:r>
+            <a:r>
+              <a:rPr lang="en-US" b="1" dirty="0">
+                <a:solidFill>
+                  <a:srgbClr val="1B4332"/>
+                </a:solidFill>
+                <a:latin typeface="Calibri" pitchFamily="34" charset="0"/>
+                <a:ea typeface="Calibri" pitchFamily="34" charset="-122"/>
+                <a:cs typeface="Calibri" pitchFamily="34" charset="-120"/>
+              </a:rPr>
+              <a:t>i</a:t>
+            </a:r>
+            <a:r>
+              <a:rPr lang="en-US" sz="1800" b="1" dirty="0">
+                <a:solidFill>
+                  <a:srgbClr val="1B4332"/>
+                </a:solidFill>
+                <a:latin typeface="Calibri" pitchFamily="34" charset="0"/>
+                <a:ea typeface="Calibri" pitchFamily="34" charset="-122"/>
+                <a:cs typeface="Calibri" pitchFamily="34" charset="-120"/>
+              </a:rPr>
+              <a:t> on es </a:t>
+            </a:r>
+            <a:r>
+              <a:rPr lang="en-US" sz="1800" b="1" dirty="0" err="1">
+                <a:solidFill>
+                  <a:srgbClr val="1B4332"/>
+                </a:solidFill>
+                <a:latin typeface="Calibri" pitchFamily="34" charset="0"/>
+                <a:ea typeface="Calibri" pitchFamily="34" charset="-122"/>
+                <a:cs typeface="Calibri" pitchFamily="34" charset="-120"/>
+              </a:rPr>
+              <a:t>produeix</a:t>
+            </a:r>
+            <a:r>
+              <a:rPr lang="en-US" sz="1800" b="1" dirty="0">
+                <a:solidFill>
+                  <a:srgbClr val="1B4332"/>
+                </a:solidFill>
+                <a:latin typeface="Calibri" pitchFamily="34" charset="0"/>
+                <a:ea typeface="Calibri" pitchFamily="34" charset="-122"/>
+                <a:cs typeface="Calibri" pitchFamily="34" charset="-120"/>
+              </a:rPr>
+              <a:t>?</a:t>
+            </a:r>
+            <a:endParaRPr lang="en-US" sz="1800" dirty="0"/>
+          </a:p>
+        </p:txBody>
+      </p:sp>
+      <p:sp>
+        <p:nvSpPr>
+          <p:cNvPr id="35" name="Shape 17">
+            <a:extLst>
+              <a:ext uri="{FF2B5EF4-FFF2-40B4-BE49-F238E27FC236}">
+                <a16:creationId xmlns:a16="http://schemas.microsoft.com/office/drawing/2014/main" id="{56234BC5-BE91-7658-5CCF-A93F92844BDC}"/>
+              </a:ext>
+            </a:extLst>
+          </p:cNvPr>
+          <p:cNvSpPr/>
+          <p:nvPr/>
+        </p:nvSpPr>
+        <p:spPr>
+          <a:xfrm>
+            <a:off x="2702466" y="3519885"/>
+            <a:ext cx="4754880" cy="914400"/>
+          </a:xfrm>
+          <a:prstGeom prst="rect">
+            <a:avLst/>
+          </a:prstGeom>
+          <a:solidFill>
+            <a:srgbClr val="CCCCCC">
+              <a:alpha val="40000"/>
+            </a:srgbClr>
+          </a:solidFill>
+          <a:ln w="12700">
+            <a:solidFill>
+              <a:srgbClr val="CCCCCC">
+                <a:alpha val="40000"/>
+              </a:srgbClr>
+            </a:solidFill>
+            <a:prstDash val="solid"/>
+          </a:ln>
+        </p:spPr>
+        <p:txBody>
+          <a:bodyPr/>
+          <a:lstStyle/>
+          <a:p>
+            <a:endParaRPr lang="es-ES"/>
+          </a:p>
+        </p:txBody>
+      </p:sp>
+      <p:sp>
+        <p:nvSpPr>
+          <p:cNvPr id="36" name="Shape 18">
+            <a:extLst>
+              <a:ext uri="{FF2B5EF4-FFF2-40B4-BE49-F238E27FC236}">
+                <a16:creationId xmlns:a16="http://schemas.microsoft.com/office/drawing/2014/main" id="{AA4AA708-DD61-7DD4-CAFA-08B291758C3E}"/>
+              </a:ext>
+            </a:extLst>
+          </p:cNvPr>
+          <p:cNvSpPr/>
+          <p:nvPr/>
+        </p:nvSpPr>
+        <p:spPr>
+          <a:xfrm>
+            <a:off x="2647602" y="3465021"/>
+            <a:ext cx="4754880" cy="914400"/>
+          </a:xfrm>
+          <a:prstGeom prst="rect">
+            <a:avLst/>
+          </a:prstGeom>
+          <a:solidFill>
+            <a:srgbClr val="F4F8F6"/>
+          </a:solidFill>
+          <a:ln w="6350">
+            <a:solidFill>
+              <a:srgbClr val="D0E4D8"/>
+            </a:solidFill>
+            <a:prstDash val="solid"/>
+          </a:ln>
+        </p:spPr>
+        <p:txBody>
+          <a:bodyPr/>
+          <a:lstStyle/>
+          <a:p>
+            <a:endParaRPr lang="es-ES"/>
+          </a:p>
+        </p:txBody>
+      </p:sp>
+      <p:sp>
+        <p:nvSpPr>
+          <p:cNvPr id="37" name="Shape 19">
+            <a:extLst>
+              <a:ext uri="{FF2B5EF4-FFF2-40B4-BE49-F238E27FC236}">
+                <a16:creationId xmlns:a16="http://schemas.microsoft.com/office/drawing/2014/main" id="{768398E6-8F00-4910-D75C-FCFC606BE41C}"/>
+              </a:ext>
+            </a:extLst>
+          </p:cNvPr>
+          <p:cNvSpPr/>
+          <p:nvPr/>
+        </p:nvSpPr>
+        <p:spPr>
+          <a:xfrm>
+            <a:off x="2647602" y="3465021"/>
+            <a:ext cx="73152" cy="914400"/>
+          </a:xfrm>
+          <a:prstGeom prst="rect">
+            <a:avLst/>
+          </a:prstGeom>
+          <a:solidFill>
+            <a:srgbClr val="1B4332"/>
+          </a:solidFill>
+          <a:ln w="12700">
+            <a:solidFill>
+              <a:srgbClr val="1B4332"/>
+            </a:solidFill>
+            <a:prstDash val="solid"/>
+          </a:ln>
+        </p:spPr>
+        <p:txBody>
+          <a:bodyPr/>
+          <a:lstStyle/>
+          <a:p>
+            <a:endParaRPr lang="es-ES"/>
+          </a:p>
+        </p:txBody>
+      </p:sp>
+      <p:sp>
+        <p:nvSpPr>
+          <p:cNvPr id="38" name="Shape 20">
+            <a:extLst>
+              <a:ext uri="{FF2B5EF4-FFF2-40B4-BE49-F238E27FC236}">
+                <a16:creationId xmlns:a16="http://schemas.microsoft.com/office/drawing/2014/main" id="{A96754F2-E546-B9DF-731A-911F71890103}"/>
+              </a:ext>
+            </a:extLst>
+          </p:cNvPr>
+          <p:cNvSpPr/>
+          <p:nvPr/>
+        </p:nvSpPr>
+        <p:spPr>
+          <a:xfrm>
+            <a:off x="2757330" y="3574749"/>
+            <a:ext cx="384048" cy="384048"/>
+          </a:xfrm>
+          <a:prstGeom prst="rect">
+            <a:avLst/>
+          </a:prstGeom>
+          <a:solidFill>
+            <a:srgbClr val="1B4332"/>
+          </a:solidFill>
+          <a:ln w="12700">
+            <a:solidFill>
+              <a:srgbClr val="1B4332"/>
+            </a:solidFill>
+            <a:prstDash val="solid"/>
+          </a:ln>
+        </p:spPr>
+        <p:txBody>
+          <a:bodyPr/>
+          <a:lstStyle/>
+          <a:p>
+            <a:endParaRPr lang="es-ES"/>
+          </a:p>
+        </p:txBody>
+      </p:sp>
+      <p:sp>
+        <p:nvSpPr>
+          <p:cNvPr id="39" name="Text 21">
+            <a:extLst>
+              <a:ext uri="{FF2B5EF4-FFF2-40B4-BE49-F238E27FC236}">
+                <a16:creationId xmlns:a16="http://schemas.microsoft.com/office/drawing/2014/main" id="{01CE2019-78E3-F5A0-67D9-F9BE7D281714}"/>
+              </a:ext>
+            </a:extLst>
+          </p:cNvPr>
+          <p:cNvSpPr/>
+          <p:nvPr/>
+        </p:nvSpPr>
+        <p:spPr>
+          <a:xfrm>
+            <a:off x="2757330" y="3574749"/>
+            <a:ext cx="384048" cy="384048"/>
+          </a:xfrm>
+          <a:prstGeom prst="rect">
+            <a:avLst/>
+          </a:prstGeom>
+          <a:noFill/>
+          <a:ln/>
+        </p:spPr>
+        <p:txBody>
+          <a:bodyPr wrap="square" lIns="0" tIns="0" rIns="0" bIns="0" rtlCol="0" anchor="ctr"/>
+          <a:lstStyle/>
+          <a:p>
+            <a:pPr marL="0" indent="0" algn="ctr">
+              <a:buNone/>
+            </a:pPr>
+            <a:r>
+              <a:rPr lang="en-US" sz="1400" b="1" dirty="0">
+                <a:solidFill>
+                  <a:srgbClr val="FFFFFF"/>
+                </a:solidFill>
+                <a:latin typeface="Calibri" pitchFamily="34" charset="0"/>
+                <a:ea typeface="Calibri" pitchFamily="34" charset="-122"/>
+                <a:cs typeface="Calibri" pitchFamily="34" charset="-120"/>
+              </a:rPr>
+              <a:t>03</a:t>
+            </a:r>
+            <a:endParaRPr lang="en-US" sz="1400" dirty="0"/>
+          </a:p>
+        </p:txBody>
+      </p:sp>
+      <p:pic>
+        <p:nvPicPr>
+          <p:cNvPr id="40" name="Image 3" descr="preencoded.png">
+            <a:extLst>
+              <a:ext uri="{FF2B5EF4-FFF2-40B4-BE49-F238E27FC236}">
+                <a16:creationId xmlns:a16="http://schemas.microsoft.com/office/drawing/2014/main" id="{A7F67F07-E5AF-8936-51B2-838DFDCEE9F2}"/>
+              </a:ext>
+            </a:extLst>
+          </p:cNvPr>
+          <p:cNvPicPr>
+            <a:picLocks noChangeAspect="1"/>
+          </p:cNvPicPr>
+          <p:nvPr/>
+        </p:nvPicPr>
+        <p:blipFill>
+          <a:blip r:embed="rId5"/>
+          <a:stretch>
+            <a:fillRect/>
+          </a:stretch>
+        </p:blipFill>
+        <p:spPr>
+          <a:xfrm>
+            <a:off x="3214530" y="3538173"/>
+            <a:ext cx="749808" cy="749808"/>
+          </a:xfrm>
+          <a:prstGeom prst="rect">
+            <a:avLst/>
+          </a:prstGeom>
+        </p:spPr>
+      </p:pic>
+      <p:sp>
+        <p:nvSpPr>
+          <p:cNvPr id="41" name="Text 22">
+            <a:extLst>
+              <a:ext uri="{FF2B5EF4-FFF2-40B4-BE49-F238E27FC236}">
+                <a16:creationId xmlns:a16="http://schemas.microsoft.com/office/drawing/2014/main" id="{D332D3A2-2111-F5D5-DF75-59F487CBA3BE}"/>
+              </a:ext>
+            </a:extLst>
+          </p:cNvPr>
+          <p:cNvSpPr/>
+          <p:nvPr/>
+        </p:nvSpPr>
+        <p:spPr>
+          <a:xfrm>
+            <a:off x="4083210" y="3689604"/>
+            <a:ext cx="3200400" cy="384048"/>
+          </a:xfrm>
+          <a:prstGeom prst="rect">
+            <a:avLst/>
+          </a:prstGeom>
+          <a:noFill/>
+          <a:ln/>
+        </p:spPr>
+        <p:txBody>
+          <a:bodyPr wrap="square" lIns="0" tIns="0" rIns="0" bIns="0" rtlCol="0" anchor="ctr"/>
+          <a:lstStyle/>
+          <a:p>
+            <a:pPr marL="0" indent="0">
+              <a:buNone/>
+            </a:pPr>
+            <a:r>
+              <a:rPr lang="en-US" sz="1800" b="1" dirty="0">
+                <a:solidFill>
+                  <a:srgbClr val="1B4332"/>
+                </a:solidFill>
+                <a:latin typeface="Calibri" pitchFamily="34" charset="0"/>
+                <a:ea typeface="Calibri" pitchFamily="34" charset="-122"/>
+                <a:cs typeface="Calibri" pitchFamily="34" charset="-120"/>
+              </a:rPr>
+              <a:t>¿Es pot </a:t>
+            </a:r>
+            <a:r>
+              <a:rPr lang="en-US" sz="1800" b="1" dirty="0" err="1">
+                <a:solidFill>
+                  <a:srgbClr val="1B4332"/>
+                </a:solidFill>
+                <a:latin typeface="Calibri" pitchFamily="34" charset="0"/>
+                <a:ea typeface="Calibri" pitchFamily="34" charset="-122"/>
+                <a:cs typeface="Calibri" pitchFamily="34" charset="-120"/>
+              </a:rPr>
+              <a:t>predir</a:t>
+            </a:r>
+            <a:r>
+              <a:rPr lang="en-US" sz="1800" b="1" dirty="0">
+                <a:solidFill>
+                  <a:srgbClr val="1B4332"/>
+                </a:solidFill>
+                <a:latin typeface="Calibri" pitchFamily="34" charset="0"/>
+                <a:ea typeface="Calibri" pitchFamily="34" charset="-122"/>
+                <a:cs typeface="Calibri" pitchFamily="34" charset="-120"/>
+              </a:rPr>
+              <a:t>?</a:t>
+            </a:r>
+            <a:endParaRPr lang="en-US" sz="1800" dirty="0"/>
+          </a:p>
+        </p:txBody>
+      </p:sp>
+      <p:pic>
+        <p:nvPicPr>
+          <p:cNvPr id="43" name="Image 0" descr="preencoded.png">
+            <a:extLst>
+              <a:ext uri="{FF2B5EF4-FFF2-40B4-BE49-F238E27FC236}">
+                <a16:creationId xmlns:a16="http://schemas.microsoft.com/office/drawing/2014/main" id="{6203D171-A7BB-3245-2FF3-D309083442BA}"/>
+              </a:ext>
+            </a:extLst>
+          </p:cNvPr>
+          <p:cNvPicPr>
+            <a:picLocks noChangeAspect="1"/>
+          </p:cNvPicPr>
+          <p:nvPr/>
+        </p:nvPicPr>
+        <p:blipFill>
+          <a:blip r:embed="rId6">
+            <a:alphaModFix amt="85000"/>
+          </a:blip>
+          <a:stretch>
+            <a:fillRect/>
+          </a:stretch>
+        </p:blipFill>
+        <p:spPr>
+          <a:xfrm>
+            <a:off x="4412672" y="471054"/>
+            <a:ext cx="4754880" cy="2377440"/>
+          </a:xfrm>
+          <a:prstGeom prst="rect">
+            <a:avLst/>
+          </a:prstGeom>
+        </p:spPr>
+      </p:pic>
+      <p:sp>
+        <p:nvSpPr>
+          <p:cNvPr id="44" name="Text 1">
+            <a:extLst>
+              <a:ext uri="{FF2B5EF4-FFF2-40B4-BE49-F238E27FC236}">
+                <a16:creationId xmlns:a16="http://schemas.microsoft.com/office/drawing/2014/main" id="{5B14F849-3E4F-EB4C-5CC9-FB17BBD6BF47}"/>
+              </a:ext>
+            </a:extLst>
+          </p:cNvPr>
+          <p:cNvSpPr/>
+          <p:nvPr/>
+        </p:nvSpPr>
+        <p:spPr>
+          <a:xfrm>
+            <a:off x="457200" y="228600"/>
+            <a:ext cx="8229600" cy="640080"/>
+          </a:xfrm>
+          <a:prstGeom prst="rect">
+            <a:avLst/>
+          </a:prstGeom>
+          <a:noFill/>
+          <a:ln/>
+        </p:spPr>
+        <p:txBody>
+          <a:bodyPr wrap="square" lIns="0" tIns="0" rIns="0" bIns="0" rtlCol="0" anchor="ctr"/>
+          <a:lstStyle/>
+          <a:p>
+            <a:pPr marL="0" indent="0">
+              <a:buNone/>
+            </a:pPr>
+            <a:r>
+              <a:rPr lang="en-US" sz="3200" b="1" dirty="0" err="1">
+                <a:solidFill>
+                  <a:srgbClr val="1B4332"/>
+                </a:solidFill>
+                <a:latin typeface="Calibri" pitchFamily="34" charset="0"/>
+                <a:ea typeface="Calibri" pitchFamily="34" charset="-122"/>
+                <a:cs typeface="Calibri" pitchFamily="34" charset="-120"/>
+              </a:rPr>
+              <a:t>Preguntes</a:t>
+            </a:r>
+            <a:r>
+              <a:rPr lang="en-US" sz="3200" b="1" dirty="0">
+                <a:solidFill>
+                  <a:srgbClr val="1B4332"/>
+                </a:solidFill>
+                <a:latin typeface="Calibri" pitchFamily="34" charset="0"/>
+                <a:ea typeface="Calibri" pitchFamily="34" charset="-122"/>
+                <a:cs typeface="Calibri" pitchFamily="34" charset="-120"/>
+              </a:rPr>
+              <a:t> de </a:t>
+            </a:r>
+            <a:r>
+              <a:rPr lang="en-US" sz="3200" b="1" dirty="0" err="1">
+                <a:solidFill>
+                  <a:srgbClr val="1B4332"/>
+                </a:solidFill>
+                <a:latin typeface="Calibri" pitchFamily="34" charset="0"/>
+                <a:ea typeface="Calibri" pitchFamily="34" charset="-122"/>
+                <a:cs typeface="Calibri" pitchFamily="34" charset="-120"/>
+              </a:rPr>
+              <a:t>recerca</a:t>
+            </a:r>
+            <a:endParaRPr lang="en-US" sz="3200" dirty="0"/>
+          </a:p>
+        </p:txBody>
+      </p:sp>
     </p:spTree>
   </p:cSld>
   <p:clrMapOvr>
@@ -4301,7 +8206,592 @@
 </p:sld>
 </file>
 
-<file path=ppt/slides/slide3.xml><?xml version="1.0" encoding="utf-8"?>
+<file path=ppt/slides/slide4.xml><?xml version="1.0" encoding="utf-8"?>
+<p:sld xmlns:a="http://schemas.openxmlformats.org/drawingml/2006/main" xmlns:r="http://schemas.openxmlformats.org/officeDocument/2006/relationships" xmlns:p="http://schemas.openxmlformats.org/presentationml/2006/main">
+  <p:cSld>
+    <p:bg>
+      <p:bgPr>
+        <a:solidFill>
+          <a:srgbClr val="FFFFFF"/>
+        </a:solidFill>
+        <a:effectLst/>
+      </p:bgPr>
+    </p:bg>
+    <p:spTree>
+      <p:nvGrpSpPr>
+        <p:cNvPr id="1" name="">
+          <a:extLst>
+            <a:ext uri="{FF2B5EF4-FFF2-40B4-BE49-F238E27FC236}">
+              <a16:creationId xmlns:a16="http://schemas.microsoft.com/office/drawing/2014/main" id="{9E3E05D2-19CB-0075-808C-A72C9A348DC2}"/>
+            </a:ext>
+          </a:extLst>
+        </p:cNvPr>
+        <p:cNvGrpSpPr/>
+        <p:nvPr/>
+      </p:nvGrpSpPr>
+      <p:grpSpPr>
+        <a:xfrm>
+          <a:off x="0" y="0"/>
+          <a:ext cx="0" cy="0"/>
+          <a:chOff x="0" y="0"/>
+          <a:chExt cx="0" cy="0"/>
+        </a:xfrm>
+      </p:grpSpPr>
+      <p:sp>
+        <p:nvSpPr>
+          <p:cNvPr id="2" name="Shape 0">
+            <a:extLst>
+              <a:ext uri="{FF2B5EF4-FFF2-40B4-BE49-F238E27FC236}">
+                <a16:creationId xmlns:a16="http://schemas.microsoft.com/office/drawing/2014/main" id="{EC9E108F-6E3E-429A-E07A-9739766A7CAA}"/>
+              </a:ext>
+            </a:extLst>
+          </p:cNvPr>
+          <p:cNvSpPr/>
+          <p:nvPr/>
+        </p:nvSpPr>
+        <p:spPr>
+          <a:xfrm>
+            <a:off x="0" y="0"/>
+            <a:ext cx="9144000" cy="54864"/>
+          </a:xfrm>
+          <a:prstGeom prst="rect">
+            <a:avLst/>
+          </a:prstGeom>
+          <a:solidFill>
+            <a:srgbClr val="2D6A4F"/>
+          </a:solidFill>
+          <a:ln/>
+        </p:spPr>
+        <p:txBody>
+          <a:bodyPr/>
+          <a:lstStyle/>
+          <a:p>
+            <a:endParaRPr lang="es-ES"/>
+          </a:p>
+        </p:txBody>
+      </p:sp>
+      <p:sp>
+        <p:nvSpPr>
+          <p:cNvPr id="3" name="Text 1">
+            <a:extLst>
+              <a:ext uri="{FF2B5EF4-FFF2-40B4-BE49-F238E27FC236}">
+                <a16:creationId xmlns:a16="http://schemas.microsoft.com/office/drawing/2014/main" id="{44E4476E-3851-B936-61EF-ACC8FFCE530B}"/>
+              </a:ext>
+            </a:extLst>
+          </p:cNvPr>
+          <p:cNvSpPr/>
+          <p:nvPr/>
+        </p:nvSpPr>
+        <p:spPr>
+          <a:xfrm>
+            <a:off x="457200" y="228600"/>
+            <a:ext cx="8229600" cy="640080"/>
+          </a:xfrm>
+          <a:prstGeom prst="rect">
+            <a:avLst/>
+          </a:prstGeom>
+          <a:noFill/>
+          <a:ln/>
+        </p:spPr>
+        <p:txBody>
+          <a:bodyPr wrap="square" lIns="0" tIns="0" rIns="0" bIns="0" rtlCol="0" anchor="ctr"/>
+          <a:lstStyle/>
+          <a:p>
+            <a:pPr marL="0" indent="0">
+              <a:buNone/>
+            </a:pPr>
+            <a:r>
+              <a:rPr lang="en-US" sz="3200" b="1" dirty="0">
+                <a:solidFill>
+                  <a:srgbClr val="1B4332"/>
+                </a:solidFill>
+                <a:latin typeface="Calibri" pitchFamily="34" charset="0"/>
+                <a:ea typeface="Calibri" pitchFamily="34" charset="-122"/>
+                <a:cs typeface="Calibri" pitchFamily="34" charset="-120"/>
+              </a:rPr>
+              <a:t>El servei Bicing</a:t>
+            </a:r>
+            <a:endParaRPr lang="en-US" sz="3200" dirty="0"/>
+          </a:p>
+        </p:txBody>
+      </p:sp>
+      <p:sp>
+        <p:nvSpPr>
+          <p:cNvPr id="4" name="Text 2">
+            <a:extLst>
+              <a:ext uri="{FF2B5EF4-FFF2-40B4-BE49-F238E27FC236}">
+                <a16:creationId xmlns:a16="http://schemas.microsoft.com/office/drawing/2014/main" id="{E053A4D2-9A7C-8614-54F8-ACCAE3F8CA68}"/>
+              </a:ext>
+            </a:extLst>
+          </p:cNvPr>
+          <p:cNvSpPr/>
+          <p:nvPr/>
+        </p:nvSpPr>
+        <p:spPr>
+          <a:xfrm>
+            <a:off x="457200" y="777240"/>
+            <a:ext cx="8229600" cy="365760"/>
+          </a:xfrm>
+          <a:prstGeom prst="rect">
+            <a:avLst/>
+          </a:prstGeom>
+          <a:noFill/>
+          <a:ln/>
+        </p:spPr>
+        <p:txBody>
+          <a:bodyPr wrap="square" lIns="0" tIns="0" rIns="0" bIns="0" rtlCol="0" anchor="ctr"/>
+          <a:lstStyle/>
+          <a:p>
+            <a:pPr marL="0" indent="0">
+              <a:buNone/>
+            </a:pPr>
+            <a:r>
+              <a:rPr lang="en-US" sz="1400" dirty="0">
+                <a:solidFill>
+                  <a:srgbClr val="495057"/>
+                </a:solidFill>
+                <a:latin typeface="Calibri Light" pitchFamily="34" charset="0"/>
+                <a:ea typeface="Calibri Light" pitchFamily="34" charset="-122"/>
+                <a:cs typeface="Calibri Light" pitchFamily="34" charset="-120"/>
+              </a:rPr>
+              <a:t>La xarxa de bicicletes compartides més gran de Barcelona</a:t>
+            </a:r>
+            <a:endParaRPr lang="en-US" sz="1400" dirty="0"/>
+          </a:p>
+        </p:txBody>
+      </p:sp>
+      <p:sp>
+        <p:nvSpPr>
+          <p:cNvPr id="6" name="Text 3">
+            <a:extLst>
+              <a:ext uri="{FF2B5EF4-FFF2-40B4-BE49-F238E27FC236}">
+                <a16:creationId xmlns:a16="http://schemas.microsoft.com/office/drawing/2014/main" id="{80AA235A-5600-8524-A068-75E7B2521FA5}"/>
+              </a:ext>
+            </a:extLst>
+          </p:cNvPr>
+          <p:cNvSpPr/>
+          <p:nvPr/>
+        </p:nvSpPr>
+        <p:spPr>
+          <a:xfrm>
+            <a:off x="5595072" y="1371600"/>
+            <a:ext cx="2910560" cy="640080"/>
+          </a:xfrm>
+          <a:prstGeom prst="rect">
+            <a:avLst/>
+          </a:prstGeom>
+          <a:noFill/>
+          <a:ln/>
+        </p:spPr>
+        <p:txBody>
+          <a:bodyPr wrap="square" lIns="0" tIns="0" rIns="0" bIns="0" rtlCol="0" anchor="ctr"/>
+          <a:lstStyle/>
+          <a:p>
+            <a:pPr marL="0" indent="0" algn="l">
+              <a:buNone/>
+            </a:pPr>
+            <a:r>
+              <a:rPr lang="en-US" sz="4800" b="1" dirty="0">
+                <a:solidFill>
+                  <a:srgbClr val="2D6A4F"/>
+                </a:solidFill>
+                <a:latin typeface="Calibri" pitchFamily="34" charset="0"/>
+                <a:ea typeface="Calibri" pitchFamily="34" charset="-122"/>
+                <a:cs typeface="Calibri" pitchFamily="34" charset="-120"/>
+              </a:rPr>
+              <a:t>548</a:t>
+            </a:r>
+            <a:endParaRPr lang="en-US" sz="4800" dirty="0"/>
+          </a:p>
+        </p:txBody>
+      </p:sp>
+      <p:sp>
+        <p:nvSpPr>
+          <p:cNvPr id="7" name="Text 4">
+            <a:extLst>
+              <a:ext uri="{FF2B5EF4-FFF2-40B4-BE49-F238E27FC236}">
+                <a16:creationId xmlns:a16="http://schemas.microsoft.com/office/drawing/2014/main" id="{AAEF8893-14A6-AE0A-3E34-52D7742E08A0}"/>
+              </a:ext>
+            </a:extLst>
+          </p:cNvPr>
+          <p:cNvSpPr/>
+          <p:nvPr/>
+        </p:nvSpPr>
+        <p:spPr>
+          <a:xfrm>
+            <a:off x="5595072" y="1965960"/>
+            <a:ext cx="2910560" cy="320040"/>
+          </a:xfrm>
+          <a:prstGeom prst="rect">
+            <a:avLst/>
+          </a:prstGeom>
+          <a:noFill/>
+          <a:ln/>
+        </p:spPr>
+        <p:txBody>
+          <a:bodyPr wrap="square" lIns="0" tIns="0" rIns="0" bIns="0" rtlCol="0" anchor="ctr"/>
+          <a:lstStyle/>
+          <a:p>
+            <a:pPr marL="0" indent="0" algn="l">
+              <a:buNone/>
+            </a:pPr>
+            <a:r>
+              <a:rPr lang="en-US" sz="1400" dirty="0">
+                <a:solidFill>
+                  <a:srgbClr val="495057"/>
+                </a:solidFill>
+                <a:latin typeface="Calibri" pitchFamily="34" charset="0"/>
+                <a:ea typeface="Calibri" pitchFamily="34" charset="-122"/>
+                <a:cs typeface="Calibri" pitchFamily="34" charset="-120"/>
+              </a:rPr>
+              <a:t>estacions actives</a:t>
+            </a:r>
+            <a:endParaRPr lang="en-US" sz="1400" dirty="0"/>
+          </a:p>
+        </p:txBody>
+      </p:sp>
+      <p:sp>
+        <p:nvSpPr>
+          <p:cNvPr id="8" name="Shape 5">
+            <a:extLst>
+              <a:ext uri="{FF2B5EF4-FFF2-40B4-BE49-F238E27FC236}">
+                <a16:creationId xmlns:a16="http://schemas.microsoft.com/office/drawing/2014/main" id="{BD87BB91-7A6B-92E0-0368-9FF561C03406}"/>
+              </a:ext>
+            </a:extLst>
+          </p:cNvPr>
+          <p:cNvSpPr/>
+          <p:nvPr/>
+        </p:nvSpPr>
+        <p:spPr>
+          <a:xfrm>
+            <a:off x="5595072" y="2423160"/>
+            <a:ext cx="2546740" cy="0"/>
+          </a:xfrm>
+          <a:prstGeom prst="line">
+            <a:avLst/>
+          </a:prstGeom>
+          <a:noFill/>
+          <a:ln w="12700">
+            <a:solidFill>
+              <a:srgbClr val="E9ECEF"/>
+            </a:solidFill>
+            <a:prstDash val="solid"/>
+          </a:ln>
+        </p:spPr>
+        <p:txBody>
+          <a:bodyPr/>
+          <a:lstStyle/>
+          <a:p>
+            <a:endParaRPr lang="es-ES"/>
+          </a:p>
+        </p:txBody>
+      </p:sp>
+      <p:sp>
+        <p:nvSpPr>
+          <p:cNvPr id="9" name="Text 6">
+            <a:extLst>
+              <a:ext uri="{FF2B5EF4-FFF2-40B4-BE49-F238E27FC236}">
+                <a16:creationId xmlns:a16="http://schemas.microsoft.com/office/drawing/2014/main" id="{D394A788-C5A5-0033-2B68-BC69F2E63C24}"/>
+              </a:ext>
+            </a:extLst>
+          </p:cNvPr>
+          <p:cNvSpPr/>
+          <p:nvPr/>
+        </p:nvSpPr>
+        <p:spPr>
+          <a:xfrm>
+            <a:off x="5595072" y="2560320"/>
+            <a:ext cx="2910560" cy="640080"/>
+          </a:xfrm>
+          <a:prstGeom prst="rect">
+            <a:avLst/>
+          </a:prstGeom>
+          <a:noFill/>
+          <a:ln/>
+        </p:spPr>
+        <p:txBody>
+          <a:bodyPr wrap="square" lIns="0" tIns="0" rIns="0" bIns="0" rtlCol="0" anchor="ctr"/>
+          <a:lstStyle/>
+          <a:p>
+            <a:pPr marL="0" indent="0" algn="l">
+              <a:buNone/>
+            </a:pPr>
+            <a:r>
+              <a:rPr lang="en-US" sz="4800" b="1" dirty="0">
+                <a:solidFill>
+                  <a:srgbClr val="2D6A4F"/>
+                </a:solidFill>
+                <a:latin typeface="Calibri" pitchFamily="34" charset="0"/>
+                <a:ea typeface="Calibri" pitchFamily="34" charset="-122"/>
+                <a:cs typeface="Calibri" pitchFamily="34" charset="-120"/>
+              </a:rPr>
+              <a:t>~1.1 M</a:t>
+            </a:r>
+            <a:endParaRPr lang="en-US" sz="4800" dirty="0"/>
+          </a:p>
+        </p:txBody>
+      </p:sp>
+      <p:sp>
+        <p:nvSpPr>
+          <p:cNvPr id="10" name="Text 7">
+            <a:extLst>
+              <a:ext uri="{FF2B5EF4-FFF2-40B4-BE49-F238E27FC236}">
+                <a16:creationId xmlns:a16="http://schemas.microsoft.com/office/drawing/2014/main" id="{F8446E64-98C7-527F-BD4F-B93C93CC901A}"/>
+              </a:ext>
+            </a:extLst>
+          </p:cNvPr>
+          <p:cNvSpPr/>
+          <p:nvPr/>
+        </p:nvSpPr>
+        <p:spPr>
+          <a:xfrm>
+            <a:off x="5595072" y="3154680"/>
+            <a:ext cx="2910560" cy="320040"/>
+          </a:xfrm>
+          <a:prstGeom prst="rect">
+            <a:avLst/>
+          </a:prstGeom>
+          <a:noFill/>
+          <a:ln/>
+        </p:spPr>
+        <p:txBody>
+          <a:bodyPr wrap="square" lIns="0" tIns="0" rIns="0" bIns="0" rtlCol="0" anchor="ctr"/>
+          <a:lstStyle/>
+          <a:p>
+            <a:pPr marL="0" indent="0" algn="l">
+              <a:buNone/>
+            </a:pPr>
+            <a:r>
+              <a:rPr lang="en-US" sz="1400" dirty="0">
+                <a:solidFill>
+                  <a:srgbClr val="495057"/>
+                </a:solidFill>
+                <a:latin typeface="Calibri" pitchFamily="34" charset="0"/>
+                <a:ea typeface="Calibri" pitchFamily="34" charset="-122"/>
+                <a:cs typeface="Calibri" pitchFamily="34" charset="-120"/>
+              </a:rPr>
+              <a:t>viatges / mes (mitjana 2024)</a:t>
+            </a:r>
+            <a:endParaRPr lang="en-US" sz="1400" dirty="0"/>
+          </a:p>
+        </p:txBody>
+      </p:sp>
+      <p:sp>
+        <p:nvSpPr>
+          <p:cNvPr id="11" name="Shape 8">
+            <a:extLst>
+              <a:ext uri="{FF2B5EF4-FFF2-40B4-BE49-F238E27FC236}">
+                <a16:creationId xmlns:a16="http://schemas.microsoft.com/office/drawing/2014/main" id="{E468DB9B-D5BE-88E3-64B1-1E882CCE7660}"/>
+              </a:ext>
+            </a:extLst>
+          </p:cNvPr>
+          <p:cNvSpPr/>
+          <p:nvPr/>
+        </p:nvSpPr>
+        <p:spPr>
+          <a:xfrm>
+            <a:off x="5595072" y="3611880"/>
+            <a:ext cx="2546740" cy="0"/>
+          </a:xfrm>
+          <a:prstGeom prst="line">
+            <a:avLst/>
+          </a:prstGeom>
+          <a:noFill/>
+          <a:ln w="12700">
+            <a:solidFill>
+              <a:srgbClr val="E9ECEF"/>
+            </a:solidFill>
+            <a:prstDash val="solid"/>
+          </a:ln>
+        </p:spPr>
+        <p:txBody>
+          <a:bodyPr/>
+          <a:lstStyle/>
+          <a:p>
+            <a:endParaRPr lang="es-ES"/>
+          </a:p>
+        </p:txBody>
+      </p:sp>
+      <p:sp>
+        <p:nvSpPr>
+          <p:cNvPr id="12" name="Text 9">
+            <a:extLst>
+              <a:ext uri="{FF2B5EF4-FFF2-40B4-BE49-F238E27FC236}">
+                <a16:creationId xmlns:a16="http://schemas.microsoft.com/office/drawing/2014/main" id="{6DB88BAE-304B-3B09-D445-C27DFC734DFC}"/>
+              </a:ext>
+            </a:extLst>
+          </p:cNvPr>
+          <p:cNvSpPr/>
+          <p:nvPr/>
+        </p:nvSpPr>
+        <p:spPr>
+          <a:xfrm>
+            <a:off x="5595072" y="3749040"/>
+            <a:ext cx="2910560" cy="640080"/>
+          </a:xfrm>
+          <a:prstGeom prst="rect">
+            <a:avLst/>
+          </a:prstGeom>
+          <a:noFill/>
+          <a:ln/>
+        </p:spPr>
+        <p:txBody>
+          <a:bodyPr wrap="square" lIns="0" tIns="0" rIns="0" bIns="0" rtlCol="0" anchor="ctr"/>
+          <a:lstStyle/>
+          <a:p>
+            <a:pPr marL="0" indent="0" algn="l">
+              <a:buNone/>
+            </a:pPr>
+            <a:r>
+              <a:rPr lang="en-US" sz="4800" b="1" dirty="0">
+                <a:solidFill>
+                  <a:srgbClr val="2D6A4F"/>
+                </a:solidFill>
+                <a:latin typeface="Calibri" pitchFamily="34" charset="0"/>
+                <a:ea typeface="Calibri" pitchFamily="34" charset="-122"/>
+                <a:cs typeface="Calibri" pitchFamily="34" charset="-120"/>
+              </a:rPr>
+              <a:t>291 M</a:t>
+            </a:r>
+            <a:endParaRPr lang="en-US" sz="4800" dirty="0"/>
+          </a:p>
+        </p:txBody>
+      </p:sp>
+      <p:sp>
+        <p:nvSpPr>
+          <p:cNvPr id="13" name="Text 10">
+            <a:extLst>
+              <a:ext uri="{FF2B5EF4-FFF2-40B4-BE49-F238E27FC236}">
+                <a16:creationId xmlns:a16="http://schemas.microsoft.com/office/drawing/2014/main" id="{D4998626-B5A0-D9D9-7F40-822B017B2C6F}"/>
+              </a:ext>
+            </a:extLst>
+          </p:cNvPr>
+          <p:cNvSpPr/>
+          <p:nvPr/>
+        </p:nvSpPr>
+        <p:spPr>
+          <a:xfrm>
+            <a:off x="5595072" y="4343400"/>
+            <a:ext cx="2910560" cy="320040"/>
+          </a:xfrm>
+          <a:prstGeom prst="rect">
+            <a:avLst/>
+          </a:prstGeom>
+          <a:noFill/>
+          <a:ln/>
+        </p:spPr>
+        <p:txBody>
+          <a:bodyPr wrap="square" lIns="0" tIns="0" rIns="0" bIns="0" rtlCol="0" anchor="ctr"/>
+          <a:lstStyle/>
+          <a:p>
+            <a:pPr marL="0" indent="0" algn="l">
+              <a:buNone/>
+            </a:pPr>
+            <a:r>
+              <a:rPr lang="en-US" sz="1400" dirty="0">
+                <a:solidFill>
+                  <a:srgbClr val="495057"/>
+                </a:solidFill>
+                <a:latin typeface="Calibri" pitchFamily="34" charset="0"/>
+                <a:ea typeface="Calibri" pitchFamily="34" charset="-122"/>
+                <a:cs typeface="Calibri" pitchFamily="34" charset="-120"/>
+              </a:rPr>
+              <a:t>mesuraments analitzats (2020–2025)</a:t>
+            </a:r>
+            <a:endParaRPr lang="en-US" sz="1400" dirty="0"/>
+          </a:p>
+        </p:txBody>
+      </p:sp>
+      <p:sp>
+        <p:nvSpPr>
+          <p:cNvPr id="14" name="Text 11">
+            <a:extLst>
+              <a:ext uri="{FF2B5EF4-FFF2-40B4-BE49-F238E27FC236}">
+                <a16:creationId xmlns:a16="http://schemas.microsoft.com/office/drawing/2014/main" id="{6A44B4D5-2C61-068C-20AB-0C2BE12FC92E}"/>
+              </a:ext>
+            </a:extLst>
+          </p:cNvPr>
+          <p:cNvSpPr/>
+          <p:nvPr/>
+        </p:nvSpPr>
+        <p:spPr>
+          <a:xfrm>
+            <a:off x="8046720" y="4800600"/>
+            <a:ext cx="914400" cy="274320"/>
+          </a:xfrm>
+          <a:prstGeom prst="rect">
+            <a:avLst/>
+          </a:prstGeom>
+          <a:noFill/>
+          <a:ln/>
+        </p:spPr>
+        <p:txBody>
+          <a:bodyPr wrap="square" rtlCol="0" anchor="ctr"/>
+          <a:lstStyle/>
+          <a:p>
+            <a:pPr marL="0" indent="0" algn="r">
+              <a:buNone/>
+            </a:pPr>
+            <a:r>
+              <a:rPr lang="en-US" sz="900" dirty="0">
+                <a:solidFill>
+                  <a:srgbClr val="868E96"/>
+                </a:solidFill>
+                <a:latin typeface="Calibri" pitchFamily="34" charset="0"/>
+                <a:ea typeface="Calibri" pitchFamily="34" charset="-122"/>
+                <a:cs typeface="Calibri" pitchFamily="34" charset="-120"/>
+              </a:rPr>
+              <a:t>4 / 14</a:t>
+            </a:r>
+            <a:endParaRPr lang="en-US" sz="900" dirty="0"/>
+          </a:p>
+        </p:txBody>
+      </p:sp>
+      <p:pic>
+        <p:nvPicPr>
+          <p:cNvPr id="15" name="Imagen 14">
+            <a:hlinkClick r:id="rId3" action="ppaction://hlinkfile"/>
+            <a:extLst>
+              <a:ext uri="{FF2B5EF4-FFF2-40B4-BE49-F238E27FC236}">
+                <a16:creationId xmlns:a16="http://schemas.microsoft.com/office/drawing/2014/main" id="{7C59EDF4-4630-7FFE-09BD-01F7C1969539}"/>
+              </a:ext>
+            </a:extLst>
+          </p:cNvPr>
+          <p:cNvPicPr>
+            <a:picLocks noChangeAspect="1"/>
+          </p:cNvPicPr>
+          <p:nvPr/>
+        </p:nvPicPr>
+        <p:blipFill>
+          <a:blip r:embed="rId4"/>
+          <a:stretch>
+            <a:fillRect/>
+          </a:stretch>
+        </p:blipFill>
+        <p:spPr>
+          <a:xfrm>
+            <a:off x="360584" y="1257056"/>
+            <a:ext cx="4923850" cy="3479521"/>
+          </a:xfrm>
+          <a:prstGeom prst="rect">
+            <a:avLst/>
+          </a:prstGeom>
+        </p:spPr>
+      </p:pic>
+    </p:spTree>
+    <p:extLst>
+      <p:ext uri="{BB962C8B-B14F-4D97-AF65-F5344CB8AC3E}">
+        <p14:creationId xmlns:p14="http://schemas.microsoft.com/office/powerpoint/2010/main" val="691039420"/>
+      </p:ext>
+    </p:extLst>
+  </p:cSld>
+  <p:clrMapOvr>
+    <a:masterClrMapping/>
+  </p:clrMapOvr>
+</p:sld>
+</file>
+
+<file path=ppt/slides/slide5.xml><?xml version="1.0" encoding="utf-8"?>
 <p:sld xmlns:a="http://schemas.openxmlformats.org/drawingml/2006/main" xmlns:r="http://schemas.openxmlformats.org/officeDocument/2006/relationships" xmlns:p="http://schemas.openxmlformats.org/presentationml/2006/main">
   <p:cSld name="Slide 3">
     <p:bg>
@@ -4503,7 +8993,7 @@
                 <a:ea typeface="Calibri" pitchFamily="34" charset="-122"/>
                 <a:cs typeface="Calibri" pitchFamily="34" charset="-120"/>
               </a:rPr>
-              <a:t>3 / 12</a:t>
+              <a:t>5 / 14</a:t>
             </a:r>
             <a:endParaRPr lang="en-US" sz="900" dirty="0"/>
           </a:p>
@@ -4547,7 +9037,7 @@
 </p:sld>
 </file>
 
-<file path=ppt/slides/slide4.xml><?xml version="1.0" encoding="utf-8"?>
+<file path=ppt/slides/slide6.xml><?xml version="1.0" encoding="utf-8"?>
 <p:sld xmlns:a="http://schemas.openxmlformats.org/drawingml/2006/main" xmlns:r="http://schemas.openxmlformats.org/officeDocument/2006/relationships" xmlns:p="http://schemas.openxmlformats.org/presentationml/2006/main">
   <p:cSld name="Slide 4">
     <p:bg>
@@ -4980,7 +9470,7 @@
                 <a:ea typeface="Calibri" pitchFamily="34" charset="-122"/>
                 <a:cs typeface="Calibri" pitchFamily="34" charset="-120"/>
               </a:rPr>
-              <a:t>4 / 12</a:t>
+              <a:t>6 / 14</a:t>
             </a:r>
             <a:endParaRPr lang="en-US" sz="900" dirty="0"/>
           </a:p>
@@ -5054,7 +9544,7 @@
 </p:sld>
 </file>
 
-<file path=ppt/slides/slide5.xml><?xml version="1.0" encoding="utf-8"?>
+<file path=ppt/slides/slide7.xml><?xml version="1.0" encoding="utf-8"?>
 <p:sld xmlns:a="http://schemas.openxmlformats.org/drawingml/2006/main" xmlns:r="http://schemas.openxmlformats.org/officeDocument/2006/relationships" xmlns:p="http://schemas.openxmlformats.org/presentationml/2006/main">
   <p:cSld name="Slide 5">
     <p:bg>
@@ -5346,7 +9836,7 @@
                 <a:ea typeface="Calibri" pitchFamily="34" charset="-122"/>
                 <a:cs typeface="Calibri" pitchFamily="34" charset="-120"/>
               </a:rPr>
-              <a:t>5 / 12</a:t>
+              <a:t>7 / 14</a:t>
             </a:r>
             <a:endParaRPr lang="en-US" sz="900" dirty="0"/>
           </a:p>
@@ -5390,7 +9880,7 @@
 </p:sld>
 </file>
 
-<file path=ppt/slides/slide6.xml><?xml version="1.0" encoding="utf-8"?>
+<file path=ppt/slides/slide8.xml><?xml version="1.0" encoding="utf-8"?>
 <p:sld xmlns:a="http://schemas.openxmlformats.org/drawingml/2006/main" xmlns:r="http://schemas.openxmlformats.org/officeDocument/2006/relationships" xmlns:p="http://schemas.openxmlformats.org/presentationml/2006/main">
   <p:cSld name="Slide 6">
     <p:bg>
@@ -5553,7 +10043,7 @@
                 <a:ea typeface="Calibri" pitchFamily="34" charset="-122"/>
                 <a:cs typeface="Calibri" pitchFamily="34" charset="-120"/>
               </a:rPr>
-              <a:t>6 / 12</a:t>
+              <a:t>8 / 14</a:t>
             </a:r>
             <a:endParaRPr lang="en-US" sz="900" dirty="0"/>
           </a:p>
@@ -5627,7 +10117,7 @@
 </p:sld>
 </file>
 
-<file path=ppt/slides/slide7.xml><?xml version="1.0" encoding="utf-8"?>
+<file path=ppt/slides/slide9.xml><?xml version="1.0" encoding="utf-8"?>
 <p:sld xmlns:a="http://schemas.openxmlformats.org/drawingml/2006/main" xmlns:r="http://schemas.openxmlformats.org/officeDocument/2006/relationships" xmlns:p="http://schemas.openxmlformats.org/presentationml/2006/main">
   <p:cSld name="Slide 7">
     <p:bg>
@@ -5829,7 +10319,7 @@
                 <a:ea typeface="Calibri" pitchFamily="34" charset="-122"/>
                 <a:cs typeface="Calibri" pitchFamily="34" charset="-120"/>
               </a:rPr>
-              <a:t>7 / 12</a:t>
+              <a:t>9 / 14</a:t>
             </a:r>
             <a:endParaRPr lang="en-US" sz="900" dirty="0"/>
           </a:p>
@@ -5857,20 +10347,104 @@
         </p:blipFill>
         <p:spPr>
           <a:xfrm>
-            <a:off x="182880" y="1179253"/>
-            <a:ext cx="5029201" cy="2493469"/>
+            <a:off x="396693" y="1403892"/>
+            <a:ext cx="4613406" cy="2518021"/>
           </a:xfrm>
           <a:prstGeom prst="rect">
             <a:avLst/>
           </a:prstGeom>
         </p:spPr>
       </p:pic>
+      <p:sp>
+        <p:nvSpPr>
+          <p:cNvPr id="9" name="CuadroTexto 8">
+            <a:extLst>
+              <a:ext uri="{FF2B5EF4-FFF2-40B4-BE49-F238E27FC236}">
+                <a16:creationId xmlns:a16="http://schemas.microsoft.com/office/drawing/2014/main" id="{48EA4646-D11D-8B4B-D43B-31446648C842}"/>
+              </a:ext>
+            </a:extLst>
+          </p:cNvPr>
+          <p:cNvSpPr txBox="1"/>
+          <p:nvPr/>
+        </p:nvSpPr>
+        <p:spPr>
+          <a:xfrm>
+            <a:off x="4796288" y="4629793"/>
+            <a:ext cx="1371600" cy="200055"/>
+          </a:xfrm>
+          <a:prstGeom prst="rect">
+            <a:avLst/>
+          </a:prstGeom>
+          <a:noFill/>
+        </p:spPr>
+        <p:txBody>
+          <a:bodyPr wrap="square" rtlCol="0">
+            <a:spAutoFit/>
+          </a:bodyPr>
+          <a:lstStyle/>
+          <a:p>
+            <a:r>
+              <a:rPr lang="es-ES" sz="700" i="1" dirty="0" err="1">
+                <a:solidFill>
+                  <a:srgbClr val="868E96"/>
+                </a:solidFill>
+                <a:latin typeface="Calibri" pitchFamily="34" charset="0"/>
+                <a:ea typeface="Calibri" pitchFamily="34" charset="-122"/>
+                <a:cs typeface="Calibri" pitchFamily="34" charset="-120"/>
+                <a:hlinkClick r:id="rId4" action="ppaction://hlinkfile">
+                  <a:extLst>
+                    <a:ext uri="{A12FA001-AC4F-418D-AE19-62706E023703}">
+                      <ahyp:hlinkClr xmlns:ahyp="http://schemas.microsoft.com/office/drawing/2018/hyperlinkcolor" val="tx"/>
+                    </a:ext>
+                  </a:extLst>
+                </a:hlinkClick>
+              </a:rPr>
+              <a:t>Exemple</a:t>
+            </a:r>
+            <a:r>
+              <a:rPr lang="es-ES" sz="700" i="1" dirty="0">
+                <a:solidFill>
+                  <a:srgbClr val="868E96"/>
+                </a:solidFill>
+                <a:latin typeface="Calibri" pitchFamily="34" charset="0"/>
+                <a:ea typeface="Calibri" pitchFamily="34" charset="-122"/>
+                <a:cs typeface="Calibri" pitchFamily="34" charset="-120"/>
+              </a:rPr>
+              <a:t> </a:t>
+            </a:r>
+            <a:r>
+              <a:rPr lang="es-ES" sz="700" i="1" dirty="0" err="1">
+                <a:solidFill>
+                  <a:srgbClr val="868E96"/>
+                </a:solidFill>
+                <a:latin typeface="Calibri" pitchFamily="34" charset="0"/>
+                <a:ea typeface="Calibri" pitchFamily="34" charset="-122"/>
+                <a:cs typeface="Calibri" pitchFamily="34" charset="-120"/>
+              </a:rPr>
+              <a:t>Interactiu</a:t>
+            </a:r>
+            <a:r>
+              <a:rPr lang="es-ES" sz="700" i="1" dirty="0">
+                <a:solidFill>
+                  <a:srgbClr val="868E96"/>
+                </a:solidFill>
+                <a:latin typeface="Calibri" pitchFamily="34" charset="0"/>
+                <a:ea typeface="Calibri" pitchFamily="34" charset="-122"/>
+                <a:cs typeface="Calibri" pitchFamily="34" charset="-120"/>
+              </a:rPr>
+              <a:t> de 1 semana.</a:t>
+            </a:r>
+            <a:endParaRPr lang="es-ES" sz="600" dirty="0"/>
+          </a:p>
+        </p:txBody>
+      </p:sp>
       <p:pic>
         <p:nvPicPr>
-          <p:cNvPr id="12" name="Imagen 11" descr="Mapa&#10;&#10;El contenido generado por IA puede ser incorrecto.">
-            <a:extLst>
-              <a:ext uri="{FF2B5EF4-FFF2-40B4-BE49-F238E27FC236}">
-                <a16:creationId xmlns:a16="http://schemas.microsoft.com/office/drawing/2014/main" id="{014C7970-3D00-2AA8-E9DD-ABF58521486B}"/>
+          <p:cNvPr id="15" name="Imagen 14">
+            <a:hlinkClick r:id="rId5" action="ppaction://hlinkfile"/>
+            <a:extLst>
+              <a:ext uri="{FF2B5EF4-FFF2-40B4-BE49-F238E27FC236}">
+                <a16:creationId xmlns:a16="http://schemas.microsoft.com/office/drawing/2014/main" id="{31B95BCB-C1CA-51D9-9395-F71C85DC122F}"/>
               </a:ext>
             </a:extLst>
           </p:cNvPr>
@@ -5880,15 +10454,15 @@
           <p:nvPr/>
         </p:nvPicPr>
         <p:blipFill>
-          <a:blip r:embed="rId4"/>
+          <a:blip r:embed="rId6"/>
           <a:stretch>
             <a:fillRect/>
           </a:stretch>
         </p:blipFill>
         <p:spPr>
           <a:xfrm>
-            <a:off x="5394960" y="1179911"/>
-            <a:ext cx="3463619" cy="3655607"/>
+            <a:off x="5132475" y="1083706"/>
+            <a:ext cx="3554325" cy="3579503"/>
           </a:xfrm>
           <a:prstGeom prst="rect">
             <a:avLst/>
@@ -5896,1305 +10470,6 @@
         </p:spPr>
       </p:pic>
     </p:spTree>
-  </p:cSld>
-  <p:clrMapOvr>
-    <a:masterClrMapping/>
-  </p:clrMapOvr>
-</p:sld>
-</file>
-
-<file path=ppt/slides/slide8.xml><?xml version="1.0" encoding="utf-8"?>
-<p:sld xmlns:a="http://schemas.openxmlformats.org/drawingml/2006/main" xmlns:r="http://schemas.openxmlformats.org/officeDocument/2006/relationships" xmlns:p="http://schemas.openxmlformats.org/presentationml/2006/main">
-  <p:cSld>
-    <p:bg>
-      <p:bgPr>
-        <a:solidFill>
-          <a:srgbClr val="FFFFFF"/>
-        </a:solidFill>
-        <a:effectLst/>
-      </p:bgPr>
-    </p:bg>
-    <p:spTree>
-      <p:nvGrpSpPr>
-        <p:cNvPr id="1" name="">
-          <a:extLst>
-            <a:ext uri="{FF2B5EF4-FFF2-40B4-BE49-F238E27FC236}">
-              <a16:creationId xmlns:a16="http://schemas.microsoft.com/office/drawing/2014/main" id="{727A85DC-5EFF-58D5-7D47-69BEEC2C81BF}"/>
-            </a:ext>
-          </a:extLst>
-        </p:cNvPr>
-        <p:cNvGrpSpPr/>
-        <p:nvPr/>
-      </p:nvGrpSpPr>
-      <p:grpSpPr>
-        <a:xfrm>
-          <a:off x="0" y="0"/>
-          <a:ext cx="0" cy="0"/>
-          <a:chOff x="0" y="0"/>
-          <a:chExt cx="0" cy="0"/>
-        </a:xfrm>
-      </p:grpSpPr>
-      <p:sp>
-        <p:nvSpPr>
-          <p:cNvPr id="2" name="Shape 0">
-            <a:extLst>
-              <a:ext uri="{FF2B5EF4-FFF2-40B4-BE49-F238E27FC236}">
-                <a16:creationId xmlns:a16="http://schemas.microsoft.com/office/drawing/2014/main" id="{DB54ED69-169E-474D-F3BC-AC7F8731374E}"/>
-              </a:ext>
-            </a:extLst>
-          </p:cNvPr>
-          <p:cNvSpPr/>
-          <p:nvPr/>
-        </p:nvSpPr>
-        <p:spPr>
-          <a:xfrm>
-            <a:off x="0" y="0"/>
-            <a:ext cx="9144000" cy="54864"/>
-          </a:xfrm>
-          <a:prstGeom prst="rect">
-            <a:avLst/>
-          </a:prstGeom>
-          <a:solidFill>
-            <a:srgbClr val="2D6A4F"/>
-          </a:solidFill>
-          <a:ln/>
-        </p:spPr>
-        <p:txBody>
-          <a:bodyPr/>
-          <a:lstStyle/>
-          <a:p>
-            <a:endParaRPr lang="es-ES"/>
-          </a:p>
-        </p:txBody>
-      </p:sp>
-      <p:sp>
-        <p:nvSpPr>
-          <p:cNvPr id="3" name="Text 1">
-            <a:extLst>
-              <a:ext uri="{FF2B5EF4-FFF2-40B4-BE49-F238E27FC236}">
-                <a16:creationId xmlns:a16="http://schemas.microsoft.com/office/drawing/2014/main" id="{D64761C5-50F4-54CE-8702-AF2670F77542}"/>
-              </a:ext>
-            </a:extLst>
-          </p:cNvPr>
-          <p:cNvSpPr/>
-          <p:nvPr/>
-        </p:nvSpPr>
-        <p:spPr>
-          <a:xfrm>
-            <a:off x="457200" y="228600"/>
-            <a:ext cx="8229600" cy="640080"/>
-          </a:xfrm>
-          <a:prstGeom prst="rect">
-            <a:avLst/>
-          </a:prstGeom>
-          <a:noFill/>
-          <a:ln/>
-        </p:spPr>
-        <p:txBody>
-          <a:bodyPr wrap="square" lIns="0" tIns="0" rIns="0" bIns="0" rtlCol="0" anchor="ctr"/>
-          <a:lstStyle/>
-          <a:p>
-            <a:pPr marL="0" indent="0">
-              <a:buNone/>
-            </a:pPr>
-            <a:r>
-              <a:rPr lang="en-US" sz="3000" b="1" dirty="0">
-                <a:solidFill>
-                  <a:srgbClr val="1B4332"/>
-                </a:solidFill>
-                <a:latin typeface="Calibri" pitchFamily="34" charset="0"/>
-                <a:ea typeface="Calibri" pitchFamily="34" charset="-122"/>
-                <a:cs typeface="Calibri" pitchFamily="34" charset="-120"/>
-              </a:rPr>
-              <a:t>Tipologia d'estacions: 5 perfils d'ús</a:t>
-            </a:r>
-            <a:endParaRPr lang="en-US" sz="3000" dirty="0"/>
-          </a:p>
-        </p:txBody>
-      </p:sp>
-      <p:sp>
-        <p:nvSpPr>
-          <p:cNvPr id="4" name="Text 2">
-            <a:extLst>
-              <a:ext uri="{FF2B5EF4-FFF2-40B4-BE49-F238E27FC236}">
-                <a16:creationId xmlns:a16="http://schemas.microsoft.com/office/drawing/2014/main" id="{84E28889-C8F4-CA0F-9B13-86F474D501B4}"/>
-              </a:ext>
-            </a:extLst>
-          </p:cNvPr>
-          <p:cNvSpPr/>
-          <p:nvPr/>
-        </p:nvSpPr>
-        <p:spPr>
-          <a:xfrm>
-            <a:off x="457200" y="777240"/>
-            <a:ext cx="8229600" cy="365760"/>
-          </a:xfrm>
-          <a:prstGeom prst="rect">
-            <a:avLst/>
-          </a:prstGeom>
-          <a:noFill/>
-          <a:ln/>
-        </p:spPr>
-        <p:txBody>
-          <a:bodyPr wrap="square" lIns="0" tIns="0" rIns="0" bIns="0" rtlCol="0" anchor="ctr"/>
-          <a:lstStyle/>
-          <a:p>
-            <a:pPr marL="0" indent="0">
-              <a:buNone/>
-            </a:pPr>
-            <a:r>
-              <a:rPr lang="en-US" sz="1300" dirty="0">
-                <a:solidFill>
-                  <a:srgbClr val="495057"/>
-                </a:solidFill>
-                <a:latin typeface="Calibri Light" pitchFamily="34" charset="0"/>
-                <a:ea typeface="Calibri Light" pitchFamily="34" charset="-122"/>
-                <a:cs typeface="Calibri Light" pitchFamily="34" charset="-120"/>
-              </a:rPr>
-              <a:t>Clustering K-Means </a:t>
-            </a:r>
-            <a:r>
-              <a:rPr lang="en-US" sz="1300" dirty="0" err="1">
-                <a:solidFill>
-                  <a:srgbClr val="495057"/>
-                </a:solidFill>
-                <a:latin typeface="Calibri Light" pitchFamily="34" charset="0"/>
-                <a:ea typeface="Calibri Light" pitchFamily="34" charset="-122"/>
-                <a:cs typeface="Calibri Light" pitchFamily="34" charset="-120"/>
-              </a:rPr>
-              <a:t>amb</a:t>
-            </a:r>
-            <a:r>
-              <a:rPr lang="en-US" sz="1300" dirty="0">
-                <a:solidFill>
-                  <a:srgbClr val="495057"/>
-                </a:solidFill>
-                <a:latin typeface="Calibri Light" pitchFamily="34" charset="0"/>
-                <a:ea typeface="Calibri Light" pitchFamily="34" charset="-122"/>
-                <a:cs typeface="Calibri Light" pitchFamily="34" charset="-120"/>
-              </a:rPr>
-              <a:t> 30 features per identificar patrons diferenciats</a:t>
-            </a:r>
-            <a:endParaRPr lang="en-US" sz="1300" dirty="0"/>
-          </a:p>
-        </p:txBody>
-      </p:sp>
-      <p:sp>
-        <p:nvSpPr>
-          <p:cNvPr id="6" name="Shape 3">
-            <a:extLst>
-              <a:ext uri="{FF2B5EF4-FFF2-40B4-BE49-F238E27FC236}">
-                <a16:creationId xmlns:a16="http://schemas.microsoft.com/office/drawing/2014/main" id="{554FC63C-548D-BA20-C754-54B81A44BE6C}"/>
-              </a:ext>
-            </a:extLst>
-          </p:cNvPr>
-          <p:cNvSpPr/>
-          <p:nvPr/>
-        </p:nvSpPr>
-        <p:spPr>
-          <a:xfrm>
-            <a:off x="5050299" y="1353312"/>
-            <a:ext cx="201168" cy="201168"/>
-          </a:xfrm>
-          <a:prstGeom prst="ellipse">
-            <a:avLst/>
-          </a:prstGeom>
-          <a:solidFill>
-            <a:srgbClr val="E74C3C"/>
-          </a:solidFill>
-          <a:ln/>
-        </p:spPr>
-        <p:txBody>
-          <a:bodyPr/>
-          <a:lstStyle/>
-          <a:p>
-            <a:endParaRPr lang="es-ES"/>
-          </a:p>
-        </p:txBody>
-      </p:sp>
-      <p:sp>
-        <p:nvSpPr>
-          <p:cNvPr id="7" name="Text 4">
-            <a:extLst>
-              <a:ext uri="{FF2B5EF4-FFF2-40B4-BE49-F238E27FC236}">
-                <a16:creationId xmlns:a16="http://schemas.microsoft.com/office/drawing/2014/main" id="{AB16C9FA-F676-5D61-D08F-9A41FFEFA3ED}"/>
-              </a:ext>
-            </a:extLst>
-          </p:cNvPr>
-          <p:cNvSpPr/>
-          <p:nvPr/>
-        </p:nvSpPr>
-        <p:spPr>
-          <a:xfrm>
-            <a:off x="5342907" y="1280160"/>
-            <a:ext cx="4462272" cy="320040"/>
-          </a:xfrm>
-          <a:prstGeom prst="rect">
-            <a:avLst/>
-          </a:prstGeom>
-          <a:noFill/>
-          <a:ln/>
-        </p:spPr>
-        <p:txBody>
-          <a:bodyPr wrap="square" lIns="0" tIns="0" rIns="0" bIns="0" rtlCol="0" anchor="ctr"/>
-          <a:lstStyle/>
-          <a:p>
-            <a:pPr marL="0" indent="0">
-              <a:buNone/>
-            </a:pPr>
-            <a:r>
-              <a:rPr lang="en-US" sz="1300" b="1" dirty="0">
-                <a:solidFill>
-                  <a:srgbClr val="212529"/>
-                </a:solidFill>
-                <a:latin typeface="Calibri" pitchFamily="34" charset="0"/>
-                <a:ea typeface="Calibri" pitchFamily="34" charset="-122"/>
-                <a:cs typeface="Calibri" pitchFamily="34" charset="-120"/>
-              </a:rPr>
-              <a:t>C0: Perifèric Baix Ús (132)</a:t>
-            </a:r>
-            <a:endParaRPr lang="en-US" sz="1300" dirty="0"/>
-          </a:p>
-        </p:txBody>
-      </p:sp>
-      <p:sp>
-        <p:nvSpPr>
-          <p:cNvPr id="8" name="Text 5">
-            <a:extLst>
-              <a:ext uri="{FF2B5EF4-FFF2-40B4-BE49-F238E27FC236}">
-                <a16:creationId xmlns:a16="http://schemas.microsoft.com/office/drawing/2014/main" id="{282BBAED-C22E-0CAF-B75F-95DCA172CDC8}"/>
-              </a:ext>
-            </a:extLst>
-          </p:cNvPr>
-          <p:cNvSpPr/>
-          <p:nvPr/>
-        </p:nvSpPr>
-        <p:spPr>
-          <a:xfrm>
-            <a:off x="5342907" y="1554480"/>
-            <a:ext cx="4462272" cy="274320"/>
-          </a:xfrm>
-          <a:prstGeom prst="rect">
-            <a:avLst/>
-          </a:prstGeom>
-          <a:noFill/>
-          <a:ln/>
-        </p:spPr>
-        <p:txBody>
-          <a:bodyPr wrap="square" lIns="0" tIns="0" rIns="0" bIns="0" rtlCol="0" anchor="ctr"/>
-          <a:lstStyle/>
-          <a:p>
-            <a:pPr marL="0" indent="0">
-              <a:buNone/>
-            </a:pPr>
-            <a:r>
-              <a:rPr lang="en-US" sz="1100" dirty="0">
-                <a:solidFill>
-                  <a:srgbClr val="495057"/>
-                </a:solidFill>
-                <a:latin typeface="Calibri" pitchFamily="34" charset="0"/>
-                <a:ea typeface="Calibri" pitchFamily="34" charset="-122"/>
-                <a:cs typeface="Calibri" pitchFamily="34" charset="-120"/>
-              </a:rPr>
-              <a:t>Zones altes, poc trànsit, sovint buides</a:t>
-            </a:r>
-            <a:endParaRPr lang="en-US" sz="1100" dirty="0"/>
-          </a:p>
-        </p:txBody>
-      </p:sp>
-      <p:sp>
-        <p:nvSpPr>
-          <p:cNvPr id="9" name="Shape 6">
-            <a:extLst>
-              <a:ext uri="{FF2B5EF4-FFF2-40B4-BE49-F238E27FC236}">
-                <a16:creationId xmlns:a16="http://schemas.microsoft.com/office/drawing/2014/main" id="{99E97745-2D3B-6691-CB04-1C0282FFC968}"/>
-              </a:ext>
-            </a:extLst>
-          </p:cNvPr>
-          <p:cNvSpPr/>
-          <p:nvPr/>
-        </p:nvSpPr>
-        <p:spPr>
-          <a:xfrm>
-            <a:off x="5050299" y="2066544"/>
-            <a:ext cx="201168" cy="201168"/>
-          </a:xfrm>
-          <a:prstGeom prst="ellipse">
-            <a:avLst/>
-          </a:prstGeom>
-          <a:solidFill>
-            <a:srgbClr val="3498DB"/>
-          </a:solidFill>
-          <a:ln/>
-        </p:spPr>
-        <p:txBody>
-          <a:bodyPr/>
-          <a:lstStyle/>
-          <a:p>
-            <a:endParaRPr lang="es-ES"/>
-          </a:p>
-        </p:txBody>
-      </p:sp>
-      <p:sp>
-        <p:nvSpPr>
-          <p:cNvPr id="10" name="Text 7">
-            <a:extLst>
-              <a:ext uri="{FF2B5EF4-FFF2-40B4-BE49-F238E27FC236}">
-                <a16:creationId xmlns:a16="http://schemas.microsoft.com/office/drawing/2014/main" id="{6ABE4FB8-1BC8-A59F-83F6-B99476702CEC}"/>
-              </a:ext>
-            </a:extLst>
-          </p:cNvPr>
-          <p:cNvSpPr/>
-          <p:nvPr/>
-        </p:nvSpPr>
-        <p:spPr>
-          <a:xfrm>
-            <a:off x="5342907" y="1993392"/>
-            <a:ext cx="4462272" cy="320040"/>
-          </a:xfrm>
-          <a:prstGeom prst="rect">
-            <a:avLst/>
-          </a:prstGeom>
-          <a:noFill/>
-          <a:ln/>
-        </p:spPr>
-        <p:txBody>
-          <a:bodyPr wrap="square" lIns="0" tIns="0" rIns="0" bIns="0" rtlCol="0" anchor="ctr"/>
-          <a:lstStyle/>
-          <a:p>
-            <a:pPr marL="0" indent="0">
-              <a:buNone/>
-            </a:pPr>
-            <a:r>
-              <a:rPr lang="en-US" sz="1300" b="1" dirty="0">
-                <a:solidFill>
-                  <a:srgbClr val="212529"/>
-                </a:solidFill>
-                <a:latin typeface="Calibri" pitchFamily="34" charset="0"/>
-                <a:ea typeface="Calibri" pitchFamily="34" charset="-122"/>
-                <a:cs typeface="Calibri" pitchFamily="34" charset="-120"/>
-              </a:rPr>
-              <a:t>C1: Central Alta Ocupació (42)</a:t>
-            </a:r>
-            <a:endParaRPr lang="en-US" sz="1300" dirty="0"/>
-          </a:p>
-        </p:txBody>
-      </p:sp>
-      <p:sp>
-        <p:nvSpPr>
-          <p:cNvPr id="11" name="Text 8">
-            <a:extLst>
-              <a:ext uri="{FF2B5EF4-FFF2-40B4-BE49-F238E27FC236}">
-                <a16:creationId xmlns:a16="http://schemas.microsoft.com/office/drawing/2014/main" id="{0727D5E2-2082-CC98-793C-8A25F0DB1A77}"/>
-              </a:ext>
-            </a:extLst>
-          </p:cNvPr>
-          <p:cNvSpPr/>
-          <p:nvPr/>
-        </p:nvSpPr>
-        <p:spPr>
-          <a:xfrm>
-            <a:off x="5342907" y="2267712"/>
-            <a:ext cx="4462272" cy="274320"/>
-          </a:xfrm>
-          <a:prstGeom prst="rect">
-            <a:avLst/>
-          </a:prstGeom>
-          <a:noFill/>
-          <a:ln/>
-        </p:spPr>
-        <p:txBody>
-          <a:bodyPr wrap="square" lIns="0" tIns="0" rIns="0" bIns="0" rtlCol="0" anchor="ctr"/>
-          <a:lstStyle/>
-          <a:p>
-            <a:pPr marL="0" indent="0">
-              <a:buNone/>
-            </a:pPr>
-            <a:r>
-              <a:rPr lang="en-US" sz="1100" dirty="0">
-                <a:solidFill>
-                  <a:srgbClr val="495057"/>
-                </a:solidFill>
-                <a:latin typeface="Calibri" pitchFamily="34" charset="0"/>
-                <a:ea typeface="Calibri" pitchFamily="34" charset="-122"/>
-                <a:cs typeface="Calibri" pitchFamily="34" charset="-120"/>
-              </a:rPr>
-              <a:t>Centre, alta demanda, NAB alt matí i tarda</a:t>
-            </a:r>
-            <a:endParaRPr lang="en-US" sz="1100" dirty="0"/>
-          </a:p>
-        </p:txBody>
-      </p:sp>
-      <p:sp>
-        <p:nvSpPr>
-          <p:cNvPr id="12" name="Shape 9">
-            <a:extLst>
-              <a:ext uri="{FF2B5EF4-FFF2-40B4-BE49-F238E27FC236}">
-                <a16:creationId xmlns:a16="http://schemas.microsoft.com/office/drawing/2014/main" id="{EE5C7498-9533-3DE9-DE3E-3172DFB786C1}"/>
-              </a:ext>
-            </a:extLst>
-          </p:cNvPr>
-          <p:cNvSpPr/>
-          <p:nvPr/>
-        </p:nvSpPr>
-        <p:spPr>
-          <a:xfrm>
-            <a:off x="5050299" y="2779776"/>
-            <a:ext cx="201168" cy="201168"/>
-          </a:xfrm>
-          <a:prstGeom prst="ellipse">
-            <a:avLst/>
-          </a:prstGeom>
-          <a:solidFill>
-            <a:srgbClr val="27AE60"/>
-          </a:solidFill>
-          <a:ln/>
-        </p:spPr>
-        <p:txBody>
-          <a:bodyPr/>
-          <a:lstStyle/>
-          <a:p>
-            <a:endParaRPr lang="es-ES"/>
-          </a:p>
-        </p:txBody>
-      </p:sp>
-      <p:sp>
-        <p:nvSpPr>
-          <p:cNvPr id="13" name="Text 10">
-            <a:extLst>
-              <a:ext uri="{FF2B5EF4-FFF2-40B4-BE49-F238E27FC236}">
-                <a16:creationId xmlns:a16="http://schemas.microsoft.com/office/drawing/2014/main" id="{165D932F-6332-E3A9-ED03-3DDFB04F6E49}"/>
-              </a:ext>
-            </a:extLst>
-          </p:cNvPr>
-          <p:cNvSpPr/>
-          <p:nvPr/>
-        </p:nvSpPr>
-        <p:spPr>
-          <a:xfrm>
-            <a:off x="5342907" y="2706624"/>
-            <a:ext cx="4462272" cy="320040"/>
-          </a:xfrm>
-          <a:prstGeom prst="rect">
-            <a:avLst/>
-          </a:prstGeom>
-          <a:noFill/>
-          <a:ln/>
-        </p:spPr>
-        <p:txBody>
-          <a:bodyPr wrap="square" lIns="0" tIns="0" rIns="0" bIns="0" rtlCol="0" anchor="ctr"/>
-          <a:lstStyle/>
-          <a:p>
-            <a:pPr marL="0" indent="0">
-              <a:buNone/>
-            </a:pPr>
-            <a:r>
-              <a:rPr lang="en-US" sz="1300" b="1" dirty="0">
-                <a:solidFill>
-                  <a:srgbClr val="212529"/>
-                </a:solidFill>
-                <a:latin typeface="Calibri" pitchFamily="34" charset="0"/>
-                <a:ea typeface="Calibri" pitchFamily="34" charset="-122"/>
-                <a:cs typeface="Calibri" pitchFamily="34" charset="-120"/>
-              </a:rPr>
-              <a:t>C2: Origen Commuter </a:t>
-            </a:r>
-            <a:r>
-              <a:rPr lang="en-US" sz="1300" b="1" dirty="0" err="1">
-                <a:solidFill>
-                  <a:srgbClr val="212529"/>
-                </a:solidFill>
-                <a:latin typeface="Calibri" pitchFamily="34" charset="0"/>
-                <a:ea typeface="Calibri" pitchFamily="34" charset="-122"/>
-                <a:cs typeface="Calibri" pitchFamily="34" charset="-120"/>
-              </a:rPr>
-              <a:t>Matí</a:t>
-            </a:r>
-            <a:r>
-              <a:rPr lang="en-US" sz="1300" b="1" dirty="0">
-                <a:solidFill>
-                  <a:srgbClr val="212529"/>
-                </a:solidFill>
-                <a:latin typeface="Calibri" pitchFamily="34" charset="0"/>
-                <a:ea typeface="Calibri" pitchFamily="34" charset="-122"/>
-                <a:cs typeface="Calibri" pitchFamily="34" charset="-120"/>
-              </a:rPr>
-              <a:t> (162)</a:t>
-            </a:r>
-            <a:endParaRPr lang="en-US" sz="1300" dirty="0"/>
-          </a:p>
-        </p:txBody>
-      </p:sp>
-      <p:sp>
-        <p:nvSpPr>
-          <p:cNvPr id="14" name="Text 11">
-            <a:extLst>
-              <a:ext uri="{FF2B5EF4-FFF2-40B4-BE49-F238E27FC236}">
-                <a16:creationId xmlns:a16="http://schemas.microsoft.com/office/drawing/2014/main" id="{6A8E7949-A35E-B69E-BB2C-8C55888D4005}"/>
-              </a:ext>
-            </a:extLst>
-          </p:cNvPr>
-          <p:cNvSpPr/>
-          <p:nvPr/>
-        </p:nvSpPr>
-        <p:spPr>
-          <a:xfrm>
-            <a:off x="5342907" y="2980944"/>
-            <a:ext cx="4462272" cy="274320"/>
-          </a:xfrm>
-          <a:prstGeom prst="rect">
-            <a:avLst/>
-          </a:prstGeom>
-          <a:noFill/>
-          <a:ln/>
-        </p:spPr>
-        <p:txBody>
-          <a:bodyPr wrap="square" lIns="0" tIns="0" rIns="0" bIns="0" rtlCol="0" anchor="ctr"/>
-          <a:lstStyle/>
-          <a:p>
-            <a:pPr marL="0" indent="0">
-              <a:buNone/>
-            </a:pPr>
-            <a:r>
-              <a:rPr lang="en-US" sz="1100" dirty="0">
-                <a:solidFill>
-                  <a:srgbClr val="495057"/>
-                </a:solidFill>
-                <a:latin typeface="Calibri" pitchFamily="34" charset="0"/>
-                <a:ea typeface="Calibri" pitchFamily="34" charset="-122"/>
-                <a:cs typeface="Calibri" pitchFamily="34" charset="-120"/>
-              </a:rPr>
-              <a:t>Estacions d'origen, es buiden al matí</a:t>
-            </a:r>
-            <a:endParaRPr lang="en-US" sz="1100" dirty="0"/>
-          </a:p>
-        </p:txBody>
-      </p:sp>
-      <p:sp>
-        <p:nvSpPr>
-          <p:cNvPr id="15" name="Shape 12">
-            <a:extLst>
-              <a:ext uri="{FF2B5EF4-FFF2-40B4-BE49-F238E27FC236}">
-                <a16:creationId xmlns:a16="http://schemas.microsoft.com/office/drawing/2014/main" id="{1B47785D-9A40-1D4C-F65A-91B0EA996516}"/>
-              </a:ext>
-            </a:extLst>
-          </p:cNvPr>
-          <p:cNvSpPr/>
-          <p:nvPr/>
-        </p:nvSpPr>
-        <p:spPr>
-          <a:xfrm>
-            <a:off x="5050299" y="3493008"/>
-            <a:ext cx="201168" cy="201168"/>
-          </a:xfrm>
-          <a:prstGeom prst="ellipse">
-            <a:avLst/>
-          </a:prstGeom>
-          <a:solidFill>
-            <a:srgbClr val="9B59B6"/>
-          </a:solidFill>
-          <a:ln/>
-        </p:spPr>
-        <p:txBody>
-          <a:bodyPr/>
-          <a:lstStyle/>
-          <a:p>
-            <a:endParaRPr lang="es-ES"/>
-          </a:p>
-        </p:txBody>
-      </p:sp>
-      <p:sp>
-        <p:nvSpPr>
-          <p:cNvPr id="16" name="Text 13">
-            <a:extLst>
-              <a:ext uri="{FF2B5EF4-FFF2-40B4-BE49-F238E27FC236}">
-                <a16:creationId xmlns:a16="http://schemas.microsoft.com/office/drawing/2014/main" id="{DD5A1AFA-9B9A-FE08-FE81-0286F1F7CA40}"/>
-              </a:ext>
-            </a:extLst>
-          </p:cNvPr>
-          <p:cNvSpPr/>
-          <p:nvPr/>
-        </p:nvSpPr>
-        <p:spPr>
-          <a:xfrm>
-            <a:off x="5342907" y="3419856"/>
-            <a:ext cx="4462272" cy="320040"/>
-          </a:xfrm>
-          <a:prstGeom prst="rect">
-            <a:avLst/>
-          </a:prstGeom>
-          <a:noFill/>
-          <a:ln/>
-        </p:spPr>
-        <p:txBody>
-          <a:bodyPr wrap="square" lIns="0" tIns="0" rIns="0" bIns="0" rtlCol="0" anchor="ctr"/>
-          <a:lstStyle/>
-          <a:p>
-            <a:pPr marL="0" indent="0">
-              <a:buNone/>
-            </a:pPr>
-            <a:r>
-              <a:rPr lang="en-US" sz="1300" b="1" dirty="0">
-                <a:solidFill>
-                  <a:srgbClr val="212529"/>
-                </a:solidFill>
-                <a:latin typeface="Calibri" pitchFamily="34" charset="0"/>
-                <a:ea typeface="Calibri" pitchFamily="34" charset="-122"/>
-                <a:cs typeface="Calibri" pitchFamily="34" charset="-120"/>
-              </a:rPr>
-              <a:t>C3: Ús Mixt Equilibrat (122)</a:t>
-            </a:r>
-            <a:endParaRPr lang="en-US" sz="1300" dirty="0"/>
-          </a:p>
-        </p:txBody>
-      </p:sp>
-      <p:sp>
-        <p:nvSpPr>
-          <p:cNvPr id="17" name="Text 14">
-            <a:extLst>
-              <a:ext uri="{FF2B5EF4-FFF2-40B4-BE49-F238E27FC236}">
-                <a16:creationId xmlns:a16="http://schemas.microsoft.com/office/drawing/2014/main" id="{4E59DBA5-C0E9-AEB3-4D4F-95F8C8CE3BA3}"/>
-              </a:ext>
-            </a:extLst>
-          </p:cNvPr>
-          <p:cNvSpPr/>
-          <p:nvPr/>
-        </p:nvSpPr>
-        <p:spPr>
-          <a:xfrm>
-            <a:off x="5342907" y="3694176"/>
-            <a:ext cx="4462272" cy="274320"/>
-          </a:xfrm>
-          <a:prstGeom prst="rect">
-            <a:avLst/>
-          </a:prstGeom>
-          <a:noFill/>
-          <a:ln/>
-        </p:spPr>
-        <p:txBody>
-          <a:bodyPr wrap="square" lIns="0" tIns="0" rIns="0" bIns="0" rtlCol="0" anchor="ctr"/>
-          <a:lstStyle/>
-          <a:p>
-            <a:pPr marL="0" indent="0">
-              <a:buNone/>
-            </a:pPr>
-            <a:r>
-              <a:rPr lang="en-US" sz="1100" dirty="0">
-                <a:solidFill>
-                  <a:srgbClr val="495057"/>
-                </a:solidFill>
-                <a:latin typeface="Calibri" pitchFamily="34" charset="0"/>
-                <a:ea typeface="Calibri" pitchFamily="34" charset="-122"/>
-                <a:cs typeface="Calibri" pitchFamily="34" charset="-120"/>
-              </a:rPr>
-              <a:t>Ús equilibrat, capacitat gran</a:t>
-            </a:r>
-            <a:endParaRPr lang="en-US" sz="1100" dirty="0"/>
-          </a:p>
-        </p:txBody>
-      </p:sp>
-      <p:sp>
-        <p:nvSpPr>
-          <p:cNvPr id="18" name="Shape 15">
-            <a:extLst>
-              <a:ext uri="{FF2B5EF4-FFF2-40B4-BE49-F238E27FC236}">
-                <a16:creationId xmlns:a16="http://schemas.microsoft.com/office/drawing/2014/main" id="{7FE4DCBD-088F-8B82-D500-A4587820898E}"/>
-              </a:ext>
-            </a:extLst>
-          </p:cNvPr>
-          <p:cNvSpPr/>
-          <p:nvPr/>
-        </p:nvSpPr>
-        <p:spPr>
-          <a:xfrm>
-            <a:off x="5050299" y="4206240"/>
-            <a:ext cx="201168" cy="201168"/>
-          </a:xfrm>
-          <a:prstGeom prst="ellipse">
-            <a:avLst/>
-          </a:prstGeom>
-          <a:solidFill>
-            <a:srgbClr val="E67E22"/>
-          </a:solidFill>
-          <a:ln/>
-        </p:spPr>
-        <p:txBody>
-          <a:bodyPr/>
-          <a:lstStyle/>
-          <a:p>
-            <a:endParaRPr lang="es-ES"/>
-          </a:p>
-        </p:txBody>
-      </p:sp>
-      <p:sp>
-        <p:nvSpPr>
-          <p:cNvPr id="19" name="Text 16">
-            <a:extLst>
-              <a:ext uri="{FF2B5EF4-FFF2-40B4-BE49-F238E27FC236}">
-                <a16:creationId xmlns:a16="http://schemas.microsoft.com/office/drawing/2014/main" id="{CBB3E5B7-2A10-2448-C7B2-E3720B16366C}"/>
-              </a:ext>
-            </a:extLst>
-          </p:cNvPr>
-          <p:cNvSpPr/>
-          <p:nvPr/>
-        </p:nvSpPr>
-        <p:spPr>
-          <a:xfrm>
-            <a:off x="5342907" y="4133088"/>
-            <a:ext cx="4462272" cy="320040"/>
-          </a:xfrm>
-          <a:prstGeom prst="rect">
-            <a:avLst/>
-          </a:prstGeom>
-          <a:noFill/>
-          <a:ln/>
-        </p:spPr>
-        <p:txBody>
-          <a:bodyPr wrap="square" lIns="0" tIns="0" rIns="0" bIns="0" rtlCol="0" anchor="ctr"/>
-          <a:lstStyle/>
-          <a:p>
-            <a:pPr marL="0" indent="0">
-              <a:buNone/>
-            </a:pPr>
-            <a:r>
-              <a:rPr lang="en-US" sz="1300" b="1" dirty="0">
-                <a:solidFill>
-                  <a:srgbClr val="212529"/>
-                </a:solidFill>
-                <a:latin typeface="Calibri" pitchFamily="34" charset="0"/>
-                <a:ea typeface="Calibri" pitchFamily="34" charset="-122"/>
-                <a:cs typeface="Calibri" pitchFamily="34" charset="-120"/>
-              </a:rPr>
-              <a:t>C4: Residencial Entrada Tarda (59)</a:t>
-            </a:r>
-            <a:endParaRPr lang="en-US" sz="1300" dirty="0"/>
-          </a:p>
-        </p:txBody>
-      </p:sp>
-      <p:sp>
-        <p:nvSpPr>
-          <p:cNvPr id="20" name="Text 17">
-            <a:extLst>
-              <a:ext uri="{FF2B5EF4-FFF2-40B4-BE49-F238E27FC236}">
-                <a16:creationId xmlns:a16="http://schemas.microsoft.com/office/drawing/2014/main" id="{0B59EB20-F8FD-37F4-D746-76DAA15F6CE8}"/>
-              </a:ext>
-            </a:extLst>
-          </p:cNvPr>
-          <p:cNvSpPr/>
-          <p:nvPr/>
-        </p:nvSpPr>
-        <p:spPr>
-          <a:xfrm>
-            <a:off x="5342907" y="4407408"/>
-            <a:ext cx="4462272" cy="274320"/>
-          </a:xfrm>
-          <a:prstGeom prst="rect">
-            <a:avLst/>
-          </a:prstGeom>
-          <a:noFill/>
-          <a:ln/>
-        </p:spPr>
-        <p:txBody>
-          <a:bodyPr wrap="square" lIns="0" tIns="0" rIns="0" bIns="0" rtlCol="0" anchor="ctr"/>
-          <a:lstStyle/>
-          <a:p>
-            <a:pPr marL="0" indent="0">
-              <a:buNone/>
-            </a:pPr>
-            <a:r>
-              <a:rPr lang="en-US" sz="1100" dirty="0">
-                <a:solidFill>
-                  <a:srgbClr val="495057"/>
-                </a:solidFill>
-                <a:latin typeface="Calibri" pitchFamily="34" charset="0"/>
-                <a:ea typeface="Calibri" pitchFamily="34" charset="-122"/>
-                <a:cs typeface="Calibri" pitchFamily="34" charset="-120"/>
-              </a:rPr>
-              <a:t>Zones residencials, s'omplen a la tarda</a:t>
-            </a:r>
-            <a:endParaRPr lang="en-US" sz="1100" dirty="0"/>
-          </a:p>
-        </p:txBody>
-      </p:sp>
-      <p:sp>
-        <p:nvSpPr>
-          <p:cNvPr id="21" name="Text 18">
-            <a:extLst>
-              <a:ext uri="{FF2B5EF4-FFF2-40B4-BE49-F238E27FC236}">
-                <a16:creationId xmlns:a16="http://schemas.microsoft.com/office/drawing/2014/main" id="{179BD2DA-8769-74AB-3D84-22C425DDE86C}"/>
-              </a:ext>
-            </a:extLst>
-          </p:cNvPr>
-          <p:cNvSpPr/>
-          <p:nvPr/>
-        </p:nvSpPr>
-        <p:spPr>
-          <a:xfrm>
-            <a:off x="8046720" y="4800600"/>
-            <a:ext cx="914400" cy="274320"/>
-          </a:xfrm>
-          <a:prstGeom prst="rect">
-            <a:avLst/>
-          </a:prstGeom>
-          <a:noFill/>
-          <a:ln/>
-        </p:spPr>
-        <p:txBody>
-          <a:bodyPr wrap="square" rtlCol="0" anchor="ctr"/>
-          <a:lstStyle/>
-          <a:p>
-            <a:pPr marL="0" indent="0" algn="r">
-              <a:buNone/>
-            </a:pPr>
-            <a:r>
-              <a:rPr lang="en-US" sz="900" dirty="0">
-                <a:solidFill>
-                  <a:srgbClr val="868E96"/>
-                </a:solidFill>
-                <a:latin typeface="Calibri" pitchFamily="34" charset="0"/>
-                <a:ea typeface="Calibri" pitchFamily="34" charset="-122"/>
-                <a:cs typeface="Calibri" pitchFamily="34" charset="-120"/>
-              </a:rPr>
-              <a:t>8 / 12</a:t>
-            </a:r>
-            <a:endParaRPr lang="en-US" sz="900" dirty="0"/>
-          </a:p>
-        </p:txBody>
-      </p:sp>
-      <p:pic>
-        <p:nvPicPr>
-          <p:cNvPr id="26" name="Imagen 25">
-            <a:extLst>
-              <a:ext uri="{FF2B5EF4-FFF2-40B4-BE49-F238E27FC236}">
-                <a16:creationId xmlns:a16="http://schemas.microsoft.com/office/drawing/2014/main" id="{14086294-1130-B815-2849-138394593C3A}"/>
-              </a:ext>
-            </a:extLst>
-          </p:cNvPr>
-          <p:cNvPicPr>
-            <a:picLocks noChangeAspect="1"/>
-          </p:cNvPicPr>
-          <p:nvPr/>
-        </p:nvPicPr>
-        <p:blipFill>
-          <a:blip r:embed="rId3"/>
-          <a:stretch>
-            <a:fillRect/>
-          </a:stretch>
-        </p:blipFill>
-        <p:spPr>
-          <a:xfrm>
-            <a:off x="457200" y="1236916"/>
-            <a:ext cx="4462272" cy="3572429"/>
-          </a:xfrm>
-          <a:prstGeom prst="rect">
-            <a:avLst/>
-          </a:prstGeom>
-        </p:spPr>
-      </p:pic>
-    </p:spTree>
-    <p:extLst>
-      <p:ext uri="{BB962C8B-B14F-4D97-AF65-F5344CB8AC3E}">
-        <p14:creationId xmlns:p14="http://schemas.microsoft.com/office/powerpoint/2010/main" val="2615943320"/>
-      </p:ext>
-    </p:extLst>
-  </p:cSld>
-  <p:clrMapOvr>
-    <a:masterClrMapping/>
-  </p:clrMapOvr>
-</p:sld>
-</file>
-
-<file path=ppt/slides/slide9.xml><?xml version="1.0" encoding="utf-8"?>
-<p:sld xmlns:a="http://schemas.openxmlformats.org/drawingml/2006/main" xmlns:r="http://schemas.openxmlformats.org/officeDocument/2006/relationships" xmlns:p="http://schemas.openxmlformats.org/presentationml/2006/main">
-  <p:cSld>
-    <p:bg>
-      <p:bgPr>
-        <a:solidFill>
-          <a:srgbClr val="FFFFFF"/>
-        </a:solidFill>
-        <a:effectLst/>
-      </p:bgPr>
-    </p:bg>
-    <p:spTree>
-      <p:nvGrpSpPr>
-        <p:cNvPr id="1" name="">
-          <a:extLst>
-            <a:ext uri="{FF2B5EF4-FFF2-40B4-BE49-F238E27FC236}">
-              <a16:creationId xmlns:a16="http://schemas.microsoft.com/office/drawing/2014/main" id="{3E42F6F9-68A6-A59F-8140-05BEEC89F703}"/>
-            </a:ext>
-          </a:extLst>
-        </p:cNvPr>
-        <p:cNvGrpSpPr/>
-        <p:nvPr/>
-      </p:nvGrpSpPr>
-      <p:grpSpPr>
-        <a:xfrm>
-          <a:off x="0" y="0"/>
-          <a:ext cx="0" cy="0"/>
-          <a:chOff x="0" y="0"/>
-          <a:chExt cx="0" cy="0"/>
-        </a:xfrm>
-      </p:grpSpPr>
-      <p:sp>
-        <p:nvSpPr>
-          <p:cNvPr id="2" name="Shape 0">
-            <a:extLst>
-              <a:ext uri="{FF2B5EF4-FFF2-40B4-BE49-F238E27FC236}">
-                <a16:creationId xmlns:a16="http://schemas.microsoft.com/office/drawing/2014/main" id="{402D482B-BBDC-B736-36EC-310D3DEDCF7C}"/>
-              </a:ext>
-            </a:extLst>
-          </p:cNvPr>
-          <p:cNvSpPr/>
-          <p:nvPr/>
-        </p:nvSpPr>
-        <p:spPr>
-          <a:xfrm>
-            <a:off x="0" y="0"/>
-            <a:ext cx="9144000" cy="54864"/>
-          </a:xfrm>
-          <a:prstGeom prst="rect">
-            <a:avLst/>
-          </a:prstGeom>
-          <a:solidFill>
-            <a:srgbClr val="2D6A4F"/>
-          </a:solidFill>
-          <a:ln/>
-        </p:spPr>
-        <p:txBody>
-          <a:bodyPr/>
-          <a:lstStyle/>
-          <a:p>
-            <a:endParaRPr lang="es-ES"/>
-          </a:p>
-        </p:txBody>
-      </p:sp>
-      <p:sp>
-        <p:nvSpPr>
-          <p:cNvPr id="3" name="Text 1">
-            <a:extLst>
-              <a:ext uri="{FF2B5EF4-FFF2-40B4-BE49-F238E27FC236}">
-                <a16:creationId xmlns:a16="http://schemas.microsoft.com/office/drawing/2014/main" id="{55E2BE9E-86F6-2337-5596-966B6895E0F7}"/>
-              </a:ext>
-            </a:extLst>
-          </p:cNvPr>
-          <p:cNvSpPr/>
-          <p:nvPr/>
-        </p:nvSpPr>
-        <p:spPr>
-          <a:xfrm>
-            <a:off x="457200" y="228600"/>
-            <a:ext cx="8229600" cy="640080"/>
-          </a:xfrm>
-          <a:prstGeom prst="rect">
-            <a:avLst/>
-          </a:prstGeom>
-          <a:noFill/>
-          <a:ln/>
-        </p:spPr>
-        <p:txBody>
-          <a:bodyPr wrap="square" lIns="0" tIns="0" rIns="0" bIns="0" rtlCol="0" anchor="ctr"/>
-          <a:lstStyle/>
-          <a:p>
-            <a:pPr marL="0" indent="0">
-              <a:buNone/>
-            </a:pPr>
-            <a:r>
-              <a:rPr lang="en-US" sz="3000" b="1" dirty="0">
-                <a:solidFill>
-                  <a:srgbClr val="1B4332"/>
-                </a:solidFill>
-                <a:latin typeface="Calibri" pitchFamily="34" charset="0"/>
-                <a:ea typeface="Calibri" pitchFamily="34" charset="-122"/>
-                <a:cs typeface="Calibri" pitchFamily="34" charset="-120"/>
-              </a:rPr>
-              <a:t>Perfils dels clústers: centroides</a:t>
-            </a:r>
-            <a:endParaRPr lang="en-US" sz="3000" dirty="0"/>
-          </a:p>
-        </p:txBody>
-      </p:sp>
-      <p:sp>
-        <p:nvSpPr>
-          <p:cNvPr id="4" name="Text 2">
-            <a:extLst>
-              <a:ext uri="{FF2B5EF4-FFF2-40B4-BE49-F238E27FC236}">
-                <a16:creationId xmlns:a16="http://schemas.microsoft.com/office/drawing/2014/main" id="{A2575D0C-B912-769B-CD6A-23878564FF05}"/>
-              </a:ext>
-            </a:extLst>
-          </p:cNvPr>
-          <p:cNvSpPr/>
-          <p:nvPr/>
-        </p:nvSpPr>
-        <p:spPr>
-          <a:xfrm>
-            <a:off x="457200" y="777240"/>
-            <a:ext cx="8229600" cy="365760"/>
-          </a:xfrm>
-          <a:prstGeom prst="rect">
-            <a:avLst/>
-          </a:prstGeom>
-          <a:noFill/>
-          <a:ln/>
-        </p:spPr>
-        <p:txBody>
-          <a:bodyPr wrap="square" lIns="0" tIns="0" rIns="0" bIns="0" rtlCol="0" anchor="ctr"/>
-          <a:lstStyle/>
-          <a:p>
-            <a:pPr marL="0" indent="0">
-              <a:buNone/>
-            </a:pPr>
-            <a:r>
-              <a:rPr lang="en-US" sz="1300" dirty="0">
-                <a:solidFill>
-                  <a:srgbClr val="495057"/>
-                </a:solidFill>
-                <a:latin typeface="Calibri Light" pitchFamily="34" charset="0"/>
-                <a:ea typeface="Calibri Light" pitchFamily="34" charset="-122"/>
-                <a:cs typeface="Calibri Light" pitchFamily="34" charset="-120"/>
-              </a:rPr>
-              <a:t>Cada clúster té un perfil diferent segons capacitat, NAB, variabilitat i problemes de disponibilitat</a:t>
-            </a:r>
-            <a:endParaRPr lang="en-US" sz="1300" dirty="0"/>
-          </a:p>
-        </p:txBody>
-      </p:sp>
-      <p:sp>
-        <p:nvSpPr>
-          <p:cNvPr id="6" name="Shape 3">
-            <a:extLst>
-              <a:ext uri="{FF2B5EF4-FFF2-40B4-BE49-F238E27FC236}">
-                <a16:creationId xmlns:a16="http://schemas.microsoft.com/office/drawing/2014/main" id="{D1F14FF4-30AC-8425-9502-87B10024799D}"/>
-              </a:ext>
-            </a:extLst>
-          </p:cNvPr>
-          <p:cNvSpPr/>
-          <p:nvPr/>
-        </p:nvSpPr>
-        <p:spPr>
-          <a:xfrm>
-            <a:off x="457200" y="4297680"/>
-            <a:ext cx="3931920" cy="502920"/>
-          </a:xfrm>
-          <a:prstGeom prst="rect">
-            <a:avLst/>
-          </a:prstGeom>
-          <a:solidFill>
-            <a:srgbClr val="F0FFF4"/>
-          </a:solidFill>
-          <a:ln/>
-        </p:spPr>
-        <p:txBody>
-          <a:bodyPr/>
-          <a:lstStyle/>
-          <a:p>
-            <a:endParaRPr lang="es-ES"/>
-          </a:p>
-        </p:txBody>
-      </p:sp>
-      <p:sp>
-        <p:nvSpPr>
-          <p:cNvPr id="7" name="Text 4">
-            <a:extLst>
-              <a:ext uri="{FF2B5EF4-FFF2-40B4-BE49-F238E27FC236}">
-                <a16:creationId xmlns:a16="http://schemas.microsoft.com/office/drawing/2014/main" id="{CAECA02C-3E6F-D1BE-2704-B22B72123ECF}"/>
-              </a:ext>
-            </a:extLst>
-          </p:cNvPr>
-          <p:cNvSpPr/>
-          <p:nvPr/>
-        </p:nvSpPr>
-        <p:spPr>
-          <a:xfrm>
-            <a:off x="594360" y="4297680"/>
-            <a:ext cx="3657600" cy="502920"/>
-          </a:xfrm>
-          <a:prstGeom prst="rect">
-            <a:avLst/>
-          </a:prstGeom>
-          <a:noFill/>
-          <a:ln/>
-        </p:spPr>
-        <p:txBody>
-          <a:bodyPr wrap="square" lIns="0" tIns="0" rIns="0" bIns="0" rtlCol="0" anchor="ctr"/>
-          <a:lstStyle/>
-          <a:p>
-            <a:pPr marL="0" indent="0">
-              <a:buNone/>
-            </a:pPr>
-            <a:r>
-              <a:rPr lang="en-US" sz="1100" dirty="0">
-                <a:solidFill>
-                  <a:srgbClr val="2D6A4F"/>
-                </a:solidFill>
-                <a:latin typeface="Calibri" pitchFamily="34" charset="0"/>
-                <a:ea typeface="Calibri" pitchFamily="34" charset="-122"/>
-                <a:cs typeface="Calibri" pitchFamily="34" charset="-120"/>
-              </a:rPr>
-              <a:t>C1 (Central): NAB més alt → alta ocupació constant</a:t>
-            </a:r>
-            <a:endParaRPr lang="en-US" sz="1100" dirty="0"/>
-          </a:p>
-        </p:txBody>
-      </p:sp>
-      <p:sp>
-        <p:nvSpPr>
-          <p:cNvPr id="8" name="Shape 5">
-            <a:extLst>
-              <a:ext uri="{FF2B5EF4-FFF2-40B4-BE49-F238E27FC236}">
-                <a16:creationId xmlns:a16="http://schemas.microsoft.com/office/drawing/2014/main" id="{A3047EA8-C345-D5AC-E2D1-D7D7F140C53C}"/>
-              </a:ext>
-            </a:extLst>
-          </p:cNvPr>
-          <p:cNvSpPr/>
-          <p:nvPr/>
-        </p:nvSpPr>
-        <p:spPr>
-          <a:xfrm>
-            <a:off x="4754880" y="4297680"/>
-            <a:ext cx="3931920" cy="502920"/>
-          </a:xfrm>
-          <a:prstGeom prst="rect">
-            <a:avLst/>
-          </a:prstGeom>
-          <a:solidFill>
-            <a:srgbClr val="FBE9EA"/>
-          </a:solidFill>
-          <a:ln/>
-        </p:spPr>
-        <p:txBody>
-          <a:bodyPr/>
-          <a:lstStyle/>
-          <a:p>
-            <a:endParaRPr lang="es-ES"/>
-          </a:p>
-        </p:txBody>
-      </p:sp>
-      <p:sp>
-        <p:nvSpPr>
-          <p:cNvPr id="9" name="Text 6">
-            <a:extLst>
-              <a:ext uri="{FF2B5EF4-FFF2-40B4-BE49-F238E27FC236}">
-                <a16:creationId xmlns:a16="http://schemas.microsoft.com/office/drawing/2014/main" id="{7F2FDF5F-0E55-497F-8492-CBE6FE81AB5A}"/>
-              </a:ext>
-            </a:extLst>
-          </p:cNvPr>
-          <p:cNvSpPr/>
-          <p:nvPr/>
-        </p:nvSpPr>
-        <p:spPr>
-          <a:xfrm>
-            <a:off x="4892040" y="4297680"/>
-            <a:ext cx="3657600" cy="502920"/>
-          </a:xfrm>
-          <a:prstGeom prst="rect">
-            <a:avLst/>
-          </a:prstGeom>
-          <a:noFill/>
-          <a:ln/>
-        </p:spPr>
-        <p:txBody>
-          <a:bodyPr wrap="square" lIns="0" tIns="0" rIns="0" bIns="0" rtlCol="0" anchor="ctr"/>
-          <a:lstStyle/>
-          <a:p>
-            <a:pPr marL="0" indent="0">
-              <a:buNone/>
-            </a:pPr>
-            <a:r>
-              <a:rPr lang="en-US" sz="1100" dirty="0">
-                <a:solidFill>
-                  <a:srgbClr val="E63946"/>
-                </a:solidFill>
-                <a:latin typeface="Calibri" pitchFamily="34" charset="0"/>
-                <a:ea typeface="Calibri" pitchFamily="34" charset="-122"/>
-                <a:cs typeface="Calibri" pitchFamily="34" charset="-120"/>
-              </a:rPr>
-              <a:t>C0 (Perifèric): Ratio buida alt → prioritat de redistribució</a:t>
-            </a:r>
-            <a:endParaRPr lang="en-US" sz="1100" dirty="0"/>
-          </a:p>
-        </p:txBody>
-      </p:sp>
-      <p:sp>
-        <p:nvSpPr>
-          <p:cNvPr id="10" name="Text 7">
-            <a:extLst>
-              <a:ext uri="{FF2B5EF4-FFF2-40B4-BE49-F238E27FC236}">
-                <a16:creationId xmlns:a16="http://schemas.microsoft.com/office/drawing/2014/main" id="{11054EF1-C26D-5F79-9D17-64984B409D29}"/>
-              </a:ext>
-            </a:extLst>
-          </p:cNvPr>
-          <p:cNvSpPr/>
-          <p:nvPr/>
-        </p:nvSpPr>
-        <p:spPr>
-          <a:xfrm>
-            <a:off x="8046720" y="4800600"/>
-            <a:ext cx="914400" cy="274320"/>
-          </a:xfrm>
-          <a:prstGeom prst="rect">
-            <a:avLst/>
-          </a:prstGeom>
-          <a:noFill/>
-          <a:ln/>
-        </p:spPr>
-        <p:txBody>
-          <a:bodyPr wrap="square" rtlCol="0" anchor="ctr"/>
-          <a:lstStyle/>
-          <a:p>
-            <a:pPr marL="0" indent="0" algn="r">
-              <a:buNone/>
-            </a:pPr>
-            <a:r>
-              <a:rPr lang="en-US" sz="900" dirty="0">
-                <a:solidFill>
-                  <a:srgbClr val="868E96"/>
-                </a:solidFill>
-                <a:latin typeface="Calibri" pitchFamily="34" charset="0"/>
-                <a:ea typeface="Calibri" pitchFamily="34" charset="-122"/>
-                <a:cs typeface="Calibri" pitchFamily="34" charset="-120"/>
-              </a:rPr>
-              <a:t>9 / 12</a:t>
-            </a:r>
-            <a:endParaRPr lang="en-US" sz="900" dirty="0"/>
-          </a:p>
-        </p:txBody>
-      </p:sp>
-      <p:pic>
-        <p:nvPicPr>
-          <p:cNvPr id="11" name="Imagen 10">
-            <a:extLst>
-              <a:ext uri="{FF2B5EF4-FFF2-40B4-BE49-F238E27FC236}">
-                <a16:creationId xmlns:a16="http://schemas.microsoft.com/office/drawing/2014/main" id="{20A28836-72E4-BCA5-4D6A-F8C78FA3BE39}"/>
-              </a:ext>
-            </a:extLst>
-          </p:cNvPr>
-          <p:cNvPicPr>
-            <a:picLocks noChangeAspect="1"/>
-          </p:cNvPicPr>
-          <p:nvPr/>
-        </p:nvPicPr>
-        <p:blipFill>
-          <a:blip r:embed="rId3"/>
-          <a:stretch>
-            <a:fillRect/>
-          </a:stretch>
-        </p:blipFill>
-        <p:spPr>
-          <a:xfrm>
-            <a:off x="457200" y="1285101"/>
-            <a:ext cx="8229600" cy="2894958"/>
-          </a:xfrm>
-          <a:prstGeom prst="rect">
-            <a:avLst/>
-          </a:prstGeom>
-        </p:spPr>
-      </p:pic>
-    </p:spTree>
-    <p:extLst>
-      <p:ext uri="{BB962C8B-B14F-4D97-AF65-F5344CB8AC3E}">
-        <p14:creationId xmlns:p14="http://schemas.microsoft.com/office/powerpoint/2010/main" val="3853109670"/>
-      </p:ext>
-    </p:extLst>
   </p:cSld>
   <p:clrMapOvr>
     <a:masterClrMapping/>

--- a/SPRINT_13_Projecte_Final/Projecte_bicing.pptx
+++ b/SPRINT_13_Projecte_Final/Projecte_bicing.pptx
@@ -9529,7 +9529,7 @@
         <p:spPr>
           <a:xfrm>
             <a:off x="4443219" y="1414308"/>
-            <a:ext cx="4243579" cy="2248978"/>
+            <a:ext cx="4336373" cy="2298156"/>
           </a:xfrm>
           <a:prstGeom prst="rect">
             <a:avLst/>
